--- a/submission/presentation.pptx
+++ b/submission/presentation.pptx
@@ -2,21 +2,21 @@
 <file path=ppt/presentation.xml><?xml version="1.0" encoding="utf-8"?>
 <p:presentation xmlns:p="http://schemas.openxmlformats.org/presentationml/2006/main">
   <p:sldMasterIdLst>
-    <p:sldMasterId xmlns:r="http://schemas.openxmlformats.org/officeDocument/2006/relationships" id="2147483648" r:id="R70485e2d241c4729"/>
+    <p:sldMasterId xmlns:r="http://schemas.openxmlformats.org/officeDocument/2006/relationships" id="2147483648" r:id="R29cbc556ff4244a3"/>
   </p:sldMasterIdLst>
   <p:notesMasterIdLst>
-    <p:notesMasterId xmlns:r="http://schemas.openxmlformats.org/officeDocument/2006/relationships" r:id="Rb59f4149af864ea4"/>
+    <p:notesMasterId xmlns:r="http://schemas.openxmlformats.org/officeDocument/2006/relationships" r:id="Rf355fcba1afe4bb2"/>
   </p:notesMasterIdLst>
   <p:sldIdLst>
-    <p:sldId xmlns:r="http://schemas.openxmlformats.org/officeDocument/2006/relationships" id="256" r:id="R5706bffe6cb04934"/>
-    <p:sldId xmlns:r="http://schemas.openxmlformats.org/officeDocument/2006/relationships" id="257" r:id="Rb62cf2bab863483d"/>
-    <p:sldId xmlns:r="http://schemas.openxmlformats.org/officeDocument/2006/relationships" id="258" r:id="Rfe74b2baa29d4a19"/>
-    <p:sldId xmlns:r="http://schemas.openxmlformats.org/officeDocument/2006/relationships" id="259" r:id="Rf110537a83cc4555"/>
-    <p:sldId xmlns:r="http://schemas.openxmlformats.org/officeDocument/2006/relationships" id="260" r:id="R7f4504425228492f"/>
-    <p:sldId xmlns:r="http://schemas.openxmlformats.org/officeDocument/2006/relationships" id="261" r:id="Rf1e68dde55e54deb"/>
-    <p:sldId xmlns:r="http://schemas.openxmlformats.org/officeDocument/2006/relationships" id="262" r:id="R1acffe70ad6347fe"/>
-    <p:sldId xmlns:r="http://schemas.openxmlformats.org/officeDocument/2006/relationships" id="263" r:id="R118c95dfa1c74e44"/>
-    <p:sldId xmlns:r="http://schemas.openxmlformats.org/officeDocument/2006/relationships" id="264" r:id="R6fb27b075aa74e04"/>
+    <p:sldId xmlns:r="http://schemas.openxmlformats.org/officeDocument/2006/relationships" id="256" r:id="R20bffb519943451b"/>
+    <p:sldId xmlns:r="http://schemas.openxmlformats.org/officeDocument/2006/relationships" id="257" r:id="R2901d2a6da4144ae"/>
+    <p:sldId xmlns:r="http://schemas.openxmlformats.org/officeDocument/2006/relationships" id="258" r:id="Rb764db69f2504d2e"/>
+    <p:sldId xmlns:r="http://schemas.openxmlformats.org/officeDocument/2006/relationships" id="259" r:id="Rfee9853983fc4a07"/>
+    <p:sldId xmlns:r="http://schemas.openxmlformats.org/officeDocument/2006/relationships" id="260" r:id="Rca2e54c67ae7499a"/>
+    <p:sldId xmlns:r="http://schemas.openxmlformats.org/officeDocument/2006/relationships" id="261" r:id="Rafc00de50f77470d"/>
+    <p:sldId xmlns:r="http://schemas.openxmlformats.org/officeDocument/2006/relationships" id="262" r:id="R9d5e629144c94608"/>
+    <p:sldId xmlns:r="http://schemas.openxmlformats.org/officeDocument/2006/relationships" id="263" r:id="Ra503c51748a74842"/>
+    <p:sldId xmlns:r="http://schemas.openxmlformats.org/officeDocument/2006/relationships" id="264" r:id="Rb815466139234912"/>
   </p:sldIdLst>
   <p:sldSz cx="12192000" cy="6858000"/>
   <p:notesSz cx="6858000" cy="9144000"/>
@@ -411,814 +411,813 @@
 </file>
 
 <file path=ppt/notesSlides/notesSlide1.xml><?xml version="1.0" encoding="utf-8"?>
-<ns0:notes xmlns:ns0="http://schemas.openxmlformats.org/presentationml/2006/main" xmlns:ns1="http://schemas.openxmlformats.org/drawingml/2006/main">
-  <ns0:cSld>
-    <ns0:spTree>
-      <ns0:nvGrpSpPr>
-        <ns0:cNvPr id="1" name=""/>
-        <ns0:cNvGrpSpPr/>
-        <ns0:nvPr/>
-      </ns0:nvGrpSpPr>
-      <ns0:grpSpPr>
-        <ns1:xfrm/>
-      </ns0:grpSpPr>
-      <ns0:sp>
-        <ns0:nvSpPr>
-          <ns0:cNvPr id="2" name="Slide Image Placeholder 1"/>
-          <ns0:cNvSpPr>
-            <ns1:spLocks noGrp="1"/>
-          </ns0:cNvSpPr>
-          <ns0:nvPr>
-            <ns0:ph type="sldImg" idx="0"/>
-          </ns0:nvPr>
-        </ns0:nvSpPr>
-        <ns0:spPr/>
-      </ns0:sp>
-      <ns0:sp>
-        <ns0:nvSpPr>
-          <ns0:cNvPr id="3" name="Notes Placeholder 2"/>
-          <ns0:cNvSpPr>
-            <ns1:spLocks noGrp="1"/>
-          </ns0:cNvSpPr>
-          <ns0:nvPr>
-            <ns0:ph type="body" idx="1"/>
-          </ns0:nvPr>
-        </ns0:nvSpPr>
-        <ns0:spPr/>
-        <ns0:txBody>
-          <ns1:bodyPr/>
-          <ns1:lstStyle/>
-          <ns1:p>
-            <ns1:r>
-              <ns1:t>Opening: supplier-renewal work should benefit from AI without giving the hosted models the confidential contract worksheet or private rule bodies.</ns1:t>
-            </ns1:r>
-          </ns1:p>
-          <ns1:p>
-            <ns1:r>
-              <ns1:t/>
-            </ns1:r>
-          </ns1:p>
-          <ns1:p>
-            <ns1:r>
-              <ns1:t>Sources: .planning/PROJECT.md; .planning/phases/05-blind-workbench/05-CONTEXT.md; TEAM.md</ns1:t>
-            </ns1:r>
-          </ns1:p>
-          <ns1:p>
-            <ns1:r>
-              <ns1:t>Actual original proof date: 2026-10-04T01:29:53.383Z. New intention proof date: 2026-10-04T02:07:09.266Z. Delivered source revision: 2c3b380306f66243305ca50d77be178b1d0b46b6. Worksheet and result crops use the authenticated retained-run GET-only screenshot at 2026-10-04T05:37:55.215Z, run 360c040e-16a1-4f81-ac76-1e1ec4ef6195. The full screenshot SHA256 is 42e0ba98bbe1400677ee8f2c56ab56780ec8f68a98020287a15cc762cb5ed8cc, with app.js SHA256 506688ca6a8544d5fabecf7a12c62e9d65544809197ac6e7e716bd64e54017dc. The documentation-only F-05 follow-up changes README guidance. Code, tests and UI retain the previously checked source bytes. The latest GET-only screenshot is file- and pixel-identical to the earlier 04:59 capture. This current native UI inspection establishes no new model inference, private rebind, save or automated walkthrough. Actual original and intention proof dates above remain historical. The four automated walkthroughs and seven backup frames remain historical, with the latest walkthrough interval 2026-10-04T02:15:51.144Z to 2026-10-04T02:15:54.500Z and provisional UI hashes. Payload and controls remain later historical GET-only captures saved at 2026-10-04T02:24:32.962809Z and 2026-10-04T02:22:42.329586Z respectively. These are file-save times, not independently recorded exact capture timestamps. The 02:25 input assembly time is not a screenshot capture time. Comparison evidence remains separately dated. No new rehearsal occurred.</ns1:t>
-            </ns1:r>
-          </ns1:p>
-          <ns1:p>
-            <ns1:r>
-              <ns1:t>Disclosure: Synthetic supplier-renewal prototype. Public objective/capability descriptions and transport metadata remain disclosed. Local host/employee access is trusted. Targets are potential outcomes, never achieved savings. Current package evidence does not establish production security or formal noninterference.</ns1:t>
-            </ns1:r>
-          </ns1:p>
-        </ns0:txBody>
-      </ns0:sp>
-      <ns0:sp>
-        <ns0:nvSpPr>
-          <ns0:cNvPr id="4" name="Slide Number Placeholder 3"/>
-          <ns0:cNvSpPr>
-            <ns1:spLocks noGrp="1"/>
-          </ns0:cNvSpPr>
-          <ns0:nvPr>
-            <ns0:ph type="sldNum" idx="5"/>
-          </ns0:nvPr>
-        </ns0:nvSpPr>
-        <ns0:spPr/>
-        <ns0:txBody>
-          <ns1:bodyPr/>
-          <ns1:lstStyle/>
-          <ns1:p/>
-        </ns0:txBody>
-      </ns0:sp>
-    </ns0:spTree>
-  </ns0:cSld>
-  <ns0:clrMapOvr>
-    <ns1:masterClrMapping/>
-  </ns0:clrMapOvr>
-</ns0:notes>
+<p:notes xmlns:p="http://schemas.openxmlformats.org/presentationml/2006/main">
+  <p:cSld>
+    <p:spTree>
+      <p:nvGrpSpPr>
+        <p:cNvPr id="1" name=""/>
+        <p:cNvGrpSpPr/>
+        <p:nvPr/>
+      </p:nvGrpSpPr>
+      <p:grpSpPr>
+        <a:xfrm xmlns:a="http://schemas.openxmlformats.org/drawingml/2006/main"/>
+      </p:grpSpPr>
+      <p:sp>
+        <p:nvSpPr>
+          <p:cNvPr id="2" name="Slide Image Placeholder 1"/>
+          <p:cNvSpPr>
+            <a:spLocks xmlns:a="http://schemas.openxmlformats.org/drawingml/2006/main" noGrp="1"/>
+          </p:cNvSpPr>
+          <p:nvPr>
+            <p:ph type="sldImg" idx="0"/>
+          </p:nvPr>
+        </p:nvSpPr>
+        <p:spPr/>
+      </p:sp>
+      <p:sp>
+        <p:nvSpPr>
+          <p:cNvPr id="3" name="Notes Placeholder 2"/>
+          <p:cNvSpPr>
+            <a:spLocks xmlns:a="http://schemas.openxmlformats.org/drawingml/2006/main" noGrp="1"/>
+          </p:cNvSpPr>
+          <p:nvPr>
+            <p:ph type="body" idx="1"/>
+          </p:nvPr>
+        </p:nvSpPr>
+        <p:spPr/>
+        <p:txBody>
+          <a:bodyPr xmlns:a="http://schemas.openxmlformats.org/drawingml/2006/main"/>
+          <a:lstStyle xmlns:a="http://schemas.openxmlformats.org/drawingml/2006/main"/>
+          <a:p xmlns:a="http://schemas.openxmlformats.org/drawingml/2006/main">
+            <a:r>
+              <a:t>An employee needs to decide which supplier renewals to negotiate and what to ask for. ProofGate governs actual hosted AI composition, local private calculation and separately approved internal action.</a:t>
+            </a:r>
+          </a:p>
+          <a:p xmlns:a="http://schemas.openxmlformats.org/drawingml/2006/main">
+            <a:r>
+              <a:t/>
+            </a:r>
+          </a:p>
+          <a:p xmlns:a="http://schemas.openxmlformats.org/drawingml/2006/main">
+            <a:r>
+              <a:t>Sources: .planning/PROJECT.md; TEAM.md</a:t>
+            </a:r>
+          </a:p>
+          <a:p xmlns:a="http://schemas.openxmlformats.org/drawingml/2006/main">
+            <a:r>
+              <a:t>Retained original proof date: 2026-10-04T01:29:53.383Z. Retained intention proof date: 2026-10-04T02:07:09.266Z. Browser capture date: 2026-10-04T07:54:36.814Z. Source revision: 44c57cde5aeab97ff9bd1eaef20bbde4221b10a3. Capture scope: Current judge-story UI rendering of a consistent SQLite snapshot of the retained actual hosted run360c040e-16a1-4f81-ac76-1e1ec4ef6195. Authenticated GET-only loopback capture; model generation disabled, non-GET host routes rejected. No new inference, rebind or save. Previous public-input/control screenshots and actual composition/backup retain original dates; deployment UI banner is concurrently owned..</a:t>
+            </a:r>
+          </a:p>
+          <a:p xmlns:a="http://schemas.openxmlformats.org/drawingml/2006/main">
+            <a:r>
+              <a:t>Disclosure: Synthetic supplier-renewal prototype. Public objective/capability descriptions and transport metadata remain disclosed. Local host/employee access is trusted. Targets are potential outcomes, never achieved savings. Current package evidence does not establish production security or formal noninterference.</a:t>
+            </a:r>
+          </a:p>
+        </p:txBody>
+      </p:sp>
+      <p:sp>
+        <p:nvSpPr>
+          <p:cNvPr id="4" name="Slide Number Placeholder 3"/>
+          <p:cNvSpPr>
+            <a:spLocks xmlns:a="http://schemas.openxmlformats.org/drawingml/2006/main" noGrp="1"/>
+          </p:cNvSpPr>
+          <p:nvPr>
+            <p:ph type="sldNum" idx="5"/>
+          </p:nvPr>
+        </p:nvSpPr>
+        <p:spPr/>
+        <p:txBody>
+          <a:bodyPr xmlns:a="http://schemas.openxmlformats.org/drawingml/2006/main"/>
+          <a:lstStyle xmlns:a="http://schemas.openxmlformats.org/drawingml/2006/main"/>
+          <a:p xmlns:a="http://schemas.openxmlformats.org/drawingml/2006/main"/>
+        </p:txBody>
+      </p:sp>
+    </p:spTree>
+  </p:cSld>
+  <p:clrMapOvr>
+    <a:masterClrMapping xmlns:a="http://schemas.openxmlformats.org/drawingml/2006/main"/>
+  </p:clrMapOvr>
+</p:notes>
 </file>
 
 <file path=ppt/notesSlides/notesSlide2.xml><?xml version="1.0" encoding="utf-8"?>
-<ns0:notes xmlns:ns0="http://schemas.openxmlformats.org/presentationml/2006/main" xmlns:ns1="http://schemas.openxmlformats.org/drawingml/2006/main">
-  <ns0:cSld>
-    <ns0:spTree>
-      <ns0:nvGrpSpPr>
-        <ns0:cNvPr id="1" name=""/>
-        <ns0:cNvGrpSpPr/>
-        <ns0:nvPr/>
-      </ns0:nvGrpSpPr>
-      <ns0:grpSpPr>
-        <ns1:xfrm/>
-      </ns0:grpSpPr>
-      <ns0:sp>
-        <ns0:nvSpPr>
-          <ns0:cNvPr id="2" name="Slide Image Placeholder 1"/>
-          <ns0:cNvSpPr>
-            <ns1:spLocks noGrp="1"/>
-          </ns0:cNvSpPr>
-          <ns0:nvPr>
-            <ns0:ph type="sldImg" idx="0"/>
-          </ns0:nvPr>
-        </ns0:nvSpPr>
-        <ns0:spPr/>
-      </ns0:sp>
-      <ns0:sp>
-        <ns0:nvSpPr>
-          <ns0:cNvPr id="3" name="Notes Placeholder 2"/>
-          <ns0:cNvSpPr>
-            <ns1:spLocks noGrp="1"/>
-          </ns0:cNvSpPr>
-          <ns0:nvPr>
-            <ns0:ph type="body" idx="1"/>
-          </ns0:nvPr>
-        </ns0:nvSpPr>
-        <ns0:spPr/>
-        <ns0:txBody>
-          <ns1:bodyPr/>
-          <ns1:lstStyle/>
-          <ns1:p>
-            <ns1:r>
-              <ns1:t>A proposed quote alone does not determine a negotiation target. The company applies its confidential price ceiling and service threshold locally. All contracts shown are synthetic.</ns1:t>
-            </ns1:r>
-          </ns1:p>
-          <ns1:p>
-            <ns1:r>
-              <ns1:t/>
-            </ns1:r>
-          </ns1:p>
-          <ns1:p>
-            <ns1:r>
-              <ns1:t>Sources: src/blind.ts initialPrivate/executeRecipe; .planning/phases/05-blind-workbench/05-CONTEXT.md; current genuine worksheet capture</ns1:t>
-            </ns1:r>
-          </ns1:p>
-          <ns1:p>
-            <ns1:r>
-              <ns1:t>Actual original proof date: 2026-10-04T01:29:53.383Z. New intention proof date: 2026-10-04T02:07:09.266Z. Delivered source revision: 2c3b380306f66243305ca50d77be178b1d0b46b6. Worksheet and result crops use the authenticated retained-run GET-only screenshot at 2026-10-04T05:37:55.215Z, run 360c040e-16a1-4f81-ac76-1e1ec4ef6195. The full screenshot SHA256 is 42e0ba98bbe1400677ee8f2c56ab56780ec8f68a98020287a15cc762cb5ed8cc, with app.js SHA256 506688ca6a8544d5fabecf7a12c62e9d65544809197ac6e7e716bd64e54017dc. The documentation-only F-05 follow-up changes README guidance. Code, tests and UI retain the previously checked source bytes. The latest GET-only screenshot is file- and pixel-identical to the earlier 04:59 capture. This current native UI inspection establishes no new model inference, private rebind, save or automated walkthrough. Actual original and intention proof dates above remain historical. The four automated walkthroughs and seven backup frames remain historical, with the latest walkthrough interval 2026-10-04T02:15:51.144Z to 2026-10-04T02:15:54.500Z and provisional UI hashes. Payload and controls remain later historical GET-only captures saved at 2026-10-04T02:24:32.962809Z and 2026-10-04T02:22:42.329586Z respectively. These are file-save times, not independently recorded exact capture timestamps. The 02:25 input assembly time is not a screenshot capture time. Comparison evidence remains separately dated. No new rehearsal occurred.</ns1:t>
-            </ns1:r>
-          </ns1:p>
-          <ns1:p>
-            <ns1:r>
-              <ns1:t>Disclosure: Synthetic supplier-renewal prototype. Public objective/capability descriptions and transport metadata remain disclosed. Local host/employee access is trusted. Targets are potential outcomes, never achieved savings. Current package evidence does not establish production security or formal noninterference.</ns1:t>
-            </ns1:r>
-          </ns1:p>
-        </ns0:txBody>
-      </ns0:sp>
-      <ns0:sp>
-        <ns0:nvSpPr>
-          <ns0:cNvPr id="4" name="Slide Number Placeholder 3"/>
-          <ns0:cNvSpPr>
-            <ns1:spLocks noGrp="1"/>
-          </ns0:cNvSpPr>
-          <ns0:nvPr>
-            <ns0:ph type="sldNum" idx="5"/>
-          </ns0:nvPr>
-        </ns0:nvSpPr>
-        <ns0:spPr/>
-        <ns0:txBody>
-          <ns1:bodyPr/>
-          <ns1:lstStyle/>
-          <ns1:p/>
-        </ns0:txBody>
-      </ns0:sp>
-    </ns0:spTree>
-  </ns0:cSld>
-  <ns0:clrMapOvr>
-    <ns1:masterClrMapping/>
-  </ns0:clrMapOvr>
-</ns0:notes>
+<p:notes xmlns:p="http://schemas.openxmlformats.org/presentationml/2006/main">
+  <p:cSld>
+    <p:spTree>
+      <p:nvGrpSpPr>
+        <p:cNvPr id="1" name=""/>
+        <p:cNvGrpSpPr/>
+        <p:nvPr/>
+      </p:nvGrpSpPr>
+      <p:grpSpPr>
+        <a:xfrm xmlns:a="http://schemas.openxmlformats.org/drawingml/2006/main"/>
+      </p:grpSpPr>
+      <p:sp>
+        <p:nvSpPr>
+          <p:cNvPr id="2" name="Slide Image Placeholder 1"/>
+          <p:cNvSpPr>
+            <a:spLocks xmlns:a="http://schemas.openxmlformats.org/drawingml/2006/main" noGrp="1"/>
+          </p:cNvSpPr>
+          <p:nvPr>
+            <p:ph type="sldImg" idx="0"/>
+          </p:nvPr>
+        </p:nvSpPr>
+        <p:spPr/>
+      </p:sp>
+      <p:sp>
+        <p:nvSpPr>
+          <p:cNvPr id="3" name="Notes Placeholder 2"/>
+          <p:cNvSpPr>
+            <a:spLocks xmlns:a="http://schemas.openxmlformats.org/drawingml/2006/main" noGrp="1"/>
+          </p:cNvSpPr>
+          <p:nvPr>
+            <p:ph type="body" idx="1"/>
+          </p:nvPr>
+        </p:nvSpPr>
+        <p:spPr/>
+        <p:txBody>
+          <a:bodyPr xmlns:a="http://schemas.openxmlformats.org/drawingml/2006/main"/>
+          <a:lstStyle xmlns:a="http://schemas.openxmlformats.org/drawingml/2006/main"/>
+          <a:p xmlns:a="http://schemas.openxmlformats.org/drawingml/2006/main">
+            <a:r>
+              <a:t>The public request is within 60 days, at most two renewal negotiations, earliest renewals first. Private quotes, current prices and company thresholds decide which records qualify and what the negotiation brief says.</a:t>
+            </a:r>
+          </a:p>
+          <a:p xmlns:a="http://schemas.openxmlformats.org/drawingml/2006/main">
+            <a:r>
+              <a:t/>
+            </a:r>
+          </a:p>
+          <a:p xmlns:a="http://schemas.openxmlformats.org/drawingml/2006/main">
+            <a:r>
+              <a:t>Sources: test/blind-intent-case.json; src/blind.ts; actual intention proof</a:t>
+            </a:r>
+          </a:p>
+          <a:p xmlns:a="http://schemas.openxmlformats.org/drawingml/2006/main">
+            <a:r>
+              <a:t>Retained original proof date: 2026-10-04T01:29:53.383Z. Retained intention proof date: 2026-10-04T02:07:09.266Z. Browser capture date: 2026-10-04T07:54:36.814Z. Source revision: 44c57cde5aeab97ff9bd1eaef20bbde4221b10a3. Capture scope: Current judge-story UI rendering of a consistent SQLite snapshot of the retained actual hosted run360c040e-16a1-4f81-ac76-1e1ec4ef6195. Authenticated GET-only loopback capture; model generation disabled, non-GET host routes rejected. No new inference, rebind or save. Previous public-input/control screenshots and actual composition/backup retain original dates; deployment UI banner is concurrently owned..</a:t>
+            </a:r>
+          </a:p>
+          <a:p xmlns:a="http://schemas.openxmlformats.org/drawingml/2006/main">
+            <a:r>
+              <a:t>Disclosure: Synthetic supplier-renewal prototype. Public objective/capability descriptions and transport metadata remain disclosed. Local host/employee access is trusted. Targets are potential outcomes, never achieved savings. Current package evidence does not establish production security or formal noninterference.</a:t>
+            </a:r>
+          </a:p>
+        </p:txBody>
+      </p:sp>
+      <p:sp>
+        <p:nvSpPr>
+          <p:cNvPr id="4" name="Slide Number Placeholder 3"/>
+          <p:cNvSpPr>
+            <a:spLocks xmlns:a="http://schemas.openxmlformats.org/drawingml/2006/main" noGrp="1"/>
+          </p:cNvSpPr>
+          <p:nvPr>
+            <p:ph type="sldNum" idx="5"/>
+          </p:nvPr>
+        </p:nvSpPr>
+        <p:spPr/>
+        <p:txBody>
+          <a:bodyPr xmlns:a="http://schemas.openxmlformats.org/drawingml/2006/main"/>
+          <a:lstStyle xmlns:a="http://schemas.openxmlformats.org/drawingml/2006/main"/>
+          <a:p xmlns:a="http://schemas.openxmlformats.org/drawingml/2006/main"/>
+        </p:txBody>
+      </p:sp>
+    </p:spTree>
+  </p:cSld>
+  <p:clrMapOvr>
+    <a:masterClrMapping xmlns:a="http://schemas.openxmlformats.org/drawingml/2006/main"/>
+  </p:clrMapOvr>
+</p:notes>
 </file>
 
 <file path=ppt/notesSlides/notesSlide3.xml><?xml version="1.0" encoding="utf-8"?>
-<ns0:notes xmlns:ns0="http://schemas.openxmlformats.org/presentationml/2006/main" xmlns:ns1="http://schemas.openxmlformats.org/drawingml/2006/main">
-  <ns0:cSld>
-    <ns0:spTree>
-      <ns0:nvGrpSpPr>
-        <ns0:cNvPr id="1" name=""/>
-        <ns0:cNvGrpSpPr/>
-        <ns0:nvPr/>
-      </ns0:nvGrpSpPr>
-      <ns0:grpSpPr>
-        <ns1:xfrm/>
-      </ns0:grpSpPr>
-      <ns0:sp>
-        <ns0:nvSpPr>
-          <ns0:cNvPr id="2" name="Slide Image Placeholder 1"/>
-          <ns0:cNvSpPr>
-            <ns1:spLocks noGrp="1"/>
-          </ns0:cNvSpPr>
-          <ns0:nvPr>
-            <ns0:ph type="sldImg" idx="0"/>
-          </ns0:nvPr>
-        </ns0:nvSpPr>
-        <ns0:spPr/>
-      </ns0:sp>
-      <ns0:sp>
-        <ns0:nvSpPr>
-          <ns0:cNvPr id="3" name="Notes Placeholder 2"/>
-          <ns0:cNvSpPr>
-            <ns1:spLocks noGrp="1"/>
-          </ns0:cNvSpPr>
-          <ns0:nvPr>
-            <ns0:ph type="body" idx="1"/>
-          </ns0:nvPr>
-        </ns0:nvSpPr>
-        <ns0:spPr/>
-        <ns0:txBody>
-          <ns1:bodyPr/>
-          <ns1:lstStyle/>
-          <ns1:p>
-            <ns1:r>
-              <ns1:t>The exact public employee request was frozen before observing the model reply. Actual AI chose window60, rank soonest and limit2. The independent intention oracle expected different selected records from the two earlier prepared recipes. No superiority over forms or spreadsheets is claimed.</ns1:t>
-            </ns1:r>
-          </ns1:p>
-          <ns1:p>
-            <ns1:r>
-              <ns1:t/>
-            </ns1:r>
-          </ns1:p>
-          <ns1:p>
-            <ns1:r>
-              <ns1:t>Sources: current validated new-intention proof; pre-registered test/blind-intent-case.json</ns1:t>
-            </ns1:r>
-          </ns1:p>
-          <ns1:p>
-            <ns1:r>
-              <ns1:t>Actual original proof date: 2026-10-04T01:29:53.383Z. New intention proof date: 2026-10-04T02:07:09.266Z. Delivered source revision: 2c3b380306f66243305ca50d77be178b1d0b46b6. Worksheet and result crops use the authenticated retained-run GET-only screenshot at 2026-10-04T05:37:55.215Z, run 360c040e-16a1-4f81-ac76-1e1ec4ef6195. The full screenshot SHA256 is 42e0ba98bbe1400677ee8f2c56ab56780ec8f68a98020287a15cc762cb5ed8cc, with app.js SHA256 506688ca6a8544d5fabecf7a12c62e9d65544809197ac6e7e716bd64e54017dc. The documentation-only F-05 follow-up changes README guidance. Code, tests and UI retain the previously checked source bytes. The latest GET-only screenshot is file- and pixel-identical to the earlier 04:59 capture. This current native UI inspection establishes no new model inference, private rebind, save or automated walkthrough. Actual original and intention proof dates above remain historical. The four automated walkthroughs and seven backup frames remain historical, with the latest walkthrough interval 2026-10-04T02:15:51.144Z to 2026-10-04T02:15:54.500Z and provisional UI hashes. Payload and controls remain later historical GET-only captures saved at 2026-10-04T02:24:32.962809Z and 2026-10-04T02:22:42.329586Z respectively. These are file-save times, not independently recorded exact capture timestamps. The 02:25 input assembly time is not a screenshot capture time. Comparison evidence remains separately dated. No new rehearsal occurred.</ns1:t>
-            </ns1:r>
-          </ns1:p>
-          <ns1:p>
-            <ns1:r>
-              <ns1:t>Disclosure: Synthetic supplier-renewal prototype. Public objective/capability descriptions and transport metadata remain disclosed. Local host/employee access is trusted. Targets are potential outcomes, never achieved savings. Current package evidence does not establish production security or formal noninterference.</ns1:t>
-            </ns1:r>
-          </ns1:p>
-        </ns0:txBody>
-      </ns0:sp>
-      <ns0:sp>
-        <ns0:nvSpPr>
-          <ns0:cNvPr id="4" name="Slide Number Placeholder 3"/>
-          <ns0:cNvSpPr>
-            <ns1:spLocks noGrp="1"/>
-          </ns0:cNvSpPr>
-          <ns0:nvPr>
-            <ns0:ph type="sldNum" idx="5"/>
-          </ns0:nvPr>
-        </ns0:nvSpPr>
-        <ns0:spPr/>
-        <ns0:txBody>
-          <ns1:bodyPr/>
-          <ns1:lstStyle/>
-          <ns1:p/>
-        </ns0:txBody>
-      </ns0:sp>
-    </ns0:spTree>
-  </ns0:cSld>
-  <ns0:clrMapOvr>
-    <ns1:masterClrMapping/>
-  </ns0:clrMapOvr>
-</ns0:notes>
+<p:notes xmlns:p="http://schemas.openxmlformats.org/presentationml/2006/main">
+  <p:cSld>
+    <p:spTree>
+      <p:nvGrpSpPr>
+        <p:cNvPr id="1" name=""/>
+        <p:cNvGrpSpPr/>
+        <p:nvPr/>
+      </p:nvGrpSpPr>
+      <p:grpSpPr>
+        <a:xfrm xmlns:a="http://schemas.openxmlformats.org/drawingml/2006/main"/>
+      </p:grpSpPr>
+      <p:sp>
+        <p:nvSpPr>
+          <p:cNvPr id="2" name="Slide Image Placeholder 1"/>
+          <p:cNvSpPr>
+            <a:spLocks xmlns:a="http://schemas.openxmlformats.org/drawingml/2006/main" noGrp="1"/>
+          </p:cNvSpPr>
+          <p:nvPr>
+            <p:ph type="sldImg" idx="0"/>
+          </p:nvPr>
+        </p:nvSpPr>
+        <p:spPr/>
+      </p:sp>
+      <p:sp>
+        <p:nvSpPr>
+          <p:cNvPr id="3" name="Notes Placeholder 2"/>
+          <p:cNvSpPr>
+            <a:spLocks xmlns:a="http://schemas.openxmlformats.org/drawingml/2006/main" noGrp="1"/>
+          </p:cNvSpPr>
+          <p:nvPr>
+            <p:ph type="body" idx="1"/>
+          </p:nvPr>
+        </p:nvSpPr>
+        <p:spPr/>
+        <p:txBody>
+          <a:bodyPr xmlns:a="http://schemas.openxmlformats.org/drawingml/2006/main"/>
+          <a:lstStyle xmlns:a="http://schemas.openxmlformats.org/drawingml/2006/main"/>
+          <a:p xmlns:a="http://schemas.openxmlformats.org/drawingml/2006/main">
+            <a:r>
+              <a:t>The public request and independent expected selection were frozen before the model reply. Actual AI returned the 60-day / soonest / two method. It chooses approved operations and parameters; it does not invent an algorithm or run arbitrary code.</a:t>
+            </a:r>
+          </a:p>
+          <a:p xmlns:a="http://schemas.openxmlformats.org/drawingml/2006/main">
+            <a:r>
+              <a:t/>
+            </a:r>
+          </a:p>
+          <a:p xmlns:a="http://schemas.openxmlformats.org/drawingml/2006/main">
+            <a:r>
+              <a:t>Sources: validated actual intention proof; test/blind-intent-case.json</a:t>
+            </a:r>
+          </a:p>
+          <a:p xmlns:a="http://schemas.openxmlformats.org/drawingml/2006/main">
+            <a:r>
+              <a:t>Retained original proof date: 2026-10-04T01:29:53.383Z. Retained intention proof date: 2026-10-04T02:07:09.266Z. Browser capture date: 2026-10-04T07:54:36.814Z. Source revision: 44c57cde5aeab97ff9bd1eaef20bbde4221b10a3. Capture scope: Current judge-story UI rendering of a consistent SQLite snapshot of the retained actual hosted run360c040e-16a1-4f81-ac76-1e1ec4ef6195. Authenticated GET-only loopback capture; model generation disabled, non-GET host routes rejected. No new inference, rebind or save. Previous public-input/control screenshots and actual composition/backup retain original dates; deployment UI banner is concurrently owned..</a:t>
+            </a:r>
+          </a:p>
+          <a:p xmlns:a="http://schemas.openxmlformats.org/drawingml/2006/main">
+            <a:r>
+              <a:t>Disclosure: Synthetic supplier-renewal prototype. Public objective/capability descriptions and transport metadata remain disclosed. Local host/employee access is trusted. Targets are potential outcomes, never achieved savings. Current package evidence does not establish production security or formal noninterference.</a:t>
+            </a:r>
+          </a:p>
+        </p:txBody>
+      </p:sp>
+      <p:sp>
+        <p:nvSpPr>
+          <p:cNvPr id="4" name="Slide Number Placeholder 3"/>
+          <p:cNvSpPr>
+            <a:spLocks xmlns:a="http://schemas.openxmlformats.org/drawingml/2006/main" noGrp="1"/>
+          </p:cNvSpPr>
+          <p:nvPr>
+            <p:ph type="sldNum" idx="5"/>
+          </p:nvPr>
+        </p:nvSpPr>
+        <p:spPr/>
+        <p:txBody>
+          <a:bodyPr xmlns:a="http://schemas.openxmlformats.org/drawingml/2006/main"/>
+          <a:lstStyle xmlns:a="http://schemas.openxmlformats.org/drawingml/2006/main"/>
+          <a:p xmlns:a="http://schemas.openxmlformats.org/drawingml/2006/main"/>
+        </p:txBody>
+      </p:sp>
+    </p:spTree>
+  </p:cSld>
+  <p:clrMapOvr>
+    <a:masterClrMapping xmlns:a="http://schemas.openxmlformats.org/drawingml/2006/main"/>
+  </p:clrMapOvr>
+</p:notes>
 </file>
 
 <file path=ppt/notesSlides/notesSlide4.xml><?xml version="1.0" encoding="utf-8"?>
-<ns0:notes xmlns:ns0="http://schemas.openxmlformats.org/presentationml/2006/main" xmlns:ns1="http://schemas.openxmlformats.org/drawingml/2006/main">
-  <ns0:cSld>
-    <ns0:spTree>
-      <ns0:nvGrpSpPr>
-        <ns0:cNvPr id="1" name=""/>
-        <ns0:cNvGrpSpPr/>
-        <ns0:nvPr/>
-      </ns0:nvGrpSpPr>
-      <ns0:grpSpPr>
-        <ns1:xfrm/>
-      </ns0:grpSpPr>
-      <ns0:sp>
-        <ns0:nvSpPr>
-          <ns0:cNvPr id="2" name="Slide Image Placeholder 1"/>
-          <ns0:cNvSpPr>
-            <ns1:spLocks noGrp="1"/>
-          </ns0:cNvSpPr>
-          <ns0:nvPr>
-            <ns0:ph type="sldImg" idx="0"/>
-          </ns0:nvPr>
-        </ns0:nvSpPr>
-        <ns0:spPr/>
-      </ns0:sp>
-      <ns0:sp>
-        <ns0:nvSpPr>
-          <ns0:cNvPr id="3" name="Notes Placeholder 2"/>
-          <ns0:cNvSpPr>
-            <ns1:spLocks noGrp="1"/>
-          </ns0:cNvSpPr>
-          <ns0:nvPr>
-            <ns0:ph type="body" idx="1"/>
-          </ns0:nvPr>
-        </ns0:nvSpPr>
-        <ns0:spPr/>
-        <ns0:txBody>
-          <ns1:bodyPr/>
-          <ns1:lstStyle/>
-          <ns1:p>
-            <ns1:r>
-              <ns1:t>Actual new-intention proof changes independently expected potential savings from $130 to $1,060 in synthetic USD. Private quotes and price rule change. Selected records change from Near/Middle to Middle/Large. Retained actual public bodies, constructors and charged ledger remain identical during the local rebind. Separate save charges are retained. This is a potential negotiation outcome.</ns1:t>
-            </ns1:r>
-          </ns1:p>
-          <ns1:p>
-            <ns1:r>
-              <ns1:t/>
-            </ns1:r>
-          </ns1:p>
-          <ns1:p>
-            <ns1:r>
-              <ns1:t>Sources: current proof.objectives negotiation-savings rebind; current new-intention proof when supplied; actual current hero browser screenshot</ns1:t>
-            </ns1:r>
-          </ns1:p>
-          <ns1:p>
-            <ns1:r>
-              <ns1:t>Actual original proof date: 2026-10-04T01:29:53.383Z. New intention proof date: 2026-10-04T02:07:09.266Z. Delivered source revision: 2c3b380306f66243305ca50d77be178b1d0b46b6. Worksheet and result crops use the authenticated retained-run GET-only screenshot at 2026-10-04T05:37:55.215Z, run 360c040e-16a1-4f81-ac76-1e1ec4ef6195. The full screenshot SHA256 is 42e0ba98bbe1400677ee8f2c56ab56780ec8f68a98020287a15cc762cb5ed8cc, with app.js SHA256 506688ca6a8544d5fabecf7a12c62e9d65544809197ac6e7e716bd64e54017dc. The documentation-only F-05 follow-up changes README guidance. Code, tests and UI retain the previously checked source bytes. The latest GET-only screenshot is file- and pixel-identical to the earlier 04:59 capture. This current native UI inspection establishes no new model inference, private rebind, save or automated walkthrough. Actual original and intention proof dates above remain historical. The four automated walkthroughs and seven backup frames remain historical, with the latest walkthrough interval 2026-10-04T02:15:51.144Z to 2026-10-04T02:15:54.500Z and provisional UI hashes. Payload and controls remain later historical GET-only captures saved at 2026-10-04T02:24:32.962809Z and 2026-10-04T02:22:42.329586Z respectively. These are file-save times, not independently recorded exact capture timestamps. The 02:25 input assembly time is not a screenshot capture time. Comparison evidence remains separately dated. No new rehearsal occurred.</ns1:t>
-            </ns1:r>
-          </ns1:p>
-          <ns1:p>
-            <ns1:r>
-              <ns1:t>Disclosure: Synthetic supplier-renewal prototype. Public objective/capability descriptions and transport metadata remain disclosed. Local host/employee access is trusted. Targets are potential outcomes, never achieved savings. Current package evidence does not establish production security or formal noninterference.</ns1:t>
-            </ns1:r>
-          </ns1:p>
-        </ns0:txBody>
-      </ns0:sp>
-      <ns0:sp>
-        <ns0:nvSpPr>
-          <ns0:cNvPr id="4" name="Slide Number Placeholder 3"/>
-          <ns0:cNvSpPr>
-            <ns1:spLocks noGrp="1"/>
-          </ns0:cNvSpPr>
-          <ns0:nvPr>
-            <ns0:ph type="sldNum" idx="5"/>
-          </ns0:nvPr>
-        </ns0:nvSpPr>
-        <ns0:spPr/>
-        <ns0:txBody>
-          <ns1:bodyPr/>
-          <ns1:lstStyle/>
-          <ns1:p/>
-        </ns0:txBody>
-      </ns0:sp>
-    </ns0:spTree>
-  </ns0:cSld>
-  <ns0:clrMapOvr>
-    <ns1:masterClrMapping/>
-  </ns0:clrMapOvr>
-</ns0:notes>
+<p:notes xmlns:p="http://schemas.openxmlformats.org/presentationml/2006/main">
+  <p:cSld>
+    <p:spTree>
+      <p:nvGrpSpPr>
+        <p:cNvPr id="1" name=""/>
+        <p:cNvGrpSpPr/>
+        <p:nvPr/>
+      </p:nvGrpSpPr>
+      <p:grpSpPr>
+        <a:xfrm xmlns:a="http://schemas.openxmlformats.org/drawingml/2006/main"/>
+      </p:grpSpPr>
+      <p:sp>
+        <p:nvSpPr>
+          <p:cNvPr id="2" name="Slide Image Placeholder 1"/>
+          <p:cNvSpPr>
+            <a:spLocks xmlns:a="http://schemas.openxmlformats.org/drawingml/2006/main" noGrp="1"/>
+          </p:cNvSpPr>
+          <p:nvPr>
+            <p:ph type="sldImg" idx="0"/>
+          </p:nvPr>
+        </p:nvSpPr>
+        <p:spPr/>
+      </p:sp>
+      <p:sp>
+        <p:nvSpPr>
+          <p:cNvPr id="3" name="Notes Placeholder 2"/>
+          <p:cNvSpPr>
+            <a:spLocks xmlns:a="http://schemas.openxmlformats.org/drawingml/2006/main" noGrp="1"/>
+          </p:cNvSpPr>
+          <p:nvPr>
+            <p:ph type="body" idx="1"/>
+          </p:nvPr>
+        </p:nvSpPr>
+        <p:spPr/>
+        <p:txBody>
+          <a:bodyPr xmlns:a="http://schemas.openxmlformats.org/drawingml/2006/main"/>
+          <a:lstStyle xmlns:a="http://schemas.openxmlformats.org/drawingml/2006/main"/>
+          <a:p xmlns:a="http://schemas.openxmlformats.org/drawingml/2006/main">
+            <a:r>
+              <a:t>Independent expected results change from Near/Middle to Middle/Large after private quote and price-rule changes. The retained admitted method and captured application bodies stay unchanged. Rebind adds zero provider attempts. The current screenshot observes a retained result and historical save; it establishes no new inference, rebind or save.</a:t>
+            </a:r>
+          </a:p>
+          <a:p xmlns:a="http://schemas.openxmlformats.org/drawingml/2006/main">
+            <a:r>
+              <a:t/>
+            </a:r>
+          </a:p>
+          <a:p xmlns:a="http://schemas.openxmlformats.org/drawingml/2006/main">
+            <a:r>
+              <a:t>Sources: validated actual intention rebind; genuine retained-run GET result capture</a:t>
+            </a:r>
+          </a:p>
+          <a:p xmlns:a="http://schemas.openxmlformats.org/drawingml/2006/main">
+            <a:r>
+              <a:t>Retained original proof date: 2026-10-04T01:29:53.383Z. Retained intention proof date: 2026-10-04T02:07:09.266Z. Browser capture date: 2026-10-04T07:54:36.814Z. Source revision: 44c57cde5aeab97ff9bd1eaef20bbde4221b10a3. Capture scope: Current judge-story UI rendering of a consistent SQLite snapshot of the retained actual hosted run360c040e-16a1-4f81-ac76-1e1ec4ef6195. Authenticated GET-only loopback capture; model generation disabled, non-GET host routes rejected. No new inference, rebind or save. Previous public-input/control screenshots and actual composition/backup retain original dates; deployment UI banner is concurrently owned..</a:t>
+            </a:r>
+          </a:p>
+          <a:p xmlns:a="http://schemas.openxmlformats.org/drawingml/2006/main">
+            <a:r>
+              <a:t>Disclosure: Synthetic supplier-renewal prototype. Public objective/capability descriptions and transport metadata remain disclosed. Local host/employee access is trusted. Targets are potential outcomes, never achieved savings. Current package evidence does not establish production security or formal noninterference.</a:t>
+            </a:r>
+          </a:p>
+        </p:txBody>
+      </p:sp>
+      <p:sp>
+        <p:nvSpPr>
+          <p:cNvPr id="4" name="Slide Number Placeholder 3"/>
+          <p:cNvSpPr>
+            <a:spLocks xmlns:a="http://schemas.openxmlformats.org/drawingml/2006/main" noGrp="1"/>
+          </p:cNvSpPr>
+          <p:nvPr>
+            <p:ph type="sldNum" idx="5"/>
+          </p:nvPr>
+        </p:nvSpPr>
+        <p:spPr/>
+        <p:txBody>
+          <a:bodyPr xmlns:a="http://schemas.openxmlformats.org/drawingml/2006/main"/>
+          <a:lstStyle xmlns:a="http://schemas.openxmlformats.org/drawingml/2006/main"/>
+          <a:p xmlns:a="http://schemas.openxmlformats.org/drawingml/2006/main"/>
+        </p:txBody>
+      </p:sp>
+    </p:spTree>
+  </p:cSld>
+  <p:clrMapOvr>
+    <a:masterClrMapping xmlns:a="http://schemas.openxmlformats.org/drawingml/2006/main"/>
+  </p:clrMapOvr>
+</p:notes>
 </file>
 
 <file path=ppt/notesSlides/notesSlide5.xml><?xml version="1.0" encoding="utf-8"?>
-<ns0:notes xmlns:ns0="http://schemas.openxmlformats.org/presentationml/2006/main" xmlns:ns1="http://schemas.openxmlformats.org/drawingml/2006/main">
-  <ns0:cSld>
-    <ns0:spTree>
-      <ns0:nvGrpSpPr>
-        <ns0:cNvPr id="1" name=""/>
-        <ns0:cNvGrpSpPr/>
-        <ns0:nvPr/>
-      </ns0:nvGrpSpPr>
-      <ns0:grpSpPr>
-        <ns1:xfrm/>
-      </ns0:grpSpPr>
-      <ns0:sp>
-        <ns0:nvSpPr>
-          <ns0:cNvPr id="2" name="Slide Image Placeholder 1"/>
-          <ns0:cNvSpPr>
-            <ns1:spLocks noGrp="1"/>
-          </ns0:cNvSpPr>
-          <ns0:nvPr>
-            <ns0:ph type="sldImg" idx="0"/>
-          </ns0:nvPr>
-        </ns0:nvSpPr>
-        <ns0:spPr/>
-      </ns0:sp>
-      <ns0:sp>
-        <ns0:nvSpPr>
-          <ns0:cNvPr id="3" name="Notes Placeholder 2"/>
-          <ns0:cNvSpPr>
-            <ns1:spLocks noGrp="1"/>
-          </ns0:cNvSpPr>
-          <ns0:nvPr>
-            <ns0:ph type="body" idx="1"/>
-          </ns0:nvPr>
-        </ns0:nvSpPr>
-        <ns0:spPr/>
-        <ns0:txBody>
-          <ns1:bodyPr/>
-          <ns1:lstStyle/>
-          <ns1:p>
-            <ns1:r>
-              <ns1:t>The authenticated host sends only public objective/capabilities/admitted advisory or recipe to hosted stateless models. Advisory inspection precedes planner exposure. Whole recipe validation and semantic admission precede private access. A retained admitted recipe executes locally. A separate employee-approved typed MCP internal save uses independent SQLite read-back. All traffic shares current policy and the retained allowance.</ns1:t>
-            </ns1:r>
-          </ns1:p>
-          <ns1:p>
-            <ns1:r>
-              <ns1:t/>
-            </ns1:r>
-          </ns1:p>
-          <ns1:p>
-            <ns1:r>
-              <ns1:t>Sources: src/blind.ts; src/prompt-profiles.ts; src/model.ts; src/host.ts; fixture/blind-server.ts; fixture/blind-store.ts</ns1:t>
-            </ns1:r>
-          </ns1:p>
-          <ns1:p>
-            <ns1:r>
-              <ns1:t>Actual original proof date: 2026-10-04T01:29:53.383Z. New intention proof date: 2026-10-04T02:07:09.266Z. Delivered source revision: 2c3b380306f66243305ca50d77be178b1d0b46b6. Worksheet and result crops use the authenticated retained-run GET-only screenshot at 2026-10-04T05:37:55.215Z, run 360c040e-16a1-4f81-ac76-1e1ec4ef6195. The full screenshot SHA256 is 42e0ba98bbe1400677ee8f2c56ab56780ec8f68a98020287a15cc762cb5ed8cc, with app.js SHA256 506688ca6a8544d5fabecf7a12c62e9d65544809197ac6e7e716bd64e54017dc. The documentation-only F-05 follow-up changes README guidance. Code, tests and UI retain the previously checked source bytes. The latest GET-only screenshot is file- and pixel-identical to the earlier 04:59 capture. This current native UI inspection establishes no new model inference, private rebind, save or automated walkthrough. Actual original and intention proof dates above remain historical. The four automated walkthroughs and seven backup frames remain historical, with the latest walkthrough interval 2026-10-04T02:15:51.144Z to 2026-10-04T02:15:54.500Z and provisional UI hashes. Payload and controls remain later historical GET-only captures saved at 2026-10-04T02:24:32.962809Z and 2026-10-04T02:22:42.329586Z respectively. These are file-save times, not independently recorded exact capture timestamps. The 02:25 input assembly time is not a screenshot capture time. Comparison evidence remains separately dated. No new rehearsal occurred.</ns1:t>
-            </ns1:r>
-          </ns1:p>
-          <ns1:p>
-            <ns1:r>
-              <ns1:t>Disclosure: Synthetic supplier-renewal prototype. Public objective/capability descriptions and transport metadata remain disclosed. Local host/employee access is trusted. Targets are potential outcomes, never achieved savings. Current package evidence does not establish production security or formal noninterference.</ns1:t>
-            </ns1:r>
-          </ns1:p>
-        </ns0:txBody>
-      </ns0:sp>
-      <ns0:sp>
-        <ns0:nvSpPr>
-          <ns0:cNvPr id="4" name="Slide Number Placeholder 3"/>
-          <ns0:cNvSpPr>
-            <ns1:spLocks noGrp="1"/>
-          </ns0:cNvSpPr>
-          <ns0:nvPr>
-            <ns0:ph type="sldNum" idx="5"/>
-          </ns0:nvPr>
-        </ns0:nvSpPr>
-        <ns0:spPr/>
-        <ns0:txBody>
-          <ns1:bodyPr/>
-          <ns1:lstStyle/>
-          <ns1:p/>
-        </ns0:txBody>
-      </ns0:sp>
-    </ns0:spTree>
-  </ns0:cSld>
-  <ns0:clrMapOvr>
-    <ns1:masterClrMapping/>
-  </ns0:clrMapOvr>
-</ns0:notes>
+<p:notes xmlns:p="http://schemas.openxmlformats.org/presentationml/2006/main">
+  <p:cSld>
+    <p:spTree>
+      <p:nvGrpSpPr>
+        <p:cNvPr id="1" name=""/>
+        <p:cNvGrpSpPr/>
+        <p:nvPr/>
+      </p:nvGrpSpPr>
+      <p:grpSpPr>
+        <a:xfrm xmlns:a="http://schemas.openxmlformats.org/drawingml/2006/main"/>
+      </p:grpSpPr>
+      <p:sp>
+        <p:nvSpPr>
+          <p:cNvPr id="2" name="Slide Image Placeholder 1"/>
+          <p:cNvSpPr>
+            <a:spLocks xmlns:a="http://schemas.openxmlformats.org/drawingml/2006/main" noGrp="1"/>
+          </p:cNvSpPr>
+          <p:nvPr>
+            <p:ph type="sldImg" idx="0"/>
+          </p:nvPr>
+        </p:nvSpPr>
+        <p:spPr/>
+      </p:sp>
+      <p:sp>
+        <p:nvSpPr>
+          <p:cNvPr id="3" name="Notes Placeholder 2"/>
+          <p:cNvSpPr>
+            <a:spLocks xmlns:a="http://schemas.openxmlformats.org/drawingml/2006/main" noGrp="1"/>
+          </p:cNvSpPr>
+          <p:nvPr>
+            <p:ph type="body" idx="1"/>
+          </p:nvPr>
+        </p:nvSpPr>
+        <p:spPr/>
+        <p:txBody>
+          <a:bodyPr xmlns:a="http://schemas.openxmlformats.org/drawingml/2006/main"/>
+          <a:lstStyle xmlns:a="http://schemas.openxmlformats.org/drawingml/2006/main"/>
+          <a:p xmlns:a="http://schemas.openxmlformats.org/drawingml/2006/main">
+            <a:r>
+              <a:t>The hosted checker inspects the advisory before planner exposure and the full method before private access. Deterministic schemas/dependencies/current policy AND actual AI semantic inspection must permit the work. The local host then applies private facts. A separate typed internal-save action uses independent read-back. Authentication, actor, checker and tools share a finite allowance.</a:t>
+            </a:r>
+          </a:p>
+          <a:p xmlns:a="http://schemas.openxmlformats.org/drawingml/2006/main">
+            <a:r>
+              <a:t/>
+            </a:r>
+          </a:p>
+          <a:p xmlns:a="http://schemas.openxmlformats.org/drawingml/2006/main">
+            <a:r>
+              <a:t>Sources: src/blind.ts; src/prompt-profiles.ts; src/model.ts; src/host.ts; fixture/blind-server.ts; fixture/blind-store.ts</a:t>
+            </a:r>
+          </a:p>
+          <a:p xmlns:a="http://schemas.openxmlformats.org/drawingml/2006/main">
+            <a:r>
+              <a:t>Retained original proof date: 2026-10-04T01:29:53.383Z. Retained intention proof date: 2026-10-04T02:07:09.266Z. Browser capture date: 2026-10-04T07:54:36.814Z. Source revision: 44c57cde5aeab97ff9bd1eaef20bbde4221b10a3. Capture scope: Current judge-story UI rendering of a consistent SQLite snapshot of the retained actual hosted run360c040e-16a1-4f81-ac76-1e1ec4ef6195. Authenticated GET-only loopback capture; model generation disabled, non-GET host routes rejected. No new inference, rebind or save. Previous public-input/control screenshots and actual composition/backup retain original dates; deployment UI banner is concurrently owned..</a:t>
+            </a:r>
+          </a:p>
+          <a:p xmlns:a="http://schemas.openxmlformats.org/drawingml/2006/main">
+            <a:r>
+              <a:t>Disclosure: Synthetic supplier-renewal prototype. Public objective/capability descriptions and transport metadata remain disclosed. Local host/employee access is trusted. Targets are potential outcomes, never achieved savings. Current package evidence does not establish production security or formal noninterference.</a:t>
+            </a:r>
+          </a:p>
+        </p:txBody>
+      </p:sp>
+      <p:sp>
+        <p:nvSpPr>
+          <p:cNvPr id="4" name="Slide Number Placeholder 3"/>
+          <p:cNvSpPr>
+            <a:spLocks xmlns:a="http://schemas.openxmlformats.org/drawingml/2006/main" noGrp="1"/>
+          </p:cNvSpPr>
+          <p:nvPr>
+            <p:ph type="sldNum" idx="5"/>
+          </p:nvPr>
+        </p:nvSpPr>
+        <p:spPr/>
+        <p:txBody>
+          <a:bodyPr xmlns:a="http://schemas.openxmlformats.org/drawingml/2006/main"/>
+          <a:lstStyle xmlns:a="http://schemas.openxmlformats.org/drawingml/2006/main"/>
+          <a:p xmlns:a="http://schemas.openxmlformats.org/drawingml/2006/main"/>
+        </p:txBody>
+      </p:sp>
+    </p:spTree>
+  </p:cSld>
+  <p:clrMapOvr>
+    <a:masterClrMapping xmlns:a="http://schemas.openxmlformats.org/drawingml/2006/main"/>
+  </p:clrMapOvr>
+</p:notes>
 </file>
 
 <file path=ppt/notesSlides/notesSlide6.xml><?xml version="1.0" encoding="utf-8"?>
-<ns0:notes xmlns:ns0="http://schemas.openxmlformats.org/presentationml/2006/main" xmlns:ns1="http://schemas.openxmlformats.org/drawingml/2006/main">
-  <ns0:cSld>
-    <ns0:spTree>
-      <ns0:nvGrpSpPr>
-        <ns0:cNvPr id="1" name=""/>
-        <ns0:cNvGrpSpPr/>
-        <ns0:nvPr/>
-      </ns0:nvGrpSpPr>
-      <ns0:grpSpPr>
-        <ns1:xfrm/>
-      </ns0:grpSpPr>
-      <ns0:sp>
-        <ns0:nvSpPr>
-          <ns0:cNvPr id="2" name="Slide Image Placeholder 1"/>
-          <ns0:cNvSpPr>
-            <ns1:spLocks noGrp="1"/>
-          </ns0:cNvSpPr>
-          <ns0:nvPr>
-            <ns0:ph type="sldImg" idx="0"/>
-          </ns0:nvPr>
-        </ns0:nvSpPr>
-        <ns0:spPr/>
-      </ns0:sp>
-      <ns0:sp>
-        <ns0:nvSpPr>
-          <ns0:cNvPr id="3" name="Notes Placeholder 2"/>
-          <ns0:cNvSpPr>
-            <ns1:spLocks noGrp="1"/>
-          </ns0:cNvSpPr>
-          <ns0:nvPr>
-            <ns0:ph type="body" idx="1"/>
-          </ns0:nvPr>
-        </ns0:nvSpPr>
-        <ns0:spPr/>
-        <ns0:txBody>
-          <ns1:bodyPr/>
-          <ns1:lstStyle/>
-          <ns1:p>
-            <ns1:r>
-              <ns1:t>These are actual serialized generateContent application bodies captured at the metered hosted SDK dispatch boundary. Constructor specimens are separate and are not wire evidence. Public objective/capabilities/advisory/recipe remain disclosed. Headers/OAuth are omitted from the capture and transport metadata remains disclosed. This bounded inspection does not establish formal noninterference or conceal all metadata.</ns1:t>
-            </ns1:r>
-          </ns1:p>
-          <ns1:p>
-            <ns1:r>
-              <ns1:t/>
-            </ns1:r>
-          </ns1:p>
-          <ns1:p>
-            <ns1:r>
-              <ns1:t>Sources: current proof.observations[].evidence.captures; src/prompt-profiles.ts validatePublicApplicationBody; current payload browser capture</ns1:t>
-            </ns1:r>
-          </ns1:p>
-          <ns1:p>
-            <ns1:r>
-              <ns1:t>Actual original proof date: 2026-10-04T01:29:53.383Z. New intention proof date: 2026-10-04T02:07:09.266Z. Delivered source revision: 2c3b380306f66243305ca50d77be178b1d0b46b6. Worksheet and result crops use the authenticated retained-run GET-only screenshot at 2026-10-04T05:37:55.215Z, run 360c040e-16a1-4f81-ac76-1e1ec4ef6195. The full screenshot SHA256 is 42e0ba98bbe1400677ee8f2c56ab56780ec8f68a98020287a15cc762cb5ed8cc, with app.js SHA256 506688ca6a8544d5fabecf7a12c62e9d65544809197ac6e7e716bd64e54017dc. The documentation-only F-05 follow-up changes README guidance. Code, tests and UI retain the previously checked source bytes. The latest GET-only screenshot is file- and pixel-identical to the earlier 04:59 capture. This current native UI inspection establishes no new model inference, private rebind, save or automated walkthrough. Actual original and intention proof dates above remain historical. The four automated walkthroughs and seven backup frames remain historical, with the latest walkthrough interval 2026-10-04T02:15:51.144Z to 2026-10-04T02:15:54.500Z and provisional UI hashes. Payload and controls remain later historical GET-only captures saved at 2026-10-04T02:24:32.962809Z and 2026-10-04T02:22:42.329586Z respectively. These are file-save times, not independently recorded exact capture timestamps. The 02:25 input assembly time is not a screenshot capture time. Comparison evidence remains separately dated. No new rehearsal occurred.</ns1:t>
-            </ns1:r>
-          </ns1:p>
-          <ns1:p>
-            <ns1:r>
-              <ns1:t>Disclosure: Synthetic supplier-renewal prototype. Public objective/capability descriptions and transport metadata remain disclosed. Local host/employee access is trusted. Targets are potential outcomes, never achieved savings. Current package evidence does not establish production security or formal noninterference.</ns1:t>
-            </ns1:r>
-          </ns1:p>
-        </ns0:txBody>
-      </ns0:sp>
-      <ns0:sp>
-        <ns0:nvSpPr>
-          <ns0:cNvPr id="4" name="Slide Number Placeholder 3"/>
-          <ns0:cNvSpPr>
-            <ns1:spLocks noGrp="1"/>
-          </ns0:cNvSpPr>
-          <ns0:nvPr>
-            <ns0:ph type="sldNum" idx="5"/>
-          </ns0:nvPr>
-        </ns0:nvSpPr>
-        <ns0:spPr/>
-        <ns0:txBody>
-          <ns1:bodyPr/>
-          <ns1:lstStyle/>
-          <ns1:p/>
-        </ns0:txBody>
-      </ns0:sp>
-    </ns0:spTree>
-  </ns0:cSld>
-  <ns0:clrMapOvr>
-    <ns1:masterClrMapping/>
-  </ns0:clrMapOvr>
-</ns0:notes>
+<p:notes xmlns:p="http://schemas.openxmlformats.org/presentationml/2006/main">
+  <p:cSld>
+    <p:spTree>
+      <p:nvGrpSpPr>
+        <p:cNvPr id="1" name=""/>
+        <p:cNvGrpSpPr/>
+        <p:nvPr/>
+      </p:nvGrpSpPr>
+      <p:grpSpPr>
+        <a:xfrm xmlns:a="http://schemas.openxmlformats.org/drawingml/2006/main"/>
+      </p:grpSpPr>
+      <p:sp>
+        <p:nvSpPr>
+          <p:cNvPr id="2" name="Slide Image Placeholder 1"/>
+          <p:cNvSpPr>
+            <a:spLocks xmlns:a="http://schemas.openxmlformats.org/drawingml/2006/main" noGrp="1"/>
+          </p:cNvSpPr>
+          <p:nvPr>
+            <p:ph type="sldImg" idx="0"/>
+          </p:nvPr>
+        </p:nvSpPr>
+        <p:spPr/>
+      </p:sp>
+      <p:sp>
+        <p:nvSpPr>
+          <p:cNvPr id="3" name="Notes Placeholder 2"/>
+          <p:cNvSpPr>
+            <a:spLocks xmlns:a="http://schemas.openxmlformats.org/drawingml/2006/main" noGrp="1"/>
+          </p:cNvSpPr>
+          <p:nvPr>
+            <p:ph type="body" idx="1"/>
+          </p:nvPr>
+        </p:nvSpPr>
+        <p:spPr/>
+        <p:txBody>
+          <a:bodyPr xmlns:a="http://schemas.openxmlformats.org/drawingml/2006/main"/>
+          <a:lstStyle xmlns:a="http://schemas.openxmlformats.org/drawingml/2006/main"/>
+          <a:p xmlns:a="http://schemas.openxmlformats.org/drawingml/2006/main">
+            <a:r>
+              <a:t>Actual serialized application bodies are captured at metered SDK dispatch. They are different from constructor specimens. The public task, capabilities, admitted advisory and recipe are disclosed. Headers/OAuth are omitted and transport metadata remains disclosed. Local host and employee access are trusted. No arbitrary-secret or formal confidentiality proof is claimed.</a:t>
+            </a:r>
+          </a:p>
+          <a:p xmlns:a="http://schemas.openxmlformats.org/drawingml/2006/main">
+            <a:r>
+              <a:t/>
+            </a:r>
+          </a:p>
+          <a:p xmlns:a="http://schemas.openxmlformats.org/drawingml/2006/main">
+            <a:r>
+              <a:t>Sources: actual SDK dispatch captures; src/prompt-profiles.ts; dated payload capture</a:t>
+            </a:r>
+          </a:p>
+          <a:p xmlns:a="http://schemas.openxmlformats.org/drawingml/2006/main">
+            <a:r>
+              <a:t>Retained original proof date: 2026-10-04T01:29:53.383Z. Retained intention proof date: 2026-10-04T02:07:09.266Z. Browser capture date: 2026-10-04T07:54:36.814Z. Source revision: 44c57cde5aeab97ff9bd1eaef20bbde4221b10a3. Capture scope: Current judge-story UI rendering of a consistent SQLite snapshot of the retained actual hosted run360c040e-16a1-4f81-ac76-1e1ec4ef6195. Authenticated GET-only loopback capture; model generation disabled, non-GET host routes rejected. No new inference, rebind or save. Previous public-input/control screenshots and actual composition/backup retain original dates; deployment UI banner is concurrently owned..</a:t>
+            </a:r>
+          </a:p>
+          <a:p xmlns:a="http://schemas.openxmlformats.org/drawingml/2006/main">
+            <a:r>
+              <a:t>Disclosure: Synthetic supplier-renewal prototype. Public objective/capability descriptions and transport metadata remain disclosed. Local host/employee access is trusted. Targets are potential outcomes, never achieved savings. Current package evidence does not establish production security or formal noninterference.</a:t>
+            </a:r>
+          </a:p>
+        </p:txBody>
+      </p:sp>
+      <p:sp>
+        <p:nvSpPr>
+          <p:cNvPr id="4" name="Slide Number Placeholder 3"/>
+          <p:cNvSpPr>
+            <a:spLocks xmlns:a="http://schemas.openxmlformats.org/drawingml/2006/main" noGrp="1"/>
+          </p:cNvSpPr>
+          <p:nvPr>
+            <p:ph type="sldNum" idx="5"/>
+          </p:nvPr>
+        </p:nvSpPr>
+        <p:spPr/>
+        <p:txBody>
+          <a:bodyPr xmlns:a="http://schemas.openxmlformats.org/drawingml/2006/main"/>
+          <a:lstStyle xmlns:a="http://schemas.openxmlformats.org/drawingml/2006/main"/>
+          <a:p xmlns:a="http://schemas.openxmlformats.org/drawingml/2006/main"/>
+        </p:txBody>
+      </p:sp>
+    </p:spTree>
+  </p:cSld>
+  <p:clrMapOvr>
+    <a:masterClrMapping xmlns:a="http://schemas.openxmlformats.org/drawingml/2006/main"/>
+  </p:clrMapOvr>
+</p:notes>
 </file>
 
 <file path=ppt/notesSlides/notesSlide7.xml><?xml version="1.0" encoding="utf-8"?>
-<ns0:notes xmlns:ns0="http://schemas.openxmlformats.org/presentationml/2006/main" xmlns:ns1="http://schemas.openxmlformats.org/drawingml/2006/main">
-  <ns0:cSld>
-    <ns0:spTree>
-      <ns0:nvGrpSpPr>
-        <ns0:cNvPr id="1" name=""/>
-        <ns0:cNvGrpSpPr/>
-        <ns0:nvPr/>
-      </ns0:nvGrpSpPr>
-      <ns0:grpSpPr>
-        <ns1:xfrm/>
-      </ns0:grpSpPr>
-      <ns0:sp>
-        <ns0:nvSpPr>
-          <ns0:cNvPr id="2" name="Slide Image Placeholder 1"/>
-          <ns0:cNvSpPr>
-            <ns1:spLocks noGrp="1"/>
-          </ns0:cNvSpPr>
-          <ns0:nvPr>
-            <ns0:ph type="sldImg" idx="0"/>
-          </ns0:nvPr>
-        </ns0:nvSpPr>
-        <ns0:spPr/>
-      </ns0:sp>
-      <ns0:sp>
-        <ns0:nvSpPr>
-          <ns0:cNvPr id="3" name="Notes Placeholder 2"/>
-          <ns0:cNvSpPr>
-            <ns1:spLocks noGrp="1"/>
-          </ns0:cNvSpPr>
-          <ns0:nvPr>
-            <ns0:ph type="body" idx="1"/>
-          </ns0:nvPr>
-        </ns0:nvSpPr>
-        <ns0:spPr/>
-        <ns0:txBody>
-          <ns1:bodyPr/>
-          <ns1:lstStyle/>
-          <ns1:p>
-            <ns1:r>
-              <ns1:t>A harmless synthetic adaptation of Invariant Labs’ GitHub MCP toxic flow tests advisory admission. One frozen observation each covers benign, active, quoted and signature-free paraphrase. Semantic quarantine removes the entire hostile advisory before actor exposure. Budget tightening and stale/manual external-save refusals are separately asserted with unchanged effect counts. A permitted current internal save matches one independently observed exact record for each objective. No causal downstream improvement follows merely from quarantine.</ns1:t>
-            </ns1:r>
-          </ns1:p>
-          <ns1:p>
-            <ns1:r>
-              <ns1:t/>
-            </ns1:r>
-          </ns1:p>
-          <ns1:p>
-            <ns1:r>
-              <ns1:t>Sources: test/blind-cases.json; current actual proof observations/controls/objectives; https://invariantlabs.ai/blog/mcp-github-vulnerability; current genuine controls browser capture</ns1:t>
-            </ns1:r>
-          </ns1:p>
-          <ns1:p>
-            <ns1:r>
-              <ns1:t>Actual original proof date: 2026-10-04T01:29:53.383Z. New intention proof date: 2026-10-04T02:07:09.266Z. Delivered source revision: 2c3b380306f66243305ca50d77be178b1d0b46b6. Worksheet and result crops use the authenticated retained-run GET-only screenshot at 2026-10-04T05:37:55.215Z, run 360c040e-16a1-4f81-ac76-1e1ec4ef6195. The full screenshot SHA256 is 42e0ba98bbe1400677ee8f2c56ab56780ec8f68a98020287a15cc762cb5ed8cc, with app.js SHA256 506688ca6a8544d5fabecf7a12c62e9d65544809197ac6e7e716bd64e54017dc. The documentation-only F-05 follow-up changes README guidance. Code, tests and UI retain the previously checked source bytes. The latest GET-only screenshot is file- and pixel-identical to the earlier 04:59 capture. This current native UI inspection establishes no new model inference, private rebind, save or automated walkthrough. Actual original and intention proof dates above remain historical. The four automated walkthroughs and seven backup frames remain historical, with the latest walkthrough interval 2026-10-04T02:15:51.144Z to 2026-10-04T02:15:54.500Z and provisional UI hashes. Payload and controls remain later historical GET-only captures saved at 2026-10-04T02:24:32.962809Z and 2026-10-04T02:22:42.329586Z respectively. These are file-save times, not independently recorded exact capture timestamps. The 02:25 input assembly time is not a screenshot capture time. Comparison evidence remains separately dated. No new rehearsal occurred.</ns1:t>
-            </ns1:r>
-          </ns1:p>
-          <ns1:p>
-            <ns1:r>
-              <ns1:t>Disclosure: Synthetic supplier-renewal prototype. Public objective/capability descriptions and transport metadata remain disclosed. Local host/employee access is trusted. Targets are potential outcomes, never achieved savings. Current package evidence does not establish production security or formal noninterference.</ns1:t>
-            </ns1:r>
-          </ns1:p>
-        </ns0:txBody>
-      </ns0:sp>
-      <ns0:sp>
-        <ns0:nvSpPr>
-          <ns0:cNvPr id="4" name="Slide Number Placeholder 3"/>
-          <ns0:cNvSpPr>
-            <ns1:spLocks noGrp="1"/>
-          </ns0:cNvSpPr>
-          <ns0:nvPr>
-            <ns0:ph type="sldNum" idx="5"/>
-          </ns0:nvPr>
-        </ns0:nvSpPr>
-        <ns0:spPr/>
-        <ns0:txBody>
-          <ns1:bodyPr/>
-          <ns1:lstStyle/>
-          <ns1:p/>
-        </ns0:txBody>
-      </ns0:sp>
-    </ns0:spTree>
-  </ns0:cSld>
-  <ns0:clrMapOvr>
-    <ns1:masterClrMapping/>
-  </ns0:clrMapOvr>
-</ns0:notes>
+<p:notes xmlns:p="http://schemas.openxmlformats.org/presentationml/2006/main">
+  <p:cSld>
+    <p:spTree>
+      <p:nvGrpSpPr>
+        <p:cNvPr id="1" name=""/>
+        <p:cNvGrpSpPr/>
+        <p:nvPr/>
+      </p:nvGrpSpPr>
+      <p:grpSpPr>
+        <a:xfrm xmlns:a="http://schemas.openxmlformats.org/drawingml/2006/main"/>
+      </p:grpSpPr>
+      <p:sp>
+        <p:nvSpPr>
+          <p:cNvPr id="2" name="Slide Image Placeholder 1"/>
+          <p:cNvSpPr>
+            <a:spLocks xmlns:a="http://schemas.openxmlformats.org/drawingml/2006/main" noGrp="1"/>
+          </p:cNvSpPr>
+          <p:nvPr>
+            <p:ph type="sldImg" idx="0"/>
+          </p:nvPr>
+        </p:nvSpPr>
+        <p:spPr/>
+      </p:sp>
+      <p:sp>
+        <p:nvSpPr>
+          <p:cNvPr id="3" name="Notes Placeholder 2"/>
+          <p:cNvSpPr>
+            <a:spLocks xmlns:a="http://schemas.openxmlformats.org/drawingml/2006/main" noGrp="1"/>
+          </p:cNvSpPr>
+          <p:nvPr>
+            <p:ph type="body" idx="1"/>
+          </p:nvPr>
+        </p:nvSpPr>
+        <p:spPr/>
+        <p:txBody>
+          <a:bodyPr xmlns:a="http://schemas.openxmlformats.org/drawingml/2006/main"/>
+          <a:lstStyle xmlns:a="http://schemas.openxmlformats.org/drawingml/2006/main"/>
+          <a:p xmlns:a="http://schemas.openxmlformats.org/drawingml/2006/main">
+            <a:r>
+              <a:t>The permitted registered MCP save was observed previously and independently matched the exact content, artifact and parent/action identities. Current GET capture is observation only. Stale save and deliberately manual external export refusal are separate negative cases. A benign advisory was admitted and the whole hostile paraphrase quarantined before actor exposure. This does not establish downstream causal benefit.</a:t>
+            </a:r>
+          </a:p>
+          <a:p xmlns:a="http://schemas.openxmlformats.org/drawingml/2006/main">
+            <a:r>
+              <a:t/>
+            </a:r>
+          </a:p>
+          <a:p xmlns:a="http://schemas.openxmlformats.org/drawingml/2006/main">
+            <a:r>
+              <a:t>Sources: actual intention proof; independent SQLite effects; current genuine controls capture</a:t>
+            </a:r>
+          </a:p>
+          <a:p xmlns:a="http://schemas.openxmlformats.org/drawingml/2006/main">
+            <a:r>
+              <a:t>Retained original proof date: 2026-10-04T01:29:53.383Z. Retained intention proof date: 2026-10-04T02:07:09.266Z. Browser capture date: 2026-10-04T07:54:36.814Z. Source revision: 44c57cde5aeab97ff9bd1eaef20bbde4221b10a3. Capture scope: Current judge-story UI rendering of a consistent SQLite snapshot of the retained actual hosted run360c040e-16a1-4f81-ac76-1e1ec4ef6195. Authenticated GET-only loopback capture; model generation disabled, non-GET host routes rejected. No new inference, rebind or save. Previous public-input/control screenshots and actual composition/backup retain original dates; deployment UI banner is concurrently owned..</a:t>
+            </a:r>
+          </a:p>
+          <a:p xmlns:a="http://schemas.openxmlformats.org/drawingml/2006/main">
+            <a:r>
+              <a:t>Disclosure: Synthetic supplier-renewal prototype. Public objective/capability descriptions and transport metadata remain disclosed. Local host/employee access is trusted. Targets are potential outcomes, never achieved savings. Current package evidence does not establish production security or formal noninterference.</a:t>
+            </a:r>
+          </a:p>
+        </p:txBody>
+      </p:sp>
+      <p:sp>
+        <p:nvSpPr>
+          <p:cNvPr id="4" name="Slide Number Placeholder 3"/>
+          <p:cNvSpPr>
+            <a:spLocks xmlns:a="http://schemas.openxmlformats.org/drawingml/2006/main" noGrp="1"/>
+          </p:cNvSpPr>
+          <p:nvPr>
+            <p:ph type="sldNum" idx="5"/>
+          </p:nvPr>
+        </p:nvSpPr>
+        <p:spPr/>
+        <p:txBody>
+          <a:bodyPr xmlns:a="http://schemas.openxmlformats.org/drawingml/2006/main"/>
+          <a:lstStyle xmlns:a="http://schemas.openxmlformats.org/drawingml/2006/main"/>
+          <a:p xmlns:a="http://schemas.openxmlformats.org/drawingml/2006/main"/>
+        </p:txBody>
+      </p:sp>
+    </p:spTree>
+  </p:cSld>
+  <p:clrMapOvr>
+    <a:masterClrMapping xmlns:a="http://schemas.openxmlformats.org/drawingml/2006/main"/>
+  </p:clrMapOvr>
+</p:notes>
 </file>
 
 <file path=ppt/notesSlides/notesSlide8.xml><?xml version="1.0" encoding="utf-8"?>
-<ns0:notes xmlns:ns0="http://schemas.openxmlformats.org/presentationml/2006/main" xmlns:ns1="http://schemas.openxmlformats.org/drawingml/2006/main">
-  <ns0:cSld>
-    <ns0:spTree>
-      <ns0:nvGrpSpPr>
-        <ns0:cNvPr id="1" name=""/>
-        <ns0:cNvGrpSpPr/>
-        <ns0:nvPr/>
-      </ns0:nvGrpSpPr>
-      <ns0:grpSpPr>
-        <ns1:xfrm/>
-      </ns0:grpSpPr>
-      <ns0:sp>
-        <ns0:nvSpPr>
-          <ns0:cNvPr id="2" name="Slide Image Placeholder 1"/>
-          <ns0:cNvSpPr>
-            <ns1:spLocks noGrp="1"/>
-          </ns0:cNvSpPr>
-          <ns0:nvPr>
-            <ns0:ph type="sldImg" idx="0"/>
-          </ns0:nvPr>
-        </ns0:nvSpPr>
-        <ns0:spPr/>
-      </ns0:sp>
-      <ns0:sp>
-        <ns0:nvSpPr>
-          <ns0:cNvPr id="3" name="Notes Placeholder 2"/>
-          <ns0:cNvSpPr>
-            <ns1:spLocks noGrp="1"/>
-          </ns0:cNvSpPr>
-          <ns0:nvPr>
-            <ns0:ph type="body" idx="1"/>
-          </ns0:nvPr>
-        </ns0:nvSpPr>
-        <ns0:spPr/>
-        <ns0:txBody>
-          <ns1:bodyPr/>
-          <ns1:lstStyle/>
-          <ns1:p>
-            <ns1:r>
-              <ns1:t>The Goldman task requires deterministic and actual semantic controls, editable policy/model/threshold/budget, realtime audit/export, positive/negative tests, architecture and measured telemetry. The package retains the exact source conflict: brief weights30/20/20/15/15, rules30/20/20/20/10. Rules permit English/Polish, stricter task page and owner choose English. Earlier cutoff is 4 October2026 11:00 Warsaw despite literal PM wording in other source text. The runtime uses owner-funded hosted Vertex synthetic inference with no local LLM. Current captured same-epoch ledger checkpoint: 328 calls and 89,021,463 admission credits, including 10 historical unknown attempts that remain charged and unreplayed. Tariff remains unknown/unpriced. Historical release on/off outcomes are separately dated; both actors succeeded safely and no downstream causal benefit was observed.</ns1:t>
-            </ns1:r>
-          </ns1:p>
-          <ns1:p>
-            <ns1:r>
-              <ns1:t/>
-            </ns1:r>
-          </ns1:p>
-          <ns1:p>
-            <ns1:r>
-              <ns1:t>Current bounded post-freeze repairs preserve Connect credentials and action occupancy (F-01), preserve newer record/rule edits after Reset acknowledgement (F-02), and scan nested JSON provisioning fields at source packaging (F-04). Offline regression log .proofgate/postfreeze-regression-9.tap records 339/339 tests, zero failures and skips. Injected-model checks and current GET-only inspection do not establish fresh hosted inference. Root reports current canonical Phase04/05 verification parser gates passed and independent documentation review clean. Original substantive security/UI assessments remain dated historical evidence. Exact final archive packaging and acceptance remain root-owned and pending.
-Sources: current validated actual proof; integrator regression log; goldman/TASK-CONTRACT.md; .planning/PROJECT.md; package evidence.json</ns1:t>
-            </ns1:r>
-          </ns1:p>
-          <ns1:p>
-            <ns1:r>
-              <ns1:t>Actual original proof date: 2026-10-04T01:29:53.383Z. New intention proof date: 2026-10-04T02:07:09.266Z. Delivered source revision: 2c3b380306f66243305ca50d77be178b1d0b46b6. Worksheet and result crops use the authenticated retained-run GET-only screenshot at 2026-10-04T05:37:55.215Z, run 360c040e-16a1-4f81-ac76-1e1ec4ef6195. The full screenshot SHA256 is 42e0ba98bbe1400677ee8f2c56ab56780ec8f68a98020287a15cc762cb5ed8cc, with app.js SHA256 506688ca6a8544d5fabecf7a12c62e9d65544809197ac6e7e716bd64e54017dc. The documentation-only F-05 follow-up changes README guidance. Code, tests and UI retain the previously checked source bytes. The latest GET-only screenshot is file- and pixel-identical to the earlier 04:59 capture. This current native UI inspection establishes no new model inference, private rebind, save or automated walkthrough. Actual original and intention proof dates above remain historical. The four automated walkthroughs and seven backup frames remain historical, with the latest walkthrough interval 2026-10-04T02:15:51.144Z to 2026-10-04T02:15:54.500Z and provisional UI hashes. Payload and controls remain later historical GET-only captures saved at 2026-10-04T02:24:32.962809Z and 2026-10-04T02:22:42.329586Z respectively. These are file-save times, not independently recorded exact capture timestamps. The 02:25 input assembly time is not a screenshot capture time. Comparison evidence remains separately dated. No new rehearsal occurred.</ns1:t>
-            </ns1:r>
-          </ns1:p>
-          <ns1:p>
-            <ns1:r>
-              <ns1:t>Disclosure: Synthetic supplier-renewal prototype. Public objective/capability descriptions and transport metadata remain disclosed. Local host/employee access is trusted. Targets are potential outcomes, never achieved savings. Current package evidence does not establish production security or formal noninterference.</ns1:t>
-            </ns1:r>
-          </ns1:p>
-        </ns0:txBody>
-      </ns0:sp>
-      <ns0:sp>
-        <ns0:nvSpPr>
-          <ns0:cNvPr id="4" name="Slide Number Placeholder 3"/>
-          <ns0:cNvSpPr>
-            <ns1:spLocks noGrp="1"/>
-          </ns0:cNvSpPr>
-          <ns0:nvPr>
-            <ns0:ph type="sldNum" idx="5"/>
-          </ns0:nvPr>
-        </ns0:nvSpPr>
-        <ns0:spPr/>
-        <ns0:txBody>
-          <ns1:bodyPr/>
-          <ns1:lstStyle/>
-          <ns1:p/>
-        </ns0:txBody>
-      </ns0:sp>
-    </ns0:spTree>
-  </ns0:cSld>
-  <ns0:clrMapOvr>
-    <ns1:masterClrMapping/>
-  </ns0:clrMapOvr>
-</ns0:notes>
+<p:notes xmlns:p="http://schemas.openxmlformats.org/presentationml/2006/main">
+  <p:cSld>
+    <p:spTree>
+      <p:nvGrpSpPr>
+        <p:cNvPr id="1" name=""/>
+        <p:cNvGrpSpPr/>
+        <p:nvPr/>
+      </p:nvGrpSpPr>
+      <p:grpSpPr>
+        <a:xfrm xmlns:a="http://schemas.openxmlformats.org/drawingml/2006/main"/>
+      </p:grpSpPr>
+      <p:sp>
+        <p:nvSpPr>
+          <p:cNvPr id="2" name="Slide Image Placeholder 1"/>
+          <p:cNvSpPr>
+            <a:spLocks xmlns:a="http://schemas.openxmlformats.org/drawingml/2006/main" noGrp="1"/>
+          </p:cNvSpPr>
+          <p:nvPr>
+            <p:ph type="sldImg" idx="0"/>
+          </p:nvPr>
+        </p:nvSpPr>
+        <p:spPr/>
+      </p:sp>
+      <p:sp>
+        <p:nvSpPr>
+          <p:cNvPr id="3" name="Notes Placeholder 2"/>
+          <p:cNvSpPr>
+            <a:spLocks xmlns:a="http://schemas.openxmlformats.org/drawingml/2006/main" noGrp="1"/>
+          </p:cNvSpPr>
+          <p:nvPr>
+            <p:ph type="body" idx="1"/>
+          </p:nvPr>
+        </p:nvSpPr>
+        <p:spPr/>
+        <p:txBody>
+          <a:bodyPr xmlns:a="http://schemas.openxmlformats.org/drawingml/2006/main"/>
+          <a:lstStyle xmlns:a="http://schemas.openxmlformats.org/drawingml/2006/main"/>
+          <a:p xmlns:a="http://schemas.openxmlformats.org/drawingml/2006/main">
+            <a:r>
+              <a:t>Retained evidence: four advisory cases, two prepared compositions and one previously unprepared intention; exact internal saves and zero-attempt local rebinds. Four automated walkthroughs, zero human rehearsals. Backup is 48.933333 seconds and seven paced genuine historical captures, not continuous recording or latency. Original proof24 plus earlier walkthrough12 equals36, exceeding original combined32 forecast. Separately approved intention adds8 wires (3 model,1 auth,4 MCP); fourth walkthrough adds4 MCP, giving48 wires and15 model inferences. Recorded same-epoch checkpoint328 calls/89021463 credits has10 historical charged unknowns. Observed tokens are separate from conservative admission credits; tariff remains unpriced. One intention composition observed3.66s overall, hosted3.65s and local1.61ms; separate MCP save span10.95ms. Those are single observations, not benchmarks. Historical release on/off actors both succeeded safely, so no downstream causal benefit was observed. Source scoring and PM timing conflicts remain in TASK-CONTRACT.</a:t>
+            </a:r>
+          </a:p>
+          <a:p xmlns:a="http://schemas.openxmlformats.org/drawingml/2006/main">
+            <a:r>
+              <a:t/>
+            </a:r>
+          </a:p>
+          <a:p xmlns:a="http://schemas.openxmlformats.org/drawingml/2006/main">
+            <a:r>
+              <a:t>Sources: validated original and intention proofs; input accounting; submission/evidence.json; goldman/TASK-CONTRACT.md</a:t>
+            </a:r>
+          </a:p>
+          <a:p xmlns:a="http://schemas.openxmlformats.org/drawingml/2006/main">
+            <a:r>
+              <a:t>Retained original proof date: 2026-10-04T01:29:53.383Z. Retained intention proof date: 2026-10-04T02:07:09.266Z. Browser capture date: 2026-10-04T07:54:36.814Z. Source revision: 44c57cde5aeab97ff9bd1eaef20bbde4221b10a3. Capture scope: Current judge-story UI rendering of a consistent SQLite snapshot of the retained actual hosted run360c040e-16a1-4f81-ac76-1e1ec4ef6195. Authenticated GET-only loopback capture; model generation disabled, non-GET host routes rejected. No new inference, rebind or save. Previous public-input/control screenshots and actual composition/backup retain original dates; deployment UI banner is concurrently owned..</a:t>
+            </a:r>
+          </a:p>
+          <a:p xmlns:a="http://schemas.openxmlformats.org/drawingml/2006/main">
+            <a:r>
+              <a:t>Disclosure: Synthetic supplier-renewal prototype. Public objective/capability descriptions and transport metadata remain disclosed. Local host/employee access is trusted. Targets are potential outcomes, never achieved savings. Current package evidence does not establish production security or formal noninterference.</a:t>
+            </a:r>
+          </a:p>
+        </p:txBody>
+      </p:sp>
+      <p:sp>
+        <p:nvSpPr>
+          <p:cNvPr id="4" name="Slide Number Placeholder 3"/>
+          <p:cNvSpPr>
+            <a:spLocks xmlns:a="http://schemas.openxmlformats.org/drawingml/2006/main" noGrp="1"/>
+          </p:cNvSpPr>
+          <p:nvPr>
+            <p:ph type="sldNum" idx="5"/>
+          </p:nvPr>
+        </p:nvSpPr>
+        <p:spPr/>
+        <p:txBody>
+          <a:bodyPr xmlns:a="http://schemas.openxmlformats.org/drawingml/2006/main"/>
+          <a:lstStyle xmlns:a="http://schemas.openxmlformats.org/drawingml/2006/main"/>
+          <a:p xmlns:a="http://schemas.openxmlformats.org/drawingml/2006/main"/>
+        </p:txBody>
+      </p:sp>
+    </p:spTree>
+  </p:cSld>
+  <p:clrMapOvr>
+    <a:masterClrMapping xmlns:a="http://schemas.openxmlformats.org/drawingml/2006/main"/>
+  </p:clrMapOvr>
+</p:notes>
 </file>
 
 <file path=ppt/notesSlides/notesSlide9.xml><?xml version="1.0" encoding="utf-8"?>
-<ns0:notes xmlns:ns0="http://schemas.openxmlformats.org/presentationml/2006/main" xmlns:ns1="http://schemas.openxmlformats.org/drawingml/2006/main">
-  <ns0:cSld>
-    <ns0:spTree>
-      <ns0:nvGrpSpPr>
-        <ns0:cNvPr id="1" name=""/>
-        <ns0:cNvGrpSpPr/>
-        <ns0:nvPr/>
-      </ns0:nvGrpSpPr>
-      <ns0:grpSpPr>
-        <ns1:xfrm/>
-      </ns0:grpSpPr>
-      <ns0:sp>
-        <ns0:nvSpPr>
-          <ns0:cNvPr id="2" name="Slide Image Placeholder 1"/>
-          <ns0:cNvSpPr>
-            <ns1:spLocks noGrp="1"/>
-          </ns0:cNvSpPr>
-          <ns0:nvPr>
-            <ns0:ph type="sldImg" idx="0"/>
-          </ns0:nvPr>
-        </ns0:nvSpPr>
-        <ns0:spPr/>
-      </ns0:sp>
-      <ns0:sp>
-        <ns0:nvSpPr>
-          <ns0:cNvPr id="3" name="Notes Placeholder 2"/>
-          <ns0:cNvSpPr>
-            <ns1:spLocks noGrp="1"/>
-          </ns0:cNvSpPr>
-          <ns0:nvPr>
-            <ns0:ph type="body" idx="1"/>
-          </ns0:nvPr>
-        </ns0:nvSpPr>
-        <ns0:spPr/>
-        <ns0:txBody>
-          <ns1:bodyPr/>
-          <ns1:lstStyle/>
-          <ns1:p>
-            <ns1:r>
-              <ns1:t>Closing: invite the judge to change a private quote or rule, rebind the retained admitted method, inspect the attempt delta and verify the exact internally saved brief. Team skills are owner-provided, not claims of individual code contributions. Genuine team: Michał Jabłoński, Karol Krawczyk, Kamil Krawczyk, Viktoriia Vinnykova.</ns1:t>
-            </ns1:r>
-          </ns1:p>
-          <ns1:p>
-            <ns1:r>
-              <ns1:t/>
-            </ns1:r>
-          </ns1:p>
-          <ns1:p>
-            <ns1:r>
-              <ns1:t>Sources: TEAM.md; .planning/PROJECT.md; current proof and authentic browser observations</ns1:t>
-            </ns1:r>
-          </ns1:p>
-          <ns1:p>
-            <ns1:r>
-              <ns1:t>Actual original proof date: 2026-10-04T01:29:53.383Z. New intention proof date: 2026-10-04T02:07:09.266Z. Delivered source revision: 2c3b380306f66243305ca50d77be178b1d0b46b6. Worksheet and result crops use the authenticated retained-run GET-only screenshot at 2026-10-04T05:37:55.215Z, run 360c040e-16a1-4f81-ac76-1e1ec4ef6195. The full screenshot SHA256 is 42e0ba98bbe1400677ee8f2c56ab56780ec8f68a98020287a15cc762cb5ed8cc, with app.js SHA256 506688ca6a8544d5fabecf7a12c62e9d65544809197ac6e7e716bd64e54017dc. The documentation-only F-05 follow-up changes README guidance. Code, tests and UI retain the previously checked source bytes. The latest GET-only screenshot is file- and pixel-identical to the earlier 04:59 capture. This current native UI inspection establishes no new model inference, private rebind, save or automated walkthrough. Actual original and intention proof dates above remain historical. The four automated walkthroughs and seven backup frames remain historical, with the latest walkthrough interval 2026-10-04T02:15:51.144Z to 2026-10-04T02:15:54.500Z and provisional UI hashes. Payload and controls remain later historical GET-only captures saved at 2026-10-04T02:24:32.962809Z and 2026-10-04T02:22:42.329586Z respectively. These are file-save times, not independently recorded exact capture timestamps. The 02:25 input assembly time is not a screenshot capture time. Comparison evidence remains separately dated. No new rehearsal occurred.</ns1:t>
-            </ns1:r>
-          </ns1:p>
-          <ns1:p>
-            <ns1:r>
-              <ns1:t>Disclosure: Synthetic supplier-renewal prototype. Public objective/capability descriptions and transport metadata remain disclosed. Local host/employee access is trusted. Targets are potential outcomes, never achieved savings. Current package evidence does not establish production security or formal noninterference.</ns1:t>
-            </ns1:r>
-          </ns1:p>
-        </ns0:txBody>
-      </ns0:sp>
-      <ns0:sp>
-        <ns0:nvSpPr>
-          <ns0:cNvPr id="4" name="Slide Number Placeholder 3"/>
-          <ns0:cNvSpPr>
-            <ns1:spLocks noGrp="1"/>
-          </ns0:cNvSpPr>
-          <ns0:nvPr>
-            <ns0:ph type="sldNum" idx="5"/>
-          </ns0:nvPr>
-        </ns0:nvSpPr>
-        <ns0:spPr/>
-        <ns0:txBody>
-          <ns1:bodyPr/>
-          <ns1:lstStyle/>
-          <ns1:p/>
-        </ns0:txBody>
-      </ns0:sp>
-    </ns0:spTree>
-  </ns0:cSld>
-  <ns0:clrMapOvr>
-    <ns1:masterClrMapping/>
-  </ns0:clrMapOvr>
-</ns0:notes>
+<p:notes xmlns:p="http://schemas.openxmlformats.org/presentationml/2006/main">
+  <p:cSld>
+    <p:spTree>
+      <p:nvGrpSpPr>
+        <p:cNvPr id="1" name=""/>
+        <p:cNvGrpSpPr/>
+        <p:nvPr/>
+      </p:nvGrpSpPr>
+      <p:grpSpPr>
+        <a:xfrm xmlns:a="http://schemas.openxmlformats.org/drawingml/2006/main"/>
+      </p:grpSpPr>
+      <p:sp>
+        <p:nvSpPr>
+          <p:cNvPr id="2" name="Slide Image Placeholder 1"/>
+          <p:cNvSpPr>
+            <a:spLocks xmlns:a="http://schemas.openxmlformats.org/drawingml/2006/main" noGrp="1"/>
+          </p:cNvSpPr>
+          <p:nvPr>
+            <p:ph type="sldImg" idx="0"/>
+          </p:nvPr>
+        </p:nvSpPr>
+        <p:spPr/>
+      </p:sp>
+      <p:sp>
+        <p:nvSpPr>
+          <p:cNvPr id="3" name="Notes Placeholder 2"/>
+          <p:cNvSpPr>
+            <a:spLocks xmlns:a="http://schemas.openxmlformats.org/drawingml/2006/main" noGrp="1"/>
+          </p:cNvSpPr>
+          <p:nvPr>
+            <p:ph type="body" idx="1"/>
+          </p:nvPr>
+        </p:nvSpPr>
+        <p:spPr/>
+        <p:txBody>
+          <a:bodyPr xmlns:a="http://schemas.openxmlformats.org/drawingml/2006/main"/>
+          <a:lstStyle xmlns:a="http://schemas.openxmlformats.org/drawingml/2006/main"/>
+          <a:p xmlns:a="http://schemas.openxmlformats.org/drawingml/2006/main">
+            <a:r>
+              <a:t>Invite the judge to inspect the public request, change a private quote or rule through the authorized local scene and inspect the selection/brief/provider delta. Fresh actions require root-approved run/admission; retained playback must be labeled. Genuine team names are owner-provided, not invented contribution claims.</a:t>
+            </a:r>
+          </a:p>
+          <a:p xmlns:a="http://schemas.openxmlformats.org/drawingml/2006/main">
+            <a:r>
+              <a:t/>
+            </a:r>
+          </a:p>
+          <a:p xmlns:a="http://schemas.openxmlformats.org/drawingml/2006/main">
+            <a:r>
+              <a:t>Sources: TEAM.md; current validated proof and retained browser observations</a:t>
+            </a:r>
+          </a:p>
+          <a:p xmlns:a="http://schemas.openxmlformats.org/drawingml/2006/main">
+            <a:r>
+              <a:t>Retained original proof date: 2026-10-04T01:29:53.383Z. Retained intention proof date: 2026-10-04T02:07:09.266Z. Browser capture date: 2026-10-04T07:54:36.814Z. Source revision: 44c57cde5aeab97ff9bd1eaef20bbde4221b10a3. Capture scope: Current judge-story UI rendering of a consistent SQLite snapshot of the retained actual hosted run360c040e-16a1-4f81-ac76-1e1ec4ef6195. Authenticated GET-only loopback capture; model generation disabled, non-GET host routes rejected. No new inference, rebind or save. Previous public-input/control screenshots and actual composition/backup retain original dates; deployment UI banner is concurrently owned..</a:t>
+            </a:r>
+          </a:p>
+          <a:p xmlns:a="http://schemas.openxmlformats.org/drawingml/2006/main">
+            <a:r>
+              <a:t>Disclosure: Synthetic supplier-renewal prototype. Public objective/capability descriptions and transport metadata remain disclosed. Local host/employee access is trusted. Targets are potential outcomes, never achieved savings. Current package evidence does not establish production security or formal noninterference.</a:t>
+            </a:r>
+          </a:p>
+        </p:txBody>
+      </p:sp>
+      <p:sp>
+        <p:nvSpPr>
+          <p:cNvPr id="4" name="Slide Number Placeholder 3"/>
+          <p:cNvSpPr>
+            <a:spLocks xmlns:a="http://schemas.openxmlformats.org/drawingml/2006/main" noGrp="1"/>
+          </p:cNvSpPr>
+          <p:nvPr>
+            <p:ph type="sldNum" idx="5"/>
+          </p:nvPr>
+        </p:nvSpPr>
+        <p:spPr/>
+        <p:txBody>
+          <a:bodyPr xmlns:a="http://schemas.openxmlformats.org/drawingml/2006/main"/>
+          <a:lstStyle xmlns:a="http://schemas.openxmlformats.org/drawingml/2006/main"/>
+          <a:p xmlns:a="http://schemas.openxmlformats.org/drawingml/2006/main"/>
+        </p:txBody>
+      </p:sp>
+    </p:spTree>
+  </p:cSld>
+  <p:clrMapOvr>
+    <a:masterClrMapping xmlns:a="http://schemas.openxmlformats.org/drawingml/2006/main"/>
+  </p:clrMapOvr>
+</p:notes>
 </file>
 
 <file path=ppt/slideLayouts/slideLayout1.xml><?xml version="1.0" encoding="utf-8"?>
@@ -1259,7 +1258,7 @@
   </p:cSld>
   <p:clrMap bg1="lt1" tx1="dk1" bg2="lt2" tx2="dk2" accent1="accent1" accent2="accent2" accent3="accent3" accent4="accent4" accent5="accent5" accent6="accent6" hlink="hlink" folHlink="folHlink"/>
   <p:sldLayoutIdLst>
-    <p:sldLayoutId xmlns:r="http://schemas.openxmlformats.org/officeDocument/2006/relationships" id="2147483649" r:id="R3fe7b733624a4384"/>
+    <p:sldLayoutId xmlns:r="http://schemas.openxmlformats.org/officeDocument/2006/relationships" id="2147483649" r:id="R13d7497a580b4e59"/>
   </p:sldLayoutIdLst>
   <p:txStyles>
     <p:titleStyle>
@@ -1810,7 +1809,7 @@
           <p:cNvPr id="4" name="text-1">
             <a:extLst xmlns:a="http://schemas.openxmlformats.org/drawingml/2006/main">
               <a:ext uri="{FF2B5EF4-FFF2-40B4-BE49-F238E27FC236}">
-                <a16:creationId xmlns:a16="http://schemas.microsoft.com/office/drawing/2014/main" id="{1E2D10FB-46AF-47F1-AB82-869E06079FFA}"/>
+                <a16:creationId xmlns:a16="http://schemas.microsoft.com/office/drawing/2014/main" id="{6D5366C5-3877-41AC-9E11-02321C9EA115}"/>
               </a:ext>
             </a:extLst>
           </p:cNvPr>
@@ -1867,7 +1866,7 @@
           <p:cNvPr id="2" name="text-2">
             <a:extLst xmlns:a="http://schemas.openxmlformats.org/drawingml/2006/main">
               <a:ext uri="{FF2B5EF4-FFF2-40B4-BE49-F238E27FC236}">
-                <a16:creationId xmlns:a16="http://schemas.microsoft.com/office/drawing/2014/main" id="{D05DFB97-D713-4363-9B0C-754AE7C08061}"/>
+                <a16:creationId xmlns:a16="http://schemas.microsoft.com/office/drawing/2014/main" id="{967E6AD5-FB72-4DDF-9010-6896F12F96ED}"/>
               </a:ext>
             </a:extLst>
           </p:cNvPr>
@@ -1896,7 +1895,7 @@
           <a:lstStyle xmlns:a="http://schemas.openxmlformats.org/drawingml/2006/main"/>
           <a:p xmlns:a="http://schemas.openxmlformats.org/drawingml/2006/main">
             <a:pPr algn="l">
-              <a:defRPr sz="3200" b="0">
+              <a:defRPr sz="3000" b="0">
                 <a:solidFill>
                   <a:srgbClr val="FFFFFF"/>
                 </a:solidFill>
@@ -1906,7 +1905,7 @@
               </a:defRPr>
             </a:pPr>
             <a:r>
-              <a:rPr sz="3200" b="0">
+              <a:rPr sz="3000" b="0">
                 <a:solidFill>
                   <a:srgbClr val="FFFFFF"/>
                 </a:solidFill>
@@ -1914,12 +1913,12 @@
                 <a:ea typeface="Arial"/>
                 <a:cs typeface="Arial"/>
               </a:rPr>
-              <a:t>AI supplies the method.</a:t>
-            </a:r>
-          </a:p>
-          <a:p xmlns:a="http://schemas.openxmlformats.org/drawingml/2006/main">
-            <a:pPr algn="l">
-              <a:defRPr sz="3200" b="0">
+              <a:t>Prepare the right supplier negotiations.</a:t>
+            </a:r>
+          </a:p>
+          <a:p xmlns:a="http://schemas.openxmlformats.org/drawingml/2006/main">
+            <a:pPr algn="l">
+              <a:defRPr sz="3000" b="0">
                 <a:solidFill>
                   <a:srgbClr val="FFFFFF"/>
                 </a:solidFill>
@@ -1929,7 +1928,7 @@
               </a:defRPr>
             </a:pPr>
             <a:r>
-              <a:rPr sz="3200" b="0">
+              <a:rPr sz="3000" b="0">
                 <a:solidFill>
                   <a:srgbClr val="FFFFFF"/>
                 </a:solidFill>
@@ -1937,7 +1936,7 @@
                 <a:ea typeface="Arial"/>
                 <a:cs typeface="Arial"/>
               </a:rPr>
-              <a:t>The company keeps its know-how.</a:t>
+              <a:t>Keep company facts and rules local.</a:t>
             </a:r>
           </a:p>
         </p:txBody>
@@ -1947,7 +1946,7 @@
           <p:cNvPr id="3" name="text-3">
             <a:extLst xmlns:a="http://schemas.openxmlformats.org/drawingml/2006/main">
               <a:ext uri="{FF2B5EF4-FFF2-40B4-BE49-F238E27FC236}">
-                <a16:creationId xmlns:a16="http://schemas.microsoft.com/office/drawing/2014/main" id="{3ADFC976-53CD-466B-97EE-259754102519}"/>
+                <a16:creationId xmlns:a16="http://schemas.microsoft.com/office/drawing/2014/main" id="{D6512890-DD3D-42C4-B679-2302B49FBA10}"/>
               </a:ext>
             </a:extLst>
           </p:cNvPr>
@@ -1994,7 +1993,7 @@
                 <a:ea typeface="Arial"/>
                 <a:cs typeface="Arial"/>
               </a:rPr>
-              <a:t>Blind Workbench: supplier renewal with synthetic contracts</a:t>
+              <a:t>Blind Workbench · synthetic supplier contracts</a:t>
             </a:r>
           </a:p>
         </p:txBody>
@@ -2002,7 +2001,7 @@
     </p:spTree>
     <p:extLst>
       <p:ext uri="{BB962C8B-B14F-4D97-AF65-F5344CB8AC3E}">
-        <p14:creationId xmlns:p14="http://schemas.microsoft.com/office/powerpoint/2010/main" val="1962624870"/>
+        <p14:creationId xmlns:p14="http://schemas.microsoft.com/office/powerpoint/2010/main" val="1341869447"/>
       </p:ext>
     </p:extLst>
   </p:cSld>
@@ -2030,10 +2029,10 @@
       </p:grpSpPr>
       <p:sp>
         <p:nvSpPr>
-          <p:cNvPr id="6" name="text-4">
+          <p:cNvPr id="9" name="text-4">
             <a:extLst xmlns:a="http://schemas.openxmlformats.org/drawingml/2006/main">
               <a:ext uri="{FF2B5EF4-FFF2-40B4-BE49-F238E27FC236}">
-                <a16:creationId xmlns:a16="http://schemas.microsoft.com/office/drawing/2014/main" id="{DD6A185E-73A5-4CD5-B68B-2EE06A1B0FF0}"/>
+                <a16:creationId xmlns:a16="http://schemas.microsoft.com/office/drawing/2014/main" id="{E96EE5B7-D649-4A4A-8D20-F774607162BF}"/>
               </a:ext>
             </a:extLst>
           </p:cNvPr>
@@ -2080,7 +2079,7 @@
                 <a:ea typeface="Arial"/>
                 <a:cs typeface="Arial"/>
               </a:rPr>
-              <a:t>Supplier renewal needs private know-how</a:t>
+              <a:t>Which suppliers should we negotiate with?</a:t>
             </a:r>
           </a:p>
         </p:txBody>
@@ -2090,7 +2089,7 @@
           <p:cNvPr id="2" name="text-5">
             <a:extLst xmlns:a="http://schemas.openxmlformats.org/drawingml/2006/main">
               <a:ext uri="{FF2B5EF4-FFF2-40B4-BE49-F238E27FC236}">
-                <a16:creationId xmlns:a16="http://schemas.microsoft.com/office/drawing/2014/main" id="{ABC08D22-6A61-4EE9-8D8D-78AF2A1C7DD7}"/>
+                <a16:creationId xmlns:a16="http://schemas.microsoft.com/office/drawing/2014/main" id="{FAE3FA6F-9AC2-4943-A3BE-BA10BD3F7AD4}"/>
               </a:ext>
             </a:extLst>
           </p:cNvPr>
@@ -2101,8 +2100,8 @@
         </p:nvSpPr>
         <p:spPr>
           <a:xfrm xmlns:a="http://schemas.openxmlformats.org/drawingml/2006/main">
-            <a:off x="609600" y="1762125"/>
-            <a:ext cx="4476750" cy="2000250"/>
+            <a:off x="609600" y="1571625"/>
+            <a:ext cx="4857750" cy="428625"/>
           </a:xfrm>
           <a:prstGeom xmlns:a="http://schemas.openxmlformats.org/drawingml/2006/main" prst="rect">
             <a:avLst/>
@@ -2119,71 +2118,25 @@
           <a:lstStyle xmlns:a="http://schemas.openxmlformats.org/drawingml/2006/main"/>
           <a:p xmlns:a="http://schemas.openxmlformats.org/drawingml/2006/main">
             <a:pPr algn="l">
-              <a:defRPr sz="2800" b="1">
-                <a:solidFill>
-                  <a:srgbClr val="102D3C"/>
-                </a:solidFill>
-                <a:latin typeface="Arial"/>
-                <a:ea typeface="Arial"/>
-                <a:cs typeface="Arial"/>
-              </a:defRPr>
-            </a:pPr>
-            <a:r>
-              <a:rPr sz="2800" b="1">
-                <a:solidFill>
-                  <a:srgbClr val="102D3C"/>
-                </a:solidFill>
-                <a:latin typeface="Arial"/>
-                <a:ea typeface="Arial"/>
-                <a:cs typeface="Arial"/>
-              </a:rPr>
-              <a:t>The quote changes.</a:t>
-            </a:r>
-          </a:p>
-          <a:p xmlns:a="http://schemas.openxmlformats.org/drawingml/2006/main">
-            <a:pPr algn="l">
-              <a:defRPr sz="2800" b="1">
-                <a:solidFill>
-                  <a:srgbClr val="102D3C"/>
-                </a:solidFill>
-                <a:latin typeface="Arial"/>
-                <a:ea typeface="Arial"/>
-                <a:cs typeface="Arial"/>
-              </a:defRPr>
-            </a:pPr>
-            <a:r>
-              <a:rPr sz="2800" b="1">
-                <a:solidFill>
-                  <a:srgbClr val="102D3C"/>
-                </a:solidFill>
-                <a:latin typeface="Arial"/>
-                <a:ea typeface="Arial"/>
-                <a:cs typeface="Arial"/>
-              </a:rPr>
-              <a:t>Private rules set</a:t>
-            </a:r>
-          </a:p>
-          <a:p xmlns:a="http://schemas.openxmlformats.org/drawingml/2006/main">
-            <a:pPr algn="l">
-              <a:defRPr sz="2800" b="1">
-                <a:solidFill>
-                  <a:srgbClr val="102D3C"/>
-                </a:solidFill>
-                <a:latin typeface="Arial"/>
-                <a:ea typeface="Arial"/>
-                <a:cs typeface="Arial"/>
-              </a:defRPr>
-            </a:pPr>
-            <a:r>
-              <a:rPr sz="2800" b="1">
-                <a:solidFill>
-                  <a:srgbClr val="102D3C"/>
-                </a:solidFill>
-                <a:latin typeface="Arial"/>
-                <a:ea typeface="Arial"/>
-                <a:cs typeface="Arial"/>
-              </a:rPr>
-              <a:t>the negotiation target.</a:t>
+              <a:defRPr sz="2400" b="1">
+                <a:solidFill>
+                  <a:srgbClr val="2D6B51"/>
+                </a:solidFill>
+                <a:latin typeface="Arial"/>
+                <a:ea typeface="Arial"/>
+                <a:cs typeface="Arial"/>
+              </a:defRPr>
+            </a:pPr>
+            <a:r>
+              <a:rPr sz="2400" b="1">
+                <a:solidFill>
+                  <a:srgbClr val="2D6B51"/>
+                </a:solidFill>
+                <a:latin typeface="Arial"/>
+                <a:ea typeface="Arial"/>
+                <a:cs typeface="Arial"/>
+              </a:rPr>
+              <a:t>The employee asks</a:t>
             </a:r>
           </a:p>
         </p:txBody>
@@ -2193,7 +2146,7 @@
           <p:cNvPr id="3" name="text-6">
             <a:extLst xmlns:a="http://schemas.openxmlformats.org/drawingml/2006/main">
               <a:ext uri="{FF2B5EF4-FFF2-40B4-BE49-F238E27FC236}">
-                <a16:creationId xmlns:a16="http://schemas.microsoft.com/office/drawing/2014/main" id="{7255AE5D-74FE-4EF0-8136-8A3C23BD5AB9}"/>
+                <a16:creationId xmlns:a16="http://schemas.microsoft.com/office/drawing/2014/main" id="{39E3FE06-FF8D-44EC-B3CC-2D7BB497AD84}"/>
               </a:ext>
             </a:extLst>
           </p:cNvPr>
@@ -2204,8 +2157,8 @@
         </p:nvSpPr>
         <p:spPr>
           <a:xfrm xmlns:a="http://schemas.openxmlformats.org/drawingml/2006/main">
-            <a:off x="609600" y="4105275"/>
-            <a:ext cx="4333875" cy="1381125"/>
+            <a:off x="609600" y="2247900"/>
+            <a:ext cx="5219700" cy="1790700"/>
           </a:xfrm>
           <a:prstGeom xmlns:a="http://schemas.openxmlformats.org/drawingml/2006/main" prst="rect">
             <a:avLst/>
@@ -2222,103 +2175,81 @@
           <a:lstStyle xmlns:a="http://schemas.openxmlformats.org/drawingml/2006/main"/>
           <a:p xmlns:a="http://schemas.openxmlformats.org/drawingml/2006/main">
             <a:pPr algn="l">
-              <a:defRPr sz="2000" b="0">
-                <a:solidFill>
-                  <a:srgbClr val="102D3C"/>
-                </a:solidFill>
-                <a:latin typeface="Arial"/>
-                <a:ea typeface="Arial"/>
-                <a:cs typeface="Arial"/>
-              </a:defRPr>
-            </a:pPr>
-            <a:r>
-              <a:rPr sz="2000" b="0">
-                <a:solidFill>
-                  <a:srgbClr val="102D3C"/>
-                </a:solidFill>
-                <a:latin typeface="Arial"/>
-                <a:ea typeface="Arial"/>
-                <a:cs typeface="Arial"/>
-              </a:rPr>
-              <a:t>An employee needs a useful brief</a:t>
-            </a:r>
-          </a:p>
-          <a:p xmlns:a="http://schemas.openxmlformats.org/drawingml/2006/main">
-            <a:pPr algn="l">
-              <a:defRPr sz="2000" b="0">
-                <a:solidFill>
-                  <a:srgbClr val="102D3C"/>
-                </a:solidFill>
-                <a:latin typeface="Arial"/>
-                <a:ea typeface="Arial"/>
-                <a:cs typeface="Arial"/>
-              </a:defRPr>
-            </a:pPr>
-            <a:r>
-              <a:rPr sz="2000" b="0">
-                <a:solidFill>
-                  <a:srgbClr val="102D3C"/>
-                </a:solidFill>
-                <a:latin typeface="Arial"/>
-                <a:ea typeface="Arial"/>
-                <a:cs typeface="Arial"/>
-              </a:rPr>
-              <a:t>without giving a hosted model</a:t>
-            </a:r>
-          </a:p>
-          <a:p xmlns:a="http://schemas.openxmlformats.org/drawingml/2006/main">
-            <a:pPr algn="l">
-              <a:defRPr sz="2000" b="0">
-                <a:solidFill>
-                  <a:srgbClr val="102D3C"/>
-                </a:solidFill>
-                <a:latin typeface="Arial"/>
-                <a:ea typeface="Arial"/>
-                <a:cs typeface="Arial"/>
-              </a:defRPr>
-            </a:pPr>
-            <a:r>
-              <a:rPr sz="2000" b="0">
-                <a:solidFill>
-                  <a:srgbClr val="102D3C"/>
-                </a:solidFill>
-                <a:latin typeface="Arial"/>
-                <a:ea typeface="Arial"/>
-                <a:cs typeface="Arial"/>
-              </a:rPr>
-              <a:t>the contract register or rule bodies.</a:t>
-            </a:r>
-          </a:p>
-        </p:txBody>
-      </p:sp>
-      <p:pic>
-        <p:nvPicPr>
-          <p:cNvPr id="9" name=""/>
-          <p:cNvPicPr>
-            <a:picLocks xmlns:a="http://schemas.openxmlformats.org/drawingml/2006/main" noChangeAspect="1"/>
-          </p:cNvPicPr>
-          <p:nvPr/>
-        </p:nvPicPr>
-        <p:blipFill>
-          <a:blip xmlns:r="http://schemas.openxmlformats.org/officeDocument/2006/relationships" xmlns:a="http://schemas.openxmlformats.org/drawingml/2006/main" r:embed="R10476de56bc745ef"/>
-          <a:stretch xmlns:a="http://schemas.openxmlformats.org/drawingml/2006/main"/>
-        </p:blipFill>
-        <p:spPr>
-          <a:xfrm xmlns:a="http://schemas.openxmlformats.org/drawingml/2006/main">
-            <a:off x="6229350" y="1504950"/>
-            <a:ext cx="4953000" cy="4381500"/>
-          </a:xfrm>
-          <a:prstGeom xmlns:a="http://schemas.openxmlformats.org/drawingml/2006/main" prst="rect">
-            <a:avLst/>
-          </a:prstGeom>
-        </p:spPr>
-      </p:pic>
-      <p:sp>
-        <p:nvSpPr>
-          <p:cNvPr id="5" name="text-7">
+              <a:defRPr sz="2700" b="1">
+                <a:solidFill>
+                  <a:srgbClr val="102D3C"/>
+                </a:solidFill>
+                <a:latin typeface="Arial"/>
+                <a:ea typeface="Arial"/>
+                <a:cs typeface="Arial"/>
+              </a:defRPr>
+            </a:pPr>
+            <a:r>
+              <a:rPr sz="2700" b="1">
+                <a:solidFill>
+                  <a:srgbClr val="102D3C"/>
+                </a:solidFill>
+                <a:latin typeface="Arial"/>
+                <a:ea typeface="Arial"/>
+                <a:cs typeface="Arial"/>
+              </a:rPr>
+              <a:t>Within the next 60 days,</a:t>
+            </a:r>
+          </a:p>
+          <a:p xmlns:a="http://schemas.openxmlformats.org/drawingml/2006/main">
+            <a:pPr algn="l">
+              <a:defRPr sz="2700" b="1">
+                <a:solidFill>
+                  <a:srgbClr val="102D3C"/>
+                </a:solidFill>
+                <a:latin typeface="Arial"/>
+                <a:ea typeface="Arial"/>
+                <a:cs typeface="Arial"/>
+              </a:defRPr>
+            </a:pPr>
+            <a:r>
+              <a:rPr sz="2700" b="1">
+                <a:solidFill>
+                  <a:srgbClr val="102D3C"/>
+                </a:solidFill>
+                <a:latin typeface="Arial"/>
+                <a:ea typeface="Arial"/>
+                <a:cs typeface="Arial"/>
+              </a:rPr>
+              <a:t>prepare at most two renewals,</a:t>
+            </a:r>
+          </a:p>
+          <a:p xmlns:a="http://schemas.openxmlformats.org/drawingml/2006/main">
+            <a:pPr algn="l">
+              <a:defRPr sz="2700" b="1">
+                <a:solidFill>
+                  <a:srgbClr val="102D3C"/>
+                </a:solidFill>
+                <a:latin typeface="Arial"/>
+                <a:ea typeface="Arial"/>
+                <a:cs typeface="Arial"/>
+              </a:defRPr>
+            </a:pPr>
+            <a:r>
+              <a:rPr sz="2700" b="1">
+                <a:solidFill>
+                  <a:srgbClr val="102D3C"/>
+                </a:solidFill>
+                <a:latin typeface="Arial"/>
+                <a:ea typeface="Arial"/>
+                <a:cs typeface="Arial"/>
+              </a:rPr>
+              <a:t>earliest renewals first.</a:t>
+            </a:r>
+          </a:p>
+        </p:txBody>
+      </p:sp>
+      <p:sp>
+        <p:nvSpPr>
+          <p:cNvPr id="4" name="text-7">
             <a:extLst xmlns:a="http://schemas.openxmlformats.org/drawingml/2006/main">
               <a:ext uri="{FF2B5EF4-FFF2-40B4-BE49-F238E27FC236}">
-                <a16:creationId xmlns:a16="http://schemas.microsoft.com/office/drawing/2014/main" id="{DAFF725D-58C6-4D11-9024-93D5A9D2D7D5}"/>
+                <a16:creationId xmlns:a16="http://schemas.microsoft.com/office/drawing/2014/main" id="{759B6C23-2D73-4C71-B7AB-F22CA631C617}"/>
               </a:ext>
             </a:extLst>
           </p:cNvPr>
@@ -2329,8 +2260,8 @@
         </p:nvSpPr>
         <p:spPr>
           <a:xfrm xmlns:a="http://schemas.openxmlformats.org/drawingml/2006/main">
-            <a:off x="609600" y="6105525"/>
-            <a:ext cx="10972800" cy="342900"/>
+            <a:off x="609600" y="4581525"/>
+            <a:ext cx="5219700" cy="1123950"/>
           </a:xfrm>
           <a:prstGeom xmlns:a="http://schemas.openxmlformats.org/drawingml/2006/main" prst="rect">
             <a:avLst/>
@@ -2347,6 +2278,326 @@
           <a:lstStyle xmlns:a="http://schemas.openxmlformats.org/drawingml/2006/main"/>
           <a:p xmlns:a="http://schemas.openxmlformats.org/drawingml/2006/main">
             <a:pPr algn="l">
+              <a:defRPr sz="2100" b="0">
+                <a:solidFill>
+                  <a:srgbClr val="102D3C"/>
+                </a:solidFill>
+                <a:latin typeface="Arial"/>
+                <a:ea typeface="Arial"/>
+                <a:cs typeface="Arial"/>
+              </a:defRPr>
+            </a:pPr>
+            <a:r>
+              <a:rPr sz="2100" b="0">
+                <a:solidFill>
+                  <a:srgbClr val="102D3C"/>
+                </a:solidFill>
+                <a:latin typeface="Arial"/>
+                <a:ea typeface="Arial"/>
+                <a:cs typeface="Arial"/>
+              </a:rPr>
+              <a:t>The result should tell me who to contact</a:t>
+            </a:r>
+          </a:p>
+          <a:p xmlns:a="http://schemas.openxmlformats.org/drawingml/2006/main">
+            <a:pPr algn="l">
+              <a:defRPr sz="2100" b="0">
+                <a:solidFill>
+                  <a:srgbClr val="102D3C"/>
+                </a:solidFill>
+                <a:latin typeface="Arial"/>
+                <a:ea typeface="Arial"/>
+                <a:cs typeface="Arial"/>
+              </a:defRPr>
+            </a:pPr>
+            <a:r>
+              <a:rPr sz="2100" b="0">
+                <a:solidFill>
+                  <a:srgbClr val="102D3C"/>
+                </a:solidFill>
+                <a:latin typeface="Arial"/>
+                <a:ea typeface="Arial"/>
+                <a:cs typeface="Arial"/>
+              </a:rPr>
+              <a:t>and the price ceiling to negotiate.</a:t>
+            </a:r>
+          </a:p>
+        </p:txBody>
+      </p:sp>
+      <p:sp>
+        <p:nvSpPr>
+          <p:cNvPr id="5" name="text-8">
+            <a:extLst xmlns:a="http://schemas.openxmlformats.org/drawingml/2006/main">
+              <a:ext uri="{FF2B5EF4-FFF2-40B4-BE49-F238E27FC236}">
+                <a16:creationId xmlns:a16="http://schemas.microsoft.com/office/drawing/2014/main" id="{60487845-6758-47E9-AA17-91CD608D7B75}"/>
+              </a:ext>
+            </a:extLst>
+          </p:cNvPr>
+          <p:cNvSpPr>
+            <a:spLocks xmlns:a="http://schemas.openxmlformats.org/drawingml/2006/main" noGrp="1"/>
+          </p:cNvSpPr>
+          <p:nvPr/>
+        </p:nvSpPr>
+        <p:spPr>
+          <a:xfrm xmlns:a="http://schemas.openxmlformats.org/drawingml/2006/main">
+            <a:off x="6591300" y="1571625"/>
+            <a:ext cx="4991100" cy="428625"/>
+          </a:xfrm>
+          <a:prstGeom xmlns:a="http://schemas.openxmlformats.org/drawingml/2006/main" prst="rect">
+            <a:avLst/>
+          </a:prstGeom>
+          <a:noFill xmlns:a="http://schemas.openxmlformats.org/drawingml/2006/main"/>
+          <a:ln xmlns:a="http://schemas.openxmlformats.org/drawingml/2006/main" w="0">
+            <a:noFill/>
+          </a:ln>
+        </p:spPr>
+        <p:txBody>
+          <a:bodyPr xmlns:a="http://schemas.openxmlformats.org/drawingml/2006/main" wrap="square" lIns="0" tIns="0" rIns="0" bIns="0" anchor="t">
+            <a:noAutofit/>
+          </a:bodyPr>
+          <a:lstStyle xmlns:a="http://schemas.openxmlformats.org/drawingml/2006/main"/>
+          <a:p xmlns:a="http://schemas.openxmlformats.org/drawingml/2006/main">
+            <a:pPr algn="l">
+              <a:defRPr sz="2400" b="1">
+                <a:solidFill>
+                  <a:srgbClr val="2D6B51"/>
+                </a:solidFill>
+                <a:latin typeface="Arial"/>
+                <a:ea typeface="Arial"/>
+                <a:cs typeface="Arial"/>
+              </a:defRPr>
+            </a:pPr>
+            <a:r>
+              <a:rPr sz="2400" b="1">
+                <a:solidFill>
+                  <a:srgbClr val="2D6B51"/>
+                </a:solidFill>
+                <a:latin typeface="Arial"/>
+                <a:ea typeface="Arial"/>
+                <a:cs typeface="Arial"/>
+              </a:rPr>
+              <a:t>The company knows</a:t>
+            </a:r>
+          </a:p>
+        </p:txBody>
+      </p:sp>
+      <p:sp>
+        <p:nvSpPr>
+          <p:cNvPr id="6" name="text-9">
+            <a:extLst xmlns:a="http://schemas.openxmlformats.org/drawingml/2006/main">
+              <a:ext uri="{FF2B5EF4-FFF2-40B4-BE49-F238E27FC236}">
+                <a16:creationId xmlns:a16="http://schemas.microsoft.com/office/drawing/2014/main" id="{E9664668-164A-4154-96FB-320129B31225}"/>
+              </a:ext>
+            </a:extLst>
+          </p:cNvPr>
+          <p:cNvSpPr>
+            <a:spLocks xmlns:a="http://schemas.openxmlformats.org/drawingml/2006/main" noGrp="1"/>
+          </p:cNvSpPr>
+          <p:nvPr/>
+        </p:nvSpPr>
+        <p:spPr>
+          <a:xfrm xmlns:a="http://schemas.openxmlformats.org/drawingml/2006/main">
+            <a:off x="6591300" y="2247900"/>
+            <a:ext cx="4991100" cy="1790700"/>
+          </a:xfrm>
+          <a:prstGeom xmlns:a="http://schemas.openxmlformats.org/drawingml/2006/main" prst="rect">
+            <a:avLst/>
+          </a:prstGeom>
+          <a:noFill xmlns:a="http://schemas.openxmlformats.org/drawingml/2006/main"/>
+          <a:ln xmlns:a="http://schemas.openxmlformats.org/drawingml/2006/main" w="0">
+            <a:noFill/>
+          </a:ln>
+        </p:spPr>
+        <p:txBody>
+          <a:bodyPr xmlns:a="http://schemas.openxmlformats.org/drawingml/2006/main" wrap="square" lIns="0" tIns="0" rIns="0" bIns="0" anchor="t">
+            <a:noAutofit/>
+          </a:bodyPr>
+          <a:lstStyle xmlns:a="http://schemas.openxmlformats.org/drawingml/2006/main"/>
+          <a:p xmlns:a="http://schemas.openxmlformats.org/drawingml/2006/main">
+            <a:pPr algn="l">
+              <a:defRPr sz="2400" b="0">
+                <a:solidFill>
+                  <a:srgbClr val="102D3C"/>
+                </a:solidFill>
+                <a:latin typeface="Arial"/>
+                <a:ea typeface="Arial"/>
+                <a:cs typeface="Arial"/>
+              </a:defRPr>
+            </a:pPr>
+            <a:r>
+              <a:rPr sz="2400" b="0">
+                <a:solidFill>
+                  <a:srgbClr val="102D3C"/>
+                </a:solidFill>
+                <a:latin typeface="Arial"/>
+                <a:ea typeface="Arial"/>
+                <a:cs typeface="Arial"/>
+              </a:rPr>
+              <a:t>Private supplier quotes and prices</a:t>
+            </a:r>
+          </a:p>
+          <a:p xmlns:a="http://schemas.openxmlformats.org/drawingml/2006/main">
+            <a:pPr algn="l">
+              <a:defRPr sz="2400" b="0">
+                <a:solidFill>
+                  <a:srgbClr val="102D3C"/>
+                </a:solidFill>
+                <a:latin typeface="Arial"/>
+                <a:ea typeface="Arial"/>
+                <a:cs typeface="Arial"/>
+              </a:defRPr>
+            </a:pPr>
+            <a:r>
+              <a:rPr sz="2400" b="0">
+                <a:solidFill>
+                  <a:srgbClr val="102D3C"/>
+                </a:solidFill>
+                <a:latin typeface="Arial"/>
+                <a:ea typeface="Arial"/>
+                <a:cs typeface="Arial"/>
+              </a:rPr>
+              <a:t>Private price and service rules</a:t>
+            </a:r>
+          </a:p>
+          <a:p xmlns:a="http://schemas.openxmlformats.org/drawingml/2006/main">
+            <a:pPr algn="l">
+              <a:defRPr sz="2400" b="0">
+                <a:solidFill>
+                  <a:srgbClr val="102D3C"/>
+                </a:solidFill>
+                <a:latin typeface="Arial"/>
+                <a:ea typeface="Arial"/>
+                <a:cs typeface="Arial"/>
+              </a:defRPr>
+            </a:pPr>
+            <a:r>
+              <a:rPr sz="2400" b="0">
+                <a:solidFill>
+                  <a:srgbClr val="102D3C"/>
+                </a:solidFill>
+                <a:latin typeface="Arial"/>
+                <a:ea typeface="Arial"/>
+                <a:cs typeface="Arial"/>
+              </a:rPr>
+              <a:t>Which renewals meet those rules</a:t>
+            </a:r>
+          </a:p>
+        </p:txBody>
+      </p:sp>
+      <p:sp>
+        <p:nvSpPr>
+          <p:cNvPr id="7" name="text-10">
+            <a:extLst xmlns:a="http://schemas.openxmlformats.org/drawingml/2006/main">
+              <a:ext uri="{FF2B5EF4-FFF2-40B4-BE49-F238E27FC236}">
+                <a16:creationId xmlns:a16="http://schemas.microsoft.com/office/drawing/2014/main" id="{7CEF4C5D-5495-4046-8071-325943111C71}"/>
+              </a:ext>
+            </a:extLst>
+          </p:cNvPr>
+          <p:cNvSpPr>
+            <a:spLocks xmlns:a="http://schemas.openxmlformats.org/drawingml/2006/main" noGrp="1"/>
+          </p:cNvSpPr>
+          <p:nvPr/>
+        </p:nvSpPr>
+        <p:spPr>
+          <a:xfrm xmlns:a="http://schemas.openxmlformats.org/drawingml/2006/main">
+            <a:off x="6591300" y="4581525"/>
+            <a:ext cx="4991100" cy="1123950"/>
+          </a:xfrm>
+          <a:prstGeom xmlns:a="http://schemas.openxmlformats.org/drawingml/2006/main" prst="rect">
+            <a:avLst/>
+          </a:prstGeom>
+          <a:noFill xmlns:a="http://schemas.openxmlformats.org/drawingml/2006/main"/>
+          <a:ln xmlns:a="http://schemas.openxmlformats.org/drawingml/2006/main" w="0">
+            <a:noFill/>
+          </a:ln>
+        </p:spPr>
+        <p:txBody>
+          <a:bodyPr xmlns:a="http://schemas.openxmlformats.org/drawingml/2006/main" wrap="square" lIns="0" tIns="0" rIns="0" bIns="0" anchor="t">
+            <a:noAutofit/>
+          </a:bodyPr>
+          <a:lstStyle xmlns:a="http://schemas.openxmlformats.org/drawingml/2006/main"/>
+          <a:p xmlns:a="http://schemas.openxmlformats.org/drawingml/2006/main">
+            <a:pPr algn="l">
+              <a:defRPr sz="2100" b="0">
+                <a:solidFill>
+                  <a:srgbClr val="102D3C"/>
+                </a:solidFill>
+                <a:latin typeface="Arial"/>
+                <a:ea typeface="Arial"/>
+                <a:cs typeface="Arial"/>
+              </a:defRPr>
+            </a:pPr>
+            <a:r>
+              <a:rPr sz="2100" b="0">
+                <a:solidFill>
+                  <a:srgbClr val="102D3C"/>
+                </a:solidFill>
+                <a:latin typeface="Arial"/>
+                <a:ea typeface="Arial"/>
+                <a:cs typeface="Arial"/>
+              </a:rPr>
+              <a:t>Those facts determine the selection</a:t>
+            </a:r>
+          </a:p>
+          <a:p xmlns:a="http://schemas.openxmlformats.org/drawingml/2006/main">
+            <a:pPr algn="l">
+              <a:defRPr sz="2100" b="0">
+                <a:solidFill>
+                  <a:srgbClr val="102D3C"/>
+                </a:solidFill>
+                <a:latin typeface="Arial"/>
+                <a:ea typeface="Arial"/>
+                <a:cs typeface="Arial"/>
+              </a:defRPr>
+            </a:pPr>
+            <a:r>
+              <a:rPr sz="2100" b="0">
+                <a:solidFill>
+                  <a:srgbClr val="102D3C"/>
+                </a:solidFill>
+                <a:latin typeface="Arial"/>
+                <a:ea typeface="Arial"/>
+                <a:cs typeface="Arial"/>
+              </a:rPr>
+              <a:t>and the useful brief, inside the host.</a:t>
+            </a:r>
+          </a:p>
+        </p:txBody>
+      </p:sp>
+      <p:sp>
+        <p:nvSpPr>
+          <p:cNvPr id="8" name="text-11">
+            <a:extLst xmlns:a="http://schemas.openxmlformats.org/drawingml/2006/main">
+              <a:ext uri="{FF2B5EF4-FFF2-40B4-BE49-F238E27FC236}">
+                <a16:creationId xmlns:a16="http://schemas.microsoft.com/office/drawing/2014/main" id="{33F1860C-8EB1-4D45-A270-A1E3AF1701A4}"/>
+              </a:ext>
+            </a:extLst>
+          </p:cNvPr>
+          <p:cNvSpPr>
+            <a:spLocks xmlns:a="http://schemas.openxmlformats.org/drawingml/2006/main" noGrp="1"/>
+          </p:cNvSpPr>
+          <p:nvPr/>
+        </p:nvSpPr>
+        <p:spPr>
+          <a:xfrm xmlns:a="http://schemas.openxmlformats.org/drawingml/2006/main">
+            <a:off x="609600" y="6096000"/>
+            <a:ext cx="10972800" cy="523875"/>
+          </a:xfrm>
+          <a:prstGeom xmlns:a="http://schemas.openxmlformats.org/drawingml/2006/main" prst="rect">
+            <a:avLst/>
+          </a:prstGeom>
+          <a:noFill xmlns:a="http://schemas.openxmlformats.org/drawingml/2006/main"/>
+          <a:ln xmlns:a="http://schemas.openxmlformats.org/drawingml/2006/main" w="0">
+            <a:noFill/>
+          </a:ln>
+        </p:spPr>
+        <p:txBody>
+          <a:bodyPr xmlns:a="http://schemas.openxmlformats.org/drawingml/2006/main" wrap="square" lIns="0" tIns="0" rIns="0" bIns="0" anchor="t">
+            <a:noAutofit/>
+          </a:bodyPr>
+          <a:lstStyle xmlns:a="http://schemas.openxmlformats.org/drawingml/2006/main"/>
+          <a:p xmlns:a="http://schemas.openxmlformats.org/drawingml/2006/main">
+            <a:pPr algn="l">
               <a:defRPr sz="1700" b="0">
                 <a:solidFill>
                   <a:srgbClr val="465960"/>
@@ -2365,7 +2616,7 @@
                 <a:ea typeface="Arial"/>
                 <a:cs typeface="Arial"/>
               </a:rPr>
-              <a:t>Synthetic contracts. Negotiation targets are potential outcomes.</a:t>
+              <a:t>Public intent is disclosed. The demonstrated records and rule bodies stay local. All records are synthetic.</a:t>
             </a:r>
           </a:p>
         </p:txBody>
@@ -2373,7 +2624,7 @@
     </p:spTree>
     <p:extLst>
       <p:ext uri="{BB962C8B-B14F-4D97-AF65-F5344CB8AC3E}">
-        <p14:creationId xmlns:p14="http://schemas.microsoft.com/office/powerpoint/2010/main" val="375819350"/>
+        <p14:creationId xmlns:p14="http://schemas.microsoft.com/office/powerpoint/2010/main" val="223280764"/>
       </p:ext>
     </p:extLst>
   </p:cSld>
@@ -2401,10 +2652,10 @@
       </p:grpSpPr>
       <p:sp>
         <p:nvSpPr>
-          <p:cNvPr id="7" name="text-8">
+          <p:cNvPr id="7" name="text-12">
             <a:extLst xmlns:a="http://schemas.openxmlformats.org/drawingml/2006/main">
               <a:ext uri="{FF2B5EF4-FFF2-40B4-BE49-F238E27FC236}">
-                <a16:creationId xmlns:a16="http://schemas.microsoft.com/office/drawing/2014/main" id="{E09B3A59-783D-433A-BE34-78496D466125}"/>
+                <a16:creationId xmlns:a16="http://schemas.microsoft.com/office/drawing/2014/main" id="{964E4375-FADE-4208-9CA6-19EA043C68A6}"/>
               </a:ext>
             </a:extLst>
           </p:cNvPr>
@@ -2451,17 +2702,17 @@
                 <a:ea typeface="Arial"/>
                 <a:cs typeface="Arial"/>
               </a:rPr>
-              <a:t>An employee intention changes the method</a:t>
-            </a:r>
-          </a:p>
-        </p:txBody>
-      </p:sp>
-      <p:sp>
-        <p:nvSpPr>
-          <p:cNvPr id="2" name="text-9">
+              <a:t>Actual AI composes an approved method</a:t>
+            </a:r>
+          </a:p>
+        </p:txBody>
+      </p:sp>
+      <p:sp>
+        <p:nvSpPr>
+          <p:cNvPr id="2" name="text-13">
             <a:extLst xmlns:a="http://schemas.openxmlformats.org/drawingml/2006/main">
               <a:ext uri="{FF2B5EF4-FFF2-40B4-BE49-F238E27FC236}">
-                <a16:creationId xmlns:a16="http://schemas.microsoft.com/office/drawing/2014/main" id="{E7A0418E-5ED2-4F12-94EA-A6A960587A2C}"/>
+                <a16:creationId xmlns:a16="http://schemas.microsoft.com/office/drawing/2014/main" id="{87630308-2383-4FE0-A630-1FD5087A2607}"/>
               </a:ext>
             </a:extLst>
           </p:cNvPr>
@@ -2472,8 +2723,8 @@
         </p:nvSpPr>
         <p:spPr>
           <a:xfrm xmlns:a="http://schemas.openxmlformats.org/drawingml/2006/main">
-            <a:off x="609600" y="1619250"/>
-            <a:ext cx="5353050" cy="1695450"/>
+            <a:off x="609600" y="1571625"/>
+            <a:ext cx="5048250" cy="666750"/>
           </a:xfrm>
           <a:prstGeom xmlns:a="http://schemas.openxmlformats.org/drawingml/2006/main" prst="rect">
             <a:avLst/>
@@ -2490,81 +2741,35 @@
           <a:lstStyle xmlns:a="http://schemas.openxmlformats.org/drawingml/2006/main"/>
           <a:p xmlns:a="http://schemas.openxmlformats.org/drawingml/2006/main">
             <a:pPr algn="l">
-              <a:defRPr sz="2600" b="1">
-                <a:solidFill>
-                  <a:srgbClr val="102D3C"/>
-                </a:solidFill>
-                <a:latin typeface="Arial"/>
-                <a:ea typeface="Arial"/>
-                <a:cs typeface="Arial"/>
-              </a:defRPr>
-            </a:pPr>
-            <a:r>
-              <a:rPr sz="2600" b="1">
-                <a:solidFill>
-                  <a:srgbClr val="102D3C"/>
-                </a:solidFill>
-                <a:latin typeface="Arial"/>
-                <a:ea typeface="Arial"/>
-                <a:cs typeface="Arial"/>
-              </a:rPr>
-              <a:t>Within the next 60 days,</a:t>
-            </a:r>
-          </a:p>
-          <a:p xmlns:a="http://schemas.openxmlformats.org/drawingml/2006/main">
-            <a:pPr algn="l">
-              <a:defRPr sz="2600" b="1">
-                <a:solidFill>
-                  <a:srgbClr val="102D3C"/>
-                </a:solidFill>
-                <a:latin typeface="Arial"/>
-                <a:ea typeface="Arial"/>
-                <a:cs typeface="Arial"/>
-              </a:defRPr>
-            </a:pPr>
-            <a:r>
-              <a:rPr sz="2600" b="1">
-                <a:solidFill>
-                  <a:srgbClr val="102D3C"/>
-                </a:solidFill>
-                <a:latin typeface="Arial"/>
-                <a:ea typeface="Arial"/>
-                <a:cs typeface="Arial"/>
-              </a:rPr>
-              <a:t>prepare at most two renewals,</a:t>
-            </a:r>
-          </a:p>
-          <a:p xmlns:a="http://schemas.openxmlformats.org/drawingml/2006/main">
-            <a:pPr algn="l">
-              <a:defRPr sz="2600" b="1">
-                <a:solidFill>
-                  <a:srgbClr val="102D3C"/>
-                </a:solidFill>
-                <a:latin typeface="Arial"/>
-                <a:ea typeface="Arial"/>
-                <a:cs typeface="Arial"/>
-              </a:defRPr>
-            </a:pPr>
-            <a:r>
-              <a:rPr sz="2600" b="1">
-                <a:solidFill>
-                  <a:srgbClr val="102D3C"/>
-                </a:solidFill>
-                <a:latin typeface="Arial"/>
-                <a:ea typeface="Arial"/>
-                <a:cs typeface="Arial"/>
-              </a:rPr>
-              <a:t>earliest renewals first.</a:t>
-            </a:r>
-          </a:p>
-        </p:txBody>
-      </p:sp>
-      <p:sp>
-        <p:nvSpPr>
-          <p:cNvPr id="3" name="text-10">
+              <a:defRPr sz="2300" b="1">
+                <a:solidFill>
+                  <a:srgbClr val="2D6B51"/>
+                </a:solidFill>
+                <a:latin typeface="Arial"/>
+                <a:ea typeface="Arial"/>
+                <a:cs typeface="Arial"/>
+              </a:defRPr>
+            </a:pPr>
+            <a:r>
+              <a:rPr sz="2300" b="1">
+                <a:solidFill>
+                  <a:srgbClr val="2D6B51"/>
+                </a:solidFill>
+                <a:latin typeface="Arial"/>
+                <a:ea typeface="Arial"/>
+                <a:cs typeface="Arial"/>
+              </a:rPr>
+              <a:t>Public request + capabilities</a:t>
+            </a:r>
+          </a:p>
+        </p:txBody>
+      </p:sp>
+      <p:sp>
+        <p:nvSpPr>
+          <p:cNvPr id="3" name="text-14">
             <a:extLst xmlns:a="http://schemas.openxmlformats.org/drawingml/2006/main">
               <a:ext uri="{FF2B5EF4-FFF2-40B4-BE49-F238E27FC236}">
-                <a16:creationId xmlns:a16="http://schemas.microsoft.com/office/drawing/2014/main" id="{31FB3911-390A-41C1-B234-902571FFA07F}"/>
+                <a16:creationId xmlns:a16="http://schemas.microsoft.com/office/drawing/2014/main" id="{27B04038-BA60-4E88-B2A2-9B564C541531}"/>
               </a:ext>
             </a:extLst>
           </p:cNvPr>
@@ -2575,8 +2780,8 @@
         </p:nvSpPr>
         <p:spPr>
           <a:xfrm xmlns:a="http://schemas.openxmlformats.org/drawingml/2006/main">
-            <a:off x="609600" y="3714750"/>
-            <a:ext cx="5219700" cy="1943100"/>
+            <a:off x="609600" y="2514600"/>
+            <a:ext cx="4743450" cy="2209800"/>
           </a:xfrm>
           <a:prstGeom xmlns:a="http://schemas.openxmlformats.org/drawingml/2006/main" prst="rect">
             <a:avLst/>
@@ -2593,42 +2798,42 @@
           <a:lstStyle xmlns:a="http://schemas.openxmlformats.org/drawingml/2006/main"/>
           <a:p xmlns:a="http://schemas.openxmlformats.org/drawingml/2006/main">
             <a:pPr algn="l">
-              <a:defRPr sz="2300" b="1">
-                <a:solidFill>
-                  <a:srgbClr val="2D6B51"/>
-                </a:solidFill>
-                <a:latin typeface="Arial"/>
-                <a:ea typeface="Arial"/>
-                <a:cs typeface="Arial"/>
-              </a:defRPr>
-            </a:pPr>
-            <a:r>
-              <a:rPr sz="2300" b="1">
-                <a:solidFill>
-                  <a:srgbClr val="2D6B51"/>
-                </a:solidFill>
-                <a:latin typeface="Arial"/>
-                <a:ea typeface="Arial"/>
-                <a:cs typeface="Arial"/>
-              </a:rPr>
-              <a:t>Actual AI choices</a:t>
-            </a:r>
-          </a:p>
-          <a:p xmlns:a="http://schemas.openxmlformats.org/drawingml/2006/main">
-            <a:pPr algn="l">
-              <a:defRPr sz="2300" b="1">
-                <a:solidFill>
-                  <a:srgbClr val="2D6B51"/>
-                </a:solidFill>
-                <a:latin typeface="Arial"/>
-                <a:ea typeface="Arial"/>
-                <a:cs typeface="Arial"/>
-              </a:defRPr>
-            </a:pPr>
-            <a:r>
-              <a:rPr sz="2300" b="1">
-                <a:solidFill>
-                  <a:srgbClr val="2D6B51"/>
+              <a:defRPr sz="2700" b="1">
+                <a:solidFill>
+                  <a:srgbClr val="102D3C"/>
+                </a:solidFill>
+                <a:latin typeface="Arial"/>
+                <a:ea typeface="Arial"/>
+                <a:cs typeface="Arial"/>
+              </a:defRPr>
+            </a:pPr>
+            <a:r>
+              <a:rPr sz="2700" b="1">
+                <a:solidFill>
+                  <a:srgbClr val="102D3C"/>
+                </a:solidFill>
+                <a:latin typeface="Arial"/>
+                <a:ea typeface="Arial"/>
+                <a:cs typeface="Arial"/>
+              </a:rPr>
+              <a:t>AI chose</a:t>
+            </a:r>
+          </a:p>
+          <a:p xmlns:a="http://schemas.openxmlformats.org/drawingml/2006/main">
+            <a:pPr algn="l">
+              <a:defRPr sz="2700" b="1">
+                <a:solidFill>
+                  <a:srgbClr val="102D3C"/>
+                </a:solidFill>
+                <a:latin typeface="Arial"/>
+                <a:ea typeface="Arial"/>
+                <a:cs typeface="Arial"/>
+              </a:defRPr>
+            </a:pPr>
+            <a:r>
+              <a:rPr sz="2700" b="1">
+                <a:solidFill>
+                  <a:srgbClr val="102D3C"/>
                 </a:solidFill>
                 <a:latin typeface="Arial"/>
                 <a:ea typeface="Arial"/>
@@ -2639,19 +2844,19 @@
           </a:p>
           <a:p xmlns:a="http://schemas.openxmlformats.org/drawingml/2006/main">
             <a:pPr algn="l">
-              <a:defRPr sz="2300" b="1">
-                <a:solidFill>
-                  <a:srgbClr val="2D6B51"/>
-                </a:solidFill>
-                <a:latin typeface="Arial"/>
-                <a:ea typeface="Arial"/>
-                <a:cs typeface="Arial"/>
-              </a:defRPr>
-            </a:pPr>
-            <a:r>
-              <a:rPr sz="2300" b="1">
-                <a:solidFill>
-                  <a:srgbClr val="2D6B51"/>
+              <a:defRPr sz="2700" b="1">
+                <a:solidFill>
+                  <a:srgbClr val="102D3C"/>
+                </a:solidFill>
+                <a:latin typeface="Arial"/>
+                <a:ea typeface="Arial"/>
+                <a:cs typeface="Arial"/>
+              </a:defRPr>
+            </a:pPr>
+            <a:r>
+              <a:rPr sz="2700" b="1">
+                <a:solidFill>
+                  <a:srgbClr val="102D3C"/>
                 </a:solidFill>
                 <a:latin typeface="Arial"/>
                 <a:ea typeface="Arial"/>
@@ -2662,19 +2867,19 @@
           </a:p>
           <a:p xmlns:a="http://schemas.openxmlformats.org/drawingml/2006/main">
             <a:pPr algn="l">
-              <a:defRPr sz="2300" b="1">
-                <a:solidFill>
-                  <a:srgbClr val="2D6B51"/>
-                </a:solidFill>
-                <a:latin typeface="Arial"/>
-                <a:ea typeface="Arial"/>
-                <a:cs typeface="Arial"/>
-              </a:defRPr>
-            </a:pPr>
-            <a:r>
-              <a:rPr sz="2300" b="1">
-                <a:solidFill>
-                  <a:srgbClr val="2D6B51"/>
+              <a:defRPr sz="2700" b="1">
+                <a:solidFill>
+                  <a:srgbClr val="102D3C"/>
+                </a:solidFill>
+                <a:latin typeface="Arial"/>
+                <a:ea typeface="Arial"/>
+                <a:cs typeface="Arial"/>
+              </a:defRPr>
+            </a:pPr>
+            <a:r>
+              <a:rPr sz="2700" b="1">
+                <a:solidFill>
+                  <a:srgbClr val="102D3C"/>
                 </a:solidFill>
                 <a:latin typeface="Arial"/>
                 <a:ea typeface="Arial"/>
@@ -2687,10 +2892,10 @@
       </p:sp>
       <p:sp>
         <p:nvSpPr>
-          <p:cNvPr id="4" name="text-11">
+          <p:cNvPr id="4" name="text-15">
             <a:extLst xmlns:a="http://schemas.openxmlformats.org/drawingml/2006/main">
               <a:ext uri="{FF2B5EF4-FFF2-40B4-BE49-F238E27FC236}">
-                <a16:creationId xmlns:a16="http://schemas.microsoft.com/office/drawing/2014/main" id="{2C39A541-C6A7-441A-900E-6C8347FDCBFD}"/>
+                <a16:creationId xmlns:a16="http://schemas.microsoft.com/office/drawing/2014/main" id="{063D1585-7DC9-4E56-82B4-A3B827026834}"/>
               </a:ext>
             </a:extLst>
           </p:cNvPr>
@@ -2701,8 +2906,8 @@
         </p:nvSpPr>
         <p:spPr>
           <a:xfrm xmlns:a="http://schemas.openxmlformats.org/drawingml/2006/main">
-            <a:off x="6438900" y="1571625"/>
-            <a:ext cx="5143500" cy="428625"/>
+            <a:off x="6477000" y="1571625"/>
+            <a:ext cx="5105400" cy="438150"/>
           </a:xfrm>
           <a:prstGeom xmlns:a="http://schemas.openxmlformats.org/drawingml/2006/main" prst="rect">
             <a:avLst/>
@@ -2737,17 +2942,17 @@
                 <a:ea typeface="Arial"/>
                 <a:cs typeface="Arial"/>
               </a:rPr>
-              <a:t>Admitted operation method</a:t>
-            </a:r>
-          </a:p>
-        </p:txBody>
-      </p:sp>
-      <p:sp>
-        <p:nvSpPr>
-          <p:cNvPr id="5" name="text-12">
+              <a:t>Admitted operations</a:t>
+            </a:r>
+          </a:p>
+        </p:txBody>
+      </p:sp>
+      <p:sp>
+        <p:nvSpPr>
+          <p:cNvPr id="5" name="text-16">
             <a:extLst xmlns:a="http://schemas.openxmlformats.org/drawingml/2006/main">
               <a:ext uri="{FF2B5EF4-FFF2-40B4-BE49-F238E27FC236}">
-                <a16:creationId xmlns:a16="http://schemas.microsoft.com/office/drawing/2014/main" id="{7B57A12C-CDF6-4A7D-82A1-F80E480181E1}"/>
+                <a16:creationId xmlns:a16="http://schemas.microsoft.com/office/drawing/2014/main" id="{889F189E-5DDD-450F-9FCE-B4BB77D16AFA}"/>
               </a:ext>
             </a:extLst>
           </p:cNvPr>
@@ -2758,8 +2963,8 @@
         </p:nvSpPr>
         <p:spPr>
           <a:xfrm xmlns:a="http://schemas.openxmlformats.org/drawingml/2006/main">
-            <a:off x="6438900" y="2219325"/>
-            <a:ext cx="5143500" cy="3295650"/>
+            <a:off x="6477000" y="2409825"/>
+            <a:ext cx="5105400" cy="3028950"/>
           </a:xfrm>
           <a:prstGeom xmlns:a="http://schemas.openxmlformats.org/drawingml/2006/main" prst="rect">
             <a:avLst/>
@@ -2893,10 +3098,10 @@
       </p:sp>
       <p:sp>
         <p:nvSpPr>
-          <p:cNvPr id="6" name="text-13">
+          <p:cNvPr id="6" name="text-17">
             <a:extLst xmlns:a="http://schemas.openxmlformats.org/drawingml/2006/main">
               <a:ext uri="{FF2B5EF4-FFF2-40B4-BE49-F238E27FC236}">
-                <a16:creationId xmlns:a16="http://schemas.microsoft.com/office/drawing/2014/main" id="{030F9EE0-A7BC-4DCC-A02B-ED309988DA75}"/>
+                <a16:creationId xmlns:a16="http://schemas.microsoft.com/office/drawing/2014/main" id="{365995C5-BAD0-4E4D-87A8-2E11CFDB8759}"/>
               </a:ext>
             </a:extLst>
           </p:cNvPr>
@@ -2907,8 +3112,8 @@
         </p:nvSpPr>
         <p:spPr>
           <a:xfrm xmlns:a="http://schemas.openxmlformats.org/drawingml/2006/main">
-            <a:off x="609600" y="6010275"/>
-            <a:ext cx="10972800" cy="552450"/>
+            <a:off x="609600" y="6019800"/>
+            <a:ext cx="10972800" cy="619125"/>
           </a:xfrm>
           <a:prstGeom xmlns:a="http://schemas.openxmlformats.org/drawingml/2006/main" prst="rect">
             <a:avLst/>
@@ -2943,7 +3148,7 @@
                 <a:ea typeface="Arial"/>
                 <a:cs typeface="Arial"/>
               </a:rPr>
-              <a:t>One previously unprepared public intention. Company records and rule bodies remain local.</a:t>
+              <a:t>The host checks the whole method before private access. No arbitrary code, SQL or network operations.</a:t>
             </a:r>
           </a:p>
         </p:txBody>
@@ -2951,7 +3156,7 @@
     </p:spTree>
     <p:extLst>
       <p:ext uri="{BB962C8B-B14F-4D97-AF65-F5344CB8AC3E}">
-        <p14:creationId xmlns:p14="http://schemas.microsoft.com/office/powerpoint/2010/main" val="1804878353"/>
+        <p14:creationId xmlns:p14="http://schemas.microsoft.com/office/powerpoint/2010/main" val="1988090216"/>
       </p:ext>
     </p:extLst>
   </p:cSld>
@@ -2979,10 +3184,10 @@
       </p:grpSpPr>
       <p:sp>
         <p:nvSpPr>
-          <p:cNvPr id="10" name="text-14">
+          <p:cNvPr id="10" name="text-18">
             <a:extLst xmlns:a="http://schemas.openxmlformats.org/drawingml/2006/main">
               <a:ext uri="{FF2B5EF4-FFF2-40B4-BE49-F238E27FC236}">
-                <a16:creationId xmlns:a16="http://schemas.microsoft.com/office/drawing/2014/main" id="{1BDEB49F-5766-4513-BFC2-D08221299003}"/>
+                <a16:creationId xmlns:a16="http://schemas.microsoft.com/office/drawing/2014/main" id="{18B43892-5014-41B8-B217-2AF6F353EC02}"/>
               </a:ext>
             </a:extLst>
           </p:cNvPr>
@@ -3029,27 +3234,392 @@
                 <a:ea typeface="Arial"/>
                 <a:cs typeface="Arial"/>
               </a:rPr>
-              <a:t>A private change changes the useful brief</a:t>
+              <a:t>Private changes produce a different useful brief</a:t>
+            </a:r>
+          </a:p>
+        </p:txBody>
+      </p:sp>
+      <p:sp>
+        <p:nvSpPr>
+          <p:cNvPr id="2" name="text-19">
+            <a:extLst xmlns:a="http://schemas.openxmlformats.org/drawingml/2006/main">
+              <a:ext uri="{FF2B5EF4-FFF2-40B4-BE49-F238E27FC236}">
+                <a16:creationId xmlns:a16="http://schemas.microsoft.com/office/drawing/2014/main" id="{A198911D-FB75-44A2-9E71-8426D07E5D1F}"/>
+              </a:ext>
+            </a:extLst>
+          </p:cNvPr>
+          <p:cNvSpPr>
+            <a:spLocks xmlns:a="http://schemas.openxmlformats.org/drawingml/2006/main" noGrp="1"/>
+          </p:cNvSpPr>
+          <p:nvPr/>
+        </p:nvSpPr>
+        <p:spPr>
+          <a:xfrm xmlns:a="http://schemas.openxmlformats.org/drawingml/2006/main">
+            <a:off x="609600" y="1590675"/>
+            <a:ext cx="4876800" cy="419100"/>
+          </a:xfrm>
+          <a:prstGeom xmlns:a="http://schemas.openxmlformats.org/drawingml/2006/main" prst="rect">
+            <a:avLst/>
+          </a:prstGeom>
+          <a:noFill xmlns:a="http://schemas.openxmlformats.org/drawingml/2006/main"/>
+          <a:ln xmlns:a="http://schemas.openxmlformats.org/drawingml/2006/main" w="0">
+            <a:noFill/>
+          </a:ln>
+        </p:spPr>
+        <p:txBody>
+          <a:bodyPr xmlns:a="http://schemas.openxmlformats.org/drawingml/2006/main" wrap="square" lIns="0" tIns="0" rIns="0" bIns="0" anchor="t">
+            <a:noAutofit/>
+          </a:bodyPr>
+          <a:lstStyle xmlns:a="http://schemas.openxmlformats.org/drawingml/2006/main"/>
+          <a:p xmlns:a="http://schemas.openxmlformats.org/drawingml/2006/main">
+            <a:pPr algn="l">
+              <a:defRPr sz="2300" b="1">
+                <a:solidFill>
+                  <a:srgbClr val="465960"/>
+                </a:solidFill>
+                <a:latin typeface="Arial"/>
+                <a:ea typeface="Arial"/>
+                <a:cs typeface="Arial"/>
+              </a:defRPr>
+            </a:pPr>
+            <a:r>
+              <a:rPr sz="2300" b="1">
+                <a:solidFill>
+                  <a:srgbClr val="465960"/>
+                </a:solidFill>
+                <a:latin typeface="Arial"/>
+                <a:ea typeface="Arial"/>
+                <a:cs typeface="Arial"/>
+              </a:rPr>
+              <a:t>Before the private change</a:t>
+            </a:r>
+          </a:p>
+        </p:txBody>
+      </p:sp>
+      <p:sp>
+        <p:nvSpPr>
+          <p:cNvPr id="3" name="text-20">
+            <a:extLst xmlns:a="http://schemas.openxmlformats.org/drawingml/2006/main">
+              <a:ext uri="{FF2B5EF4-FFF2-40B4-BE49-F238E27FC236}">
+                <a16:creationId xmlns:a16="http://schemas.microsoft.com/office/drawing/2014/main" id="{B5C21E72-33D4-4834-A9F6-F3E4EE5E6FF1}"/>
+              </a:ext>
+            </a:extLst>
+          </p:cNvPr>
+          <p:cNvSpPr>
+            <a:spLocks xmlns:a="http://schemas.openxmlformats.org/drawingml/2006/main" noGrp="1"/>
+          </p:cNvSpPr>
+          <p:nvPr/>
+        </p:nvSpPr>
+        <p:spPr>
+          <a:xfrm xmlns:a="http://schemas.openxmlformats.org/drawingml/2006/main">
+            <a:off x="609600" y="2162175"/>
+            <a:ext cx="4876800" cy="666750"/>
+          </a:xfrm>
+          <a:prstGeom xmlns:a="http://schemas.openxmlformats.org/drawingml/2006/main" prst="rect">
+            <a:avLst/>
+          </a:prstGeom>
+          <a:noFill xmlns:a="http://schemas.openxmlformats.org/drawingml/2006/main"/>
+          <a:ln xmlns:a="http://schemas.openxmlformats.org/drawingml/2006/main" w="0">
+            <a:noFill/>
+          </a:ln>
+        </p:spPr>
+        <p:txBody>
+          <a:bodyPr xmlns:a="http://schemas.openxmlformats.org/drawingml/2006/main" wrap="square" lIns="0" tIns="0" rIns="0" bIns="0" anchor="t">
+            <a:noAutofit/>
+          </a:bodyPr>
+          <a:lstStyle xmlns:a="http://schemas.openxmlformats.org/drawingml/2006/main"/>
+          <a:p xmlns:a="http://schemas.openxmlformats.org/drawingml/2006/main">
+            <a:pPr algn="l">
+              <a:defRPr sz="3200" b="1">
+                <a:solidFill>
+                  <a:srgbClr val="102D3C"/>
+                </a:solidFill>
+                <a:latin typeface="Arial"/>
+                <a:ea typeface="Arial"/>
+                <a:cs typeface="Arial"/>
+              </a:defRPr>
+            </a:pPr>
+            <a:r>
+              <a:rPr sz="3200" b="1">
+                <a:solidFill>
+                  <a:srgbClr val="102D3C"/>
+                </a:solidFill>
+                <a:latin typeface="Arial"/>
+                <a:ea typeface="Arial"/>
+                <a:cs typeface="Arial"/>
+              </a:rPr>
+              <a:t>Near + Middle</a:t>
+            </a:r>
+          </a:p>
+        </p:txBody>
+      </p:sp>
+      <p:sp>
+        <p:nvSpPr>
+          <p:cNvPr id="4" name="text-21">
+            <a:extLst xmlns:a="http://schemas.openxmlformats.org/drawingml/2006/main">
+              <a:ext uri="{FF2B5EF4-FFF2-40B4-BE49-F238E27FC236}">
+                <a16:creationId xmlns:a16="http://schemas.microsoft.com/office/drawing/2014/main" id="{1E175E71-B76D-45F5-9234-5BB14A7EAE80}"/>
+              </a:ext>
+            </a:extLst>
+          </p:cNvPr>
+          <p:cNvSpPr>
+            <a:spLocks xmlns:a="http://schemas.openxmlformats.org/drawingml/2006/main" noGrp="1"/>
+          </p:cNvSpPr>
+          <p:nvPr/>
+        </p:nvSpPr>
+        <p:spPr>
+          <a:xfrm xmlns:a="http://schemas.openxmlformats.org/drawingml/2006/main">
+            <a:off x="609600" y="3181350"/>
+            <a:ext cx="5429250" cy="457200"/>
+          </a:xfrm>
+          <a:prstGeom xmlns:a="http://schemas.openxmlformats.org/drawingml/2006/main" prst="rect">
+            <a:avLst/>
+          </a:prstGeom>
+          <a:noFill xmlns:a="http://schemas.openxmlformats.org/drawingml/2006/main"/>
+          <a:ln xmlns:a="http://schemas.openxmlformats.org/drawingml/2006/main" w="0">
+            <a:noFill/>
+          </a:ln>
+        </p:spPr>
+        <p:txBody>
+          <a:bodyPr xmlns:a="http://schemas.openxmlformats.org/drawingml/2006/main" wrap="square" lIns="0" tIns="0" rIns="0" bIns="0" anchor="t">
+            <a:noAutofit/>
+          </a:bodyPr>
+          <a:lstStyle xmlns:a="http://schemas.openxmlformats.org/drawingml/2006/main"/>
+          <a:p xmlns:a="http://schemas.openxmlformats.org/drawingml/2006/main">
+            <a:pPr algn="l">
+              <a:defRPr sz="2200" b="1">
+                <a:solidFill>
+                  <a:srgbClr val="2D6B51"/>
+                </a:solidFill>
+                <a:latin typeface="Arial"/>
+                <a:ea typeface="Arial"/>
+                <a:cs typeface="Arial"/>
+              </a:defRPr>
+            </a:pPr>
+            <a:r>
+              <a:rPr sz="2200" b="1">
+                <a:solidFill>
+                  <a:srgbClr val="2D6B51"/>
+                </a:solidFill>
+                <a:latin typeface="Arial"/>
+                <a:ea typeface="Arial"/>
+                <a:cs typeface="Arial"/>
+              </a:rPr>
+              <a:t>After quotes and the price rule change</a:t>
+            </a:r>
+          </a:p>
+        </p:txBody>
+      </p:sp>
+      <p:sp>
+        <p:nvSpPr>
+          <p:cNvPr id="5" name="text-22">
+            <a:extLst xmlns:a="http://schemas.openxmlformats.org/drawingml/2006/main">
+              <a:ext uri="{FF2B5EF4-FFF2-40B4-BE49-F238E27FC236}">
+                <a16:creationId xmlns:a16="http://schemas.microsoft.com/office/drawing/2014/main" id="{775082BE-1C92-42E6-8EF8-17B1FB20DF31}"/>
+              </a:ext>
+            </a:extLst>
+          </p:cNvPr>
+          <p:cNvSpPr>
+            <a:spLocks xmlns:a="http://schemas.openxmlformats.org/drawingml/2006/main" noGrp="1"/>
+          </p:cNvSpPr>
+          <p:nvPr/>
+        </p:nvSpPr>
+        <p:spPr>
+          <a:xfrm xmlns:a="http://schemas.openxmlformats.org/drawingml/2006/main">
+            <a:off x="609600" y="3829050"/>
+            <a:ext cx="5191125" cy="714375"/>
+          </a:xfrm>
+          <a:prstGeom xmlns:a="http://schemas.openxmlformats.org/drawingml/2006/main" prst="rect">
+            <a:avLst/>
+          </a:prstGeom>
+          <a:noFill xmlns:a="http://schemas.openxmlformats.org/drawingml/2006/main"/>
+          <a:ln xmlns:a="http://schemas.openxmlformats.org/drawingml/2006/main" w="0">
+            <a:noFill/>
+          </a:ln>
+        </p:spPr>
+        <p:txBody>
+          <a:bodyPr xmlns:a="http://schemas.openxmlformats.org/drawingml/2006/main" wrap="square" lIns="0" tIns="0" rIns="0" bIns="0" anchor="t">
+            <a:noAutofit/>
+          </a:bodyPr>
+          <a:lstStyle xmlns:a="http://schemas.openxmlformats.org/drawingml/2006/main"/>
+          <a:p xmlns:a="http://schemas.openxmlformats.org/drawingml/2006/main">
+            <a:pPr algn="l">
+              <a:defRPr sz="3400" b="1">
+                <a:solidFill>
+                  <a:srgbClr val="2D6B51"/>
+                </a:solidFill>
+                <a:latin typeface="Arial"/>
+                <a:ea typeface="Arial"/>
+                <a:cs typeface="Arial"/>
+              </a:defRPr>
+            </a:pPr>
+            <a:r>
+              <a:rPr sz="3400" b="1">
+                <a:solidFill>
+                  <a:srgbClr val="2D6B51"/>
+                </a:solidFill>
+                <a:latin typeface="Arial"/>
+                <a:ea typeface="Arial"/>
+                <a:cs typeface="Arial"/>
+              </a:rPr>
+              <a:t>Middle + Large</a:t>
+            </a:r>
+          </a:p>
+        </p:txBody>
+      </p:sp>
+      <p:sp>
+        <p:nvSpPr>
+          <p:cNvPr id="6" name="text-23">
+            <a:extLst xmlns:a="http://schemas.openxmlformats.org/drawingml/2006/main">
+              <a:ext uri="{FF2B5EF4-FFF2-40B4-BE49-F238E27FC236}">
+                <a16:creationId xmlns:a16="http://schemas.microsoft.com/office/drawing/2014/main" id="{DFE7EF34-CD58-44AA-B4F9-3823F490ABD3}"/>
+              </a:ext>
+            </a:extLst>
+          </p:cNvPr>
+          <p:cNvSpPr>
+            <a:spLocks xmlns:a="http://schemas.openxmlformats.org/drawingml/2006/main" noGrp="1"/>
+          </p:cNvSpPr>
+          <p:nvPr/>
+        </p:nvSpPr>
+        <p:spPr>
+          <a:xfrm xmlns:a="http://schemas.openxmlformats.org/drawingml/2006/main">
+            <a:off x="609600" y="4810125"/>
+            <a:ext cx="5391150" cy="866775"/>
+          </a:xfrm>
+          <a:prstGeom xmlns:a="http://schemas.openxmlformats.org/drawingml/2006/main" prst="rect">
+            <a:avLst/>
+          </a:prstGeom>
+          <a:noFill xmlns:a="http://schemas.openxmlformats.org/drawingml/2006/main"/>
+          <a:ln xmlns:a="http://schemas.openxmlformats.org/drawingml/2006/main" w="0">
+            <a:noFill/>
+          </a:ln>
+        </p:spPr>
+        <p:txBody>
+          <a:bodyPr xmlns:a="http://schemas.openxmlformats.org/drawingml/2006/main" wrap="square" lIns="0" tIns="0" rIns="0" bIns="0" anchor="t">
+            <a:noAutofit/>
+          </a:bodyPr>
+          <a:lstStyle xmlns:a="http://schemas.openxmlformats.org/drawingml/2006/main"/>
+          <a:p xmlns:a="http://schemas.openxmlformats.org/drawingml/2006/main">
+            <a:pPr algn="l">
+              <a:defRPr sz="2200" b="0">
+                <a:solidFill>
+                  <a:srgbClr val="102D3C"/>
+                </a:solidFill>
+                <a:latin typeface="Arial"/>
+                <a:ea typeface="Arial"/>
+                <a:cs typeface="Arial"/>
+              </a:defRPr>
+            </a:pPr>
+            <a:r>
+              <a:rPr sz="2200" b="0">
+                <a:solidFill>
+                  <a:srgbClr val="102D3C"/>
+                </a:solidFill>
+                <a:latin typeface="Arial"/>
+                <a:ea typeface="Arial"/>
+                <a:cs typeface="Arial"/>
+              </a:rPr>
+              <a:t>Negotiation ceilings</a:t>
+            </a:r>
+          </a:p>
+          <a:p xmlns:a="http://schemas.openxmlformats.org/drawingml/2006/main">
+            <a:pPr algn="l">
+              <a:defRPr sz="2200" b="0">
+                <a:solidFill>
+                  <a:srgbClr val="102D3C"/>
+                </a:solidFill>
+                <a:latin typeface="Arial"/>
+                <a:ea typeface="Arial"/>
+                <a:cs typeface="Arial"/>
+              </a:defRPr>
+            </a:pPr>
+            <a:r>
+              <a:rPr sz="2200" b="0">
+                <a:solidFill>
+                  <a:srgbClr val="102D3C"/>
+                </a:solidFill>
+                <a:latin typeface="Arial"/>
+                <a:ea typeface="Arial"/>
+                <a:cs typeface="Arial"/>
+              </a:rPr>
+              <a:t>Middle: $2,080 · Large: $5,200</a:t>
+            </a:r>
+          </a:p>
+        </p:txBody>
+      </p:sp>
+      <p:sp>
+        <p:nvSpPr>
+          <p:cNvPr id="7" name="text-24">
+            <a:extLst xmlns:a="http://schemas.openxmlformats.org/drawingml/2006/main">
+              <a:ext uri="{FF2B5EF4-FFF2-40B4-BE49-F238E27FC236}">
+                <a16:creationId xmlns:a16="http://schemas.microsoft.com/office/drawing/2014/main" id="{D065A64E-0389-4BBE-B213-59A650E1C4EF}"/>
+              </a:ext>
+            </a:extLst>
+          </p:cNvPr>
+          <p:cNvSpPr>
+            <a:spLocks xmlns:a="http://schemas.openxmlformats.org/drawingml/2006/main" noGrp="1"/>
+          </p:cNvSpPr>
+          <p:nvPr/>
+        </p:nvSpPr>
+        <p:spPr>
+          <a:xfrm xmlns:a="http://schemas.openxmlformats.org/drawingml/2006/main">
+            <a:off x="609600" y="6048375"/>
+            <a:ext cx="10972800" cy="533400"/>
+          </a:xfrm>
+          <a:prstGeom xmlns:a="http://schemas.openxmlformats.org/drawingml/2006/main" prst="rect">
+            <a:avLst/>
+          </a:prstGeom>
+          <a:noFill xmlns:a="http://schemas.openxmlformats.org/drawingml/2006/main"/>
+          <a:ln xmlns:a="http://schemas.openxmlformats.org/drawingml/2006/main" w="0">
+            <a:noFill/>
+          </a:ln>
+        </p:spPr>
+        <p:txBody>
+          <a:bodyPr xmlns:a="http://schemas.openxmlformats.org/drawingml/2006/main" wrap="square" lIns="0" tIns="0" rIns="0" bIns="0" anchor="t">
+            <a:noAutofit/>
+          </a:bodyPr>
+          <a:lstStyle xmlns:a="http://schemas.openxmlformats.org/drawingml/2006/main"/>
+          <a:p xmlns:a="http://schemas.openxmlformats.org/drawingml/2006/main">
+            <a:pPr algn="l">
+              <a:defRPr sz="1700" b="0">
+                <a:solidFill>
+                  <a:srgbClr val="465960"/>
+                </a:solidFill>
+                <a:latin typeface="Arial"/>
+                <a:ea typeface="Arial"/>
+                <a:cs typeface="Arial"/>
+              </a:defRPr>
+            </a:pPr>
+            <a:r>
+              <a:rPr sz="1700" b="0">
+                <a:solidFill>
+                  <a:srgbClr val="465960"/>
+                </a:solidFill>
+                <a:latin typeface="Arial"/>
+                <a:ea typeface="Arial"/>
+                <a:cs typeface="Arial"/>
+              </a:rPr>
+              <a:t>$130 → $1,060 potential annual opportunity · synthetic USD</a:t>
             </a:r>
           </a:p>
         </p:txBody>
       </p:sp>
       <p:pic>
         <p:nvPicPr>
-          <p:cNvPr id="11" name=""/>
+          <p:cNvPr id="17" name=""/>
           <p:cNvPicPr>
             <a:picLocks xmlns:a="http://schemas.openxmlformats.org/drawingml/2006/main" noChangeAspect="1"/>
           </p:cNvPicPr>
           <p:nvPr/>
         </p:nvPicPr>
         <p:blipFill>
-          <a:blip xmlns:r="http://schemas.openxmlformats.org/officeDocument/2006/relationships" xmlns:a="http://schemas.openxmlformats.org/drawingml/2006/main" r:embed="Red62decfb6004173"/>
+          <a:blip xmlns:r="http://schemas.openxmlformats.org/officeDocument/2006/relationships" xmlns:a="http://schemas.openxmlformats.org/drawingml/2006/main" r:embed="R861d38d4b83f4cc1"/>
           <a:stretch xmlns:a="http://schemas.openxmlformats.org/drawingml/2006/main"/>
         </p:blipFill>
         <p:spPr>
           <a:xfrm xmlns:a="http://schemas.openxmlformats.org/drawingml/2006/main">
-            <a:off x="1699644" y="1714500"/>
-            <a:ext cx="2772912" cy="3952875"/>
+            <a:off x="7046785" y="1619250"/>
+            <a:ext cx="3927729" cy="3219450"/>
           </a:xfrm>
           <a:prstGeom xmlns:a="http://schemas.openxmlformats.org/drawingml/2006/main" prst="rect">
             <a:avLst/>
@@ -3058,10 +3628,10 @@
       </p:pic>
       <p:sp>
         <p:nvSpPr>
-          <p:cNvPr id="3" name="text-15">
+          <p:cNvPr id="9" name="text-25">
             <a:extLst xmlns:a="http://schemas.openxmlformats.org/drawingml/2006/main">
               <a:ext uri="{FF2B5EF4-FFF2-40B4-BE49-F238E27FC236}">
-                <a16:creationId xmlns:a16="http://schemas.microsoft.com/office/drawing/2014/main" id="{EF4D16B4-BA18-42F5-9455-7A7DB7D3852D}"/>
+                <a16:creationId xmlns:a16="http://schemas.microsoft.com/office/drawing/2014/main" id="{273F5650-7FBA-4AC7-AE1B-48283D216A88}"/>
               </a:ext>
             </a:extLst>
           </p:cNvPr>
@@ -3072,8 +3642,8 @@
         </p:nvSpPr>
         <p:spPr>
           <a:xfrm xmlns:a="http://schemas.openxmlformats.org/drawingml/2006/main">
-            <a:off x="5734050" y="1752600"/>
-            <a:ext cx="3476625" cy="1428750"/>
+            <a:off x="6438900" y="5133975"/>
+            <a:ext cx="5143500" cy="714375"/>
           </a:xfrm>
           <a:prstGeom xmlns:a="http://schemas.openxmlformats.org/drawingml/2006/main" prst="rect">
             <a:avLst/>
@@ -3090,7 +3660,7 @@
           <a:lstStyle xmlns:a="http://schemas.openxmlformats.org/drawingml/2006/main"/>
           <a:p xmlns:a="http://schemas.openxmlformats.org/drawingml/2006/main">
             <a:pPr algn="l">
-              <a:defRPr sz="2800" b="1">
+              <a:defRPr sz="2400" b="1">
                 <a:solidFill>
                   <a:srgbClr val="2D6B51"/>
                 </a:solidFill>
@@ -3100,7 +3670,7 @@
               </a:defRPr>
             </a:pPr>
             <a:r>
-              <a:rPr sz="2800" b="1">
+              <a:rPr sz="2400" b="1">
                 <a:solidFill>
                   <a:srgbClr val="2D6B51"/>
                 </a:solidFill>
@@ -3108,510 +3678,7 @@
                 <a:ea typeface="Arial"/>
                 <a:cs typeface="Arial"/>
               </a:rPr>
-              <a:t>$130</a:t>
-            </a:r>
-          </a:p>
-          <a:p xmlns:a="http://schemas.openxmlformats.org/drawingml/2006/main">
-            <a:pPr algn="l">
-              <a:defRPr sz="2800" b="1">
-                <a:solidFill>
-                  <a:srgbClr val="2D6B51"/>
-                </a:solidFill>
-                <a:latin typeface="Arial"/>
-                <a:ea typeface="Arial"/>
-                <a:cs typeface="Arial"/>
-              </a:defRPr>
-            </a:pPr>
-            <a:r>
-              <a:rPr sz="2800" b="1">
-                <a:solidFill>
-                  <a:srgbClr val="2D6B51"/>
-                </a:solidFill>
-                <a:latin typeface="Arial"/>
-                <a:ea typeface="Arial"/>
-                <a:cs typeface="Arial"/>
-              </a:rPr>
-              <a:t>to $1,060</a:t>
-            </a:r>
-          </a:p>
-        </p:txBody>
-      </p:sp>
-      <p:sp>
-        <p:nvSpPr>
-          <p:cNvPr id="4" name="text-16">
-            <a:extLst xmlns:a="http://schemas.openxmlformats.org/drawingml/2006/main">
-              <a:ext uri="{FF2B5EF4-FFF2-40B4-BE49-F238E27FC236}">
-                <a16:creationId xmlns:a16="http://schemas.microsoft.com/office/drawing/2014/main" id="{D62106CE-B383-446A-9850-B4C64828F395}"/>
-              </a:ext>
-            </a:extLst>
-          </p:cNvPr>
-          <p:cNvSpPr>
-            <a:spLocks xmlns:a="http://schemas.openxmlformats.org/drawingml/2006/main" noGrp="1"/>
-          </p:cNvSpPr>
-          <p:nvPr/>
-        </p:nvSpPr>
-        <p:spPr>
-          <a:xfrm xmlns:a="http://schemas.openxmlformats.org/drawingml/2006/main">
-            <a:off x="5734050" y="3333750"/>
-            <a:ext cx="3381375" cy="1752600"/>
-          </a:xfrm>
-          <a:prstGeom xmlns:a="http://schemas.openxmlformats.org/drawingml/2006/main" prst="rect">
-            <a:avLst/>
-          </a:prstGeom>
-          <a:noFill xmlns:a="http://schemas.openxmlformats.org/drawingml/2006/main"/>
-          <a:ln xmlns:a="http://schemas.openxmlformats.org/drawingml/2006/main" w="0">
-            <a:noFill/>
-          </a:ln>
-        </p:spPr>
-        <p:txBody>
-          <a:bodyPr xmlns:a="http://schemas.openxmlformats.org/drawingml/2006/main" wrap="square" lIns="0" tIns="0" rIns="0" bIns="0" anchor="t">
-            <a:noAutofit/>
-          </a:bodyPr>
-          <a:lstStyle xmlns:a="http://schemas.openxmlformats.org/drawingml/2006/main"/>
-          <a:p xmlns:a="http://schemas.openxmlformats.org/drawingml/2006/main">
-            <a:pPr algn="l">
-              <a:defRPr sz="2100" b="0">
-                <a:solidFill>
-                  <a:srgbClr val="102D3C"/>
-                </a:solidFill>
-                <a:latin typeface="Arial"/>
-                <a:ea typeface="Arial"/>
-                <a:cs typeface="Arial"/>
-              </a:defRPr>
-            </a:pPr>
-            <a:r>
-              <a:rPr sz="2100" b="0">
-                <a:solidFill>
-                  <a:srgbClr val="102D3C"/>
-                </a:solidFill>
-                <a:latin typeface="Arial"/>
-                <a:ea typeface="Arial"/>
-                <a:cs typeface="Arial"/>
-              </a:rPr>
-              <a:t>Potential annual savings</a:t>
-            </a:r>
-          </a:p>
-          <a:p xmlns:a="http://schemas.openxmlformats.org/drawingml/2006/main">
-            <a:pPr algn="l">
-              <a:defRPr sz="2100" b="0">
-                <a:solidFill>
-                  <a:srgbClr val="102D3C"/>
-                </a:solidFill>
-                <a:latin typeface="Arial"/>
-                <a:ea typeface="Arial"/>
-                <a:cs typeface="Arial"/>
-              </a:defRPr>
-            </a:pPr>
-            <a:r>
-              <a:rPr sz="2100" b="0">
-                <a:solidFill>
-                  <a:srgbClr val="102D3C"/>
-                </a:solidFill>
-                <a:latin typeface="Arial"/>
-                <a:ea typeface="Arial"/>
-                <a:cs typeface="Arial"/>
-              </a:rPr>
-              <a:t>Private quotes and rule change</a:t>
-            </a:r>
-          </a:p>
-          <a:p xmlns:a="http://schemas.openxmlformats.org/drawingml/2006/main">
-            <a:pPr algn="l">
-              <a:defRPr sz="2100" b="0">
-                <a:solidFill>
-                  <a:srgbClr val="102D3C"/>
-                </a:solidFill>
-                <a:latin typeface="Arial"/>
-                <a:ea typeface="Arial"/>
-                <a:cs typeface="Arial"/>
-              </a:defRPr>
-            </a:pPr>
-            <a:r>
-              <a:rPr sz="2100" b="0">
-                <a:solidFill>
-                  <a:srgbClr val="102D3C"/>
-                </a:solidFill>
-                <a:latin typeface="Arial"/>
-                <a:ea typeface="Arial"/>
-                <a:cs typeface="Arial"/>
-              </a:rPr>
-              <a:t>Near + Middle</a:t>
-            </a:r>
-          </a:p>
-          <a:p xmlns:a="http://schemas.openxmlformats.org/drawingml/2006/main">
-            <a:pPr algn="l">
-              <a:defRPr sz="2100" b="0">
-                <a:solidFill>
-                  <a:srgbClr val="102D3C"/>
-                </a:solidFill>
-                <a:latin typeface="Arial"/>
-                <a:ea typeface="Arial"/>
-                <a:cs typeface="Arial"/>
-              </a:defRPr>
-            </a:pPr>
-            <a:r>
-              <a:rPr sz="2100" b="0">
-                <a:solidFill>
-                  <a:srgbClr val="102D3C"/>
-                </a:solidFill>
-                <a:latin typeface="Arial"/>
-                <a:ea typeface="Arial"/>
-                <a:cs typeface="Arial"/>
-              </a:rPr>
-              <a:t>to Middle + Large</a:t>
-            </a:r>
-          </a:p>
-        </p:txBody>
-      </p:sp>
-      <p:sp>
-        <p:nvSpPr>
-          <p:cNvPr id="5" name="text-17">
-            <a:extLst xmlns:a="http://schemas.openxmlformats.org/drawingml/2006/main">
-              <a:ext uri="{FF2B5EF4-FFF2-40B4-BE49-F238E27FC236}">
-                <a16:creationId xmlns:a16="http://schemas.microsoft.com/office/drawing/2014/main" id="{F8C4720E-2C2A-4ED0-99B9-A3019A61CAAF}"/>
-              </a:ext>
-            </a:extLst>
-          </p:cNvPr>
-          <p:cNvSpPr>
-            <a:spLocks xmlns:a="http://schemas.openxmlformats.org/drawingml/2006/main" noGrp="1"/>
-          </p:cNvSpPr>
-          <p:nvPr/>
-        </p:nvSpPr>
-        <p:spPr>
-          <a:xfrm xmlns:a="http://schemas.openxmlformats.org/drawingml/2006/main">
-            <a:off x="5734050" y="5162550"/>
-            <a:ext cx="3381375" cy="676275"/>
-          </a:xfrm>
-          <a:prstGeom xmlns:a="http://schemas.openxmlformats.org/drawingml/2006/main" prst="rect">
-            <a:avLst/>
-          </a:prstGeom>
-          <a:noFill xmlns:a="http://schemas.openxmlformats.org/drawingml/2006/main"/>
-          <a:ln xmlns:a="http://schemas.openxmlformats.org/drawingml/2006/main" w="0">
-            <a:noFill/>
-          </a:ln>
-        </p:spPr>
-        <p:txBody>
-          <a:bodyPr xmlns:a="http://schemas.openxmlformats.org/drawingml/2006/main" wrap="square" lIns="0" tIns="0" rIns="0" bIns="0" anchor="t">
-            <a:noAutofit/>
-          </a:bodyPr>
-          <a:lstStyle xmlns:a="http://schemas.openxmlformats.org/drawingml/2006/main"/>
-          <a:p xmlns:a="http://schemas.openxmlformats.org/drawingml/2006/main">
-            <a:pPr algn="l">
-              <a:defRPr sz="1700" b="0">
-                <a:solidFill>
-                  <a:srgbClr val="465960"/>
-                </a:solidFill>
-                <a:latin typeface="Arial"/>
-                <a:ea typeface="Arial"/>
-                <a:cs typeface="Arial"/>
-              </a:defRPr>
-            </a:pPr>
-            <a:r>
-              <a:rPr sz="1700" b="0">
-                <a:solidFill>
-                  <a:srgbClr val="465960"/>
-                </a:solidFill>
-                <a:latin typeface="Arial"/>
-                <a:ea typeface="Arial"/>
-                <a:cs typeface="Arial"/>
-              </a:rPr>
-              <a:t>Same admitted actual method</a:t>
-            </a:r>
-          </a:p>
-          <a:p xmlns:a="http://schemas.openxmlformats.org/drawingml/2006/main">
-            <a:pPr algn="l">
-              <a:defRPr sz="1700" b="0">
-                <a:solidFill>
-                  <a:srgbClr val="465960"/>
-                </a:solidFill>
-                <a:latin typeface="Arial"/>
-                <a:ea typeface="Arial"/>
-                <a:cs typeface="Arial"/>
-              </a:defRPr>
-            </a:pPr>
-            <a:r>
-              <a:rPr sz="1700" b="0">
-                <a:solidFill>
-                  <a:srgbClr val="465960"/>
-                </a:solidFill>
-                <a:latin typeface="Arial"/>
-                <a:ea typeface="Arial"/>
-                <a:cs typeface="Arial"/>
-              </a:rPr>
-              <a:t>New-intention proof, local rebind</a:t>
-            </a:r>
-          </a:p>
-        </p:txBody>
-      </p:sp>
-      <p:sp>
-        <p:nvSpPr>
-          <p:cNvPr id="6" name="text-18">
-            <a:extLst xmlns:a="http://schemas.openxmlformats.org/drawingml/2006/main">
-              <a:ext uri="{FF2B5EF4-FFF2-40B4-BE49-F238E27FC236}">
-                <a16:creationId xmlns:a16="http://schemas.microsoft.com/office/drawing/2014/main" id="{D72D954C-7865-4051-8FAD-45C4519D5288}"/>
-              </a:ext>
-            </a:extLst>
-          </p:cNvPr>
-          <p:cNvSpPr>
-            <a:spLocks xmlns:a="http://schemas.openxmlformats.org/drawingml/2006/main" noGrp="1"/>
-          </p:cNvSpPr>
-          <p:nvPr/>
-        </p:nvSpPr>
-        <p:spPr>
-          <a:xfrm xmlns:a="http://schemas.openxmlformats.org/drawingml/2006/main">
-            <a:off x="9525000" y="1666875"/>
-            <a:ext cx="2057400" cy="952500"/>
-          </a:xfrm>
-          <a:prstGeom xmlns:a="http://schemas.openxmlformats.org/drawingml/2006/main" prst="rect">
-            <a:avLst/>
-          </a:prstGeom>
-          <a:noFill xmlns:a="http://schemas.openxmlformats.org/drawingml/2006/main"/>
-          <a:ln xmlns:a="http://schemas.openxmlformats.org/drawingml/2006/main" w="0">
-            <a:noFill/>
-          </a:ln>
-        </p:spPr>
-        <p:txBody>
-          <a:bodyPr xmlns:a="http://schemas.openxmlformats.org/drawingml/2006/main" wrap="square" lIns="0" tIns="0" rIns="0" bIns="0" anchor="t">
-            <a:noAutofit/>
-          </a:bodyPr>
-          <a:lstStyle xmlns:a="http://schemas.openxmlformats.org/drawingml/2006/main"/>
-          <a:p xmlns:a="http://schemas.openxmlformats.org/drawingml/2006/main">
-            <a:pPr algn="l">
-              <a:defRPr sz="6200" b="1">
-                <a:solidFill>
-                  <a:srgbClr val="2D6B51"/>
-                </a:solidFill>
-                <a:latin typeface="Arial"/>
-                <a:ea typeface="Arial"/>
-                <a:cs typeface="Arial"/>
-              </a:defRPr>
-            </a:pPr>
-            <a:r>
-              <a:rPr sz="6200" b="1">
-                <a:solidFill>
-                  <a:srgbClr val="2D6B51"/>
-                </a:solidFill>
-                <a:latin typeface="Arial"/>
-                <a:ea typeface="Arial"/>
-                <a:cs typeface="Arial"/>
-              </a:rPr>
-              <a:t>0</a:t>
-            </a:r>
-          </a:p>
-        </p:txBody>
-      </p:sp>
-      <p:sp>
-        <p:nvSpPr>
-          <p:cNvPr id="7" name="text-19">
-            <a:extLst xmlns:a="http://schemas.openxmlformats.org/drawingml/2006/main">
-              <a:ext uri="{FF2B5EF4-FFF2-40B4-BE49-F238E27FC236}">
-                <a16:creationId xmlns:a16="http://schemas.microsoft.com/office/drawing/2014/main" id="{49C61D42-77C6-4B2B-91C5-707804228B02}"/>
-              </a:ext>
-            </a:extLst>
-          </p:cNvPr>
-          <p:cNvSpPr>
-            <a:spLocks xmlns:a="http://schemas.openxmlformats.org/drawingml/2006/main" noGrp="1"/>
-          </p:cNvSpPr>
-          <p:nvPr/>
-        </p:nvSpPr>
-        <p:spPr>
-          <a:xfrm xmlns:a="http://schemas.openxmlformats.org/drawingml/2006/main">
-            <a:off x="9544050" y="2924175"/>
-            <a:ext cx="2038350" cy="1571625"/>
-          </a:xfrm>
-          <a:prstGeom xmlns:a="http://schemas.openxmlformats.org/drawingml/2006/main" prst="rect">
-            <a:avLst/>
-          </a:prstGeom>
-          <a:noFill xmlns:a="http://schemas.openxmlformats.org/drawingml/2006/main"/>
-          <a:ln xmlns:a="http://schemas.openxmlformats.org/drawingml/2006/main" w="0">
-            <a:noFill/>
-          </a:ln>
-        </p:spPr>
-        <p:txBody>
-          <a:bodyPr xmlns:a="http://schemas.openxmlformats.org/drawingml/2006/main" wrap="square" lIns="0" tIns="0" rIns="0" bIns="0" anchor="t">
-            <a:noAutofit/>
-          </a:bodyPr>
-          <a:lstStyle xmlns:a="http://schemas.openxmlformats.org/drawingml/2006/main"/>
-          <a:p xmlns:a="http://schemas.openxmlformats.org/drawingml/2006/main">
-            <a:pPr algn="l">
-              <a:defRPr sz="1800" b="1">
-                <a:solidFill>
-                  <a:srgbClr val="102D3C"/>
-                </a:solidFill>
-                <a:latin typeface="Arial"/>
-                <a:ea typeface="Arial"/>
-                <a:cs typeface="Arial"/>
-              </a:defRPr>
-            </a:pPr>
-            <a:r>
-              <a:rPr sz="1800" b="1">
-                <a:solidFill>
-                  <a:srgbClr val="102D3C"/>
-                </a:solidFill>
-                <a:latin typeface="Arial"/>
-                <a:ea typeface="Arial"/>
-                <a:cs typeface="Arial"/>
-              </a:rPr>
-              <a:t>new provider attempts</a:t>
-            </a:r>
-          </a:p>
-          <a:p xmlns:a="http://schemas.openxmlformats.org/drawingml/2006/main">
-            <a:pPr algn="l">
-              <a:defRPr sz="1800" b="1">
-                <a:solidFill>
-                  <a:srgbClr val="102D3C"/>
-                </a:solidFill>
-                <a:latin typeface="Arial"/>
-                <a:ea typeface="Arial"/>
-                <a:cs typeface="Arial"/>
-              </a:defRPr>
-            </a:pPr>
-            <a:r>
-              <a:rPr sz="1800" b="1">
-                <a:solidFill>
-                  <a:srgbClr val="102D3C"/>
-                </a:solidFill>
-                <a:latin typeface="Arial"/>
-                <a:ea typeface="Arial"/>
-                <a:cs typeface="Arial"/>
-              </a:rPr>
-              <a:t>in the local rebind</a:t>
-            </a:r>
-          </a:p>
-        </p:txBody>
-      </p:sp>
-      <p:sp>
-        <p:nvSpPr>
-          <p:cNvPr id="8" name="text-20">
-            <a:extLst xmlns:a="http://schemas.openxmlformats.org/drawingml/2006/main">
-              <a:ext uri="{FF2B5EF4-FFF2-40B4-BE49-F238E27FC236}">
-                <a16:creationId xmlns:a16="http://schemas.microsoft.com/office/drawing/2014/main" id="{E5A42D3E-71B8-4ADF-8477-49FAE62C612B}"/>
-              </a:ext>
-            </a:extLst>
-          </p:cNvPr>
-          <p:cNvSpPr>
-            <a:spLocks xmlns:a="http://schemas.openxmlformats.org/drawingml/2006/main" noGrp="1"/>
-          </p:cNvSpPr>
-          <p:nvPr/>
-        </p:nvSpPr>
-        <p:spPr>
-          <a:xfrm xmlns:a="http://schemas.openxmlformats.org/drawingml/2006/main">
-            <a:off x="9544050" y="4829175"/>
-            <a:ext cx="2038350" cy="1009650"/>
-          </a:xfrm>
-          <a:prstGeom xmlns:a="http://schemas.openxmlformats.org/drawingml/2006/main" prst="rect">
-            <a:avLst/>
-          </a:prstGeom>
-          <a:noFill xmlns:a="http://schemas.openxmlformats.org/drawingml/2006/main"/>
-          <a:ln xmlns:a="http://schemas.openxmlformats.org/drawingml/2006/main" w="0">
-            <a:noFill/>
-          </a:ln>
-        </p:spPr>
-        <p:txBody>
-          <a:bodyPr xmlns:a="http://schemas.openxmlformats.org/drawingml/2006/main" wrap="square" lIns="0" tIns="0" rIns="0" bIns="0" anchor="t">
-            <a:noAutofit/>
-          </a:bodyPr>
-          <a:lstStyle xmlns:a="http://schemas.openxmlformats.org/drawingml/2006/main"/>
-          <a:p xmlns:a="http://schemas.openxmlformats.org/drawingml/2006/main">
-            <a:pPr algn="l">
-              <a:defRPr sz="2000" b="1">
-                <a:solidFill>
-                  <a:srgbClr val="102D3C"/>
-                </a:solidFill>
-                <a:latin typeface="Arial"/>
-                <a:ea typeface="Arial"/>
-                <a:cs typeface="Arial"/>
-              </a:defRPr>
-            </a:pPr>
-            <a:r>
-              <a:rPr sz="2000" b="1">
-                <a:solidFill>
-                  <a:srgbClr val="102D3C"/>
-                </a:solidFill>
-                <a:latin typeface="Arial"/>
-                <a:ea typeface="Arial"/>
-                <a:cs typeface="Arial"/>
-              </a:rPr>
-              <a:t>Changed brief</a:t>
-            </a:r>
-          </a:p>
-          <a:p xmlns:a="http://schemas.openxmlformats.org/drawingml/2006/main">
-            <a:pPr algn="l">
-              <a:defRPr sz="2000" b="1">
-                <a:solidFill>
-                  <a:srgbClr val="102D3C"/>
-                </a:solidFill>
-                <a:latin typeface="Arial"/>
-                <a:ea typeface="Arial"/>
-                <a:cs typeface="Arial"/>
-              </a:defRPr>
-            </a:pPr>
-            <a:r>
-              <a:rPr sz="2000" b="1">
-                <a:solidFill>
-                  <a:srgbClr val="102D3C"/>
-                </a:solidFill>
-                <a:latin typeface="Arial"/>
-                <a:ea typeface="Arial"/>
-                <a:cs typeface="Arial"/>
-              </a:rPr>
-              <a:t>Same method</a:t>
-            </a:r>
-          </a:p>
-        </p:txBody>
-      </p:sp>
-      <p:sp>
-        <p:nvSpPr>
-          <p:cNvPr id="9" name="text-21">
-            <a:extLst xmlns:a="http://schemas.openxmlformats.org/drawingml/2006/main">
-              <a:ext uri="{FF2B5EF4-FFF2-40B4-BE49-F238E27FC236}">
-                <a16:creationId xmlns:a16="http://schemas.microsoft.com/office/drawing/2014/main" id="{0C01E2DE-0C23-4BDC-8FDC-B085C6EC48FA}"/>
-              </a:ext>
-            </a:extLst>
-          </p:cNvPr>
-          <p:cNvSpPr>
-            <a:spLocks xmlns:a="http://schemas.openxmlformats.org/drawingml/2006/main" noGrp="1"/>
-          </p:cNvSpPr>
-          <p:nvPr/>
-        </p:nvSpPr>
-        <p:spPr>
-          <a:xfrm xmlns:a="http://schemas.openxmlformats.org/drawingml/2006/main">
-            <a:off x="609600" y="6086475"/>
-            <a:ext cx="10972800" cy="457200"/>
-          </a:xfrm>
-          <a:prstGeom xmlns:a="http://schemas.openxmlformats.org/drawingml/2006/main" prst="rect">
-            <a:avLst/>
-          </a:prstGeom>
-          <a:noFill xmlns:a="http://schemas.openxmlformats.org/drawingml/2006/main"/>
-          <a:ln xmlns:a="http://schemas.openxmlformats.org/drawingml/2006/main" w="0">
-            <a:noFill/>
-          </a:ln>
-        </p:spPr>
-        <p:txBody>
-          <a:bodyPr xmlns:a="http://schemas.openxmlformats.org/drawingml/2006/main" wrap="square" lIns="0" tIns="0" rIns="0" bIns="0" anchor="t">
-            <a:noAutofit/>
-          </a:bodyPr>
-          <a:lstStyle xmlns:a="http://schemas.openxmlformats.org/drawingml/2006/main"/>
-          <a:p xmlns:a="http://schemas.openxmlformats.org/drawingml/2006/main">
-            <a:pPr algn="l">
-              <a:defRPr sz="1800" b="0">
-                <a:solidFill>
-                  <a:srgbClr val="465960"/>
-                </a:solidFill>
-                <a:latin typeface="Arial"/>
-                <a:ea typeface="Arial"/>
-                <a:cs typeface="Arial"/>
-              </a:defRPr>
-            </a:pPr>
-            <a:r>
-              <a:rPr sz="1800" b="0">
-                <a:solidFill>
-                  <a:srgbClr val="465960"/>
-                </a:solidFill>
-                <a:latin typeface="Arial"/>
-                <a:ea typeface="Arial"/>
-                <a:cs typeface="Arial"/>
-              </a:rPr>
-              <a:t>The private quote or rule changes locally. The admitted AI method stays the same.</a:t>
+              <a:t>0 new provider attempts during local rebind</a:t>
             </a:r>
           </a:p>
         </p:txBody>
@@ -3619,7 +3686,7 @@
     </p:spTree>
     <p:extLst>
       <p:ext uri="{BB962C8B-B14F-4D97-AF65-F5344CB8AC3E}">
-        <p14:creationId xmlns:p14="http://schemas.microsoft.com/office/powerpoint/2010/main" val="1439797327"/>
+        <p14:creationId xmlns:p14="http://schemas.microsoft.com/office/powerpoint/2010/main" val="620449471"/>
       </p:ext>
     </p:extLst>
   </p:cSld>
@@ -3647,10 +3714,10 @@
       </p:grpSpPr>
       <p:sp>
         <p:nvSpPr>
-          <p:cNvPr id="16" name="text-22">
+          <p:cNvPr id="16" name="text-26">
             <a:extLst xmlns:a="http://schemas.openxmlformats.org/drawingml/2006/main">
               <a:ext uri="{FF2B5EF4-FFF2-40B4-BE49-F238E27FC236}">
-                <a16:creationId xmlns:a16="http://schemas.microsoft.com/office/drawing/2014/main" id="{84275AFB-FD78-407E-9CAA-F571996E8E0D}"/>
+                <a16:creationId xmlns:a16="http://schemas.microsoft.com/office/drawing/2014/main" id="{15AB9691-24C2-4EC8-8CDB-27EF6A4D05A3}"/>
               </a:ext>
             </a:extLst>
           </p:cNvPr>
@@ -3697,17 +3764,17 @@
                 <a:ea typeface="Arial"/>
                 <a:cs typeface="Arial"/>
               </a:rPr>
-              <a:t>Public AI method, local private execution</a:t>
-            </a:r>
-          </a:p>
-        </p:txBody>
-      </p:sp>
-      <p:sp>
-        <p:nvSpPr>
-          <p:cNvPr id="2" name="text-23">
+              <a:t>ProofGate controls each step</a:t>
+            </a:r>
+          </a:p>
+        </p:txBody>
+      </p:sp>
+      <p:sp>
+        <p:nvSpPr>
+          <p:cNvPr id="2" name="text-27">
             <a:extLst xmlns:a="http://schemas.openxmlformats.org/drawingml/2006/main">
               <a:ext uri="{FF2B5EF4-FFF2-40B4-BE49-F238E27FC236}">
-                <a16:creationId xmlns:a16="http://schemas.microsoft.com/office/drawing/2014/main" id="{EB65C0F9-CC90-4692-A17E-B495AE737782}"/>
+                <a16:creationId xmlns:a16="http://schemas.microsoft.com/office/drawing/2014/main" id="{0C2DEFCB-B7DF-488C-AC64-FBB2BF7E1D0E}"/>
               </a:ext>
             </a:extLst>
           </p:cNvPr>
@@ -3754,17 +3821,17 @@
                 <a:ea typeface="Arial"/>
                 <a:cs typeface="Arial"/>
               </a:rPr>
-              <a:t>HOSTED MODELS RECEIVE APPROVED PUBLIC INPUTS</a:t>
-            </a:r>
-          </a:p>
-        </p:txBody>
-      </p:sp>
-      <p:sp>
-        <p:nvSpPr>
-          <p:cNvPr id="3" name="mechanism-24">
+              <a:t>PUBLIC INPUT → HOSTED AI → ADMITTED METHOD</a:t>
+            </a:r>
+          </a:p>
+        </p:txBody>
+      </p:sp>
+      <p:sp>
+        <p:nvSpPr>
+          <p:cNvPr id="3" name="mechanism-28">
             <a:extLst xmlns:a="http://schemas.openxmlformats.org/drawingml/2006/main">
               <a:ext uri="{FF2B5EF4-FFF2-40B4-BE49-F238E27FC236}">
-                <a16:creationId xmlns:a16="http://schemas.microsoft.com/office/drawing/2014/main" id="{346A5E85-A115-4BA7-8479-EC75733E6F1D}"/>
+                <a16:creationId xmlns:a16="http://schemas.microsoft.com/office/drawing/2014/main" id="{D920A20C-2A60-447E-AAC2-394A7107FCED}"/>
               </a:ext>
             </a:extLst>
           </p:cNvPr>
@@ -3816,7 +3883,7 @@
                 <a:ea typeface="Arial"/>
                 <a:cs typeface="Arial"/>
               </a:rPr>
-              <a:t>Public objective</a:t>
+              <a:t>Public intent</a:t>
             </a:r>
           </a:p>
           <a:p xmlns:a="http://schemas.openxmlformats.org/drawingml/2006/main">
@@ -3846,10 +3913,10 @@
       </p:sp>
       <p:sp>
         <p:nvSpPr>
-          <p:cNvPr id="4" name="mechanism-25">
+          <p:cNvPr id="4" name="mechanism-29">
             <a:extLst xmlns:a="http://schemas.openxmlformats.org/drawingml/2006/main">
               <a:ext uri="{FF2B5EF4-FFF2-40B4-BE49-F238E27FC236}">
-                <a16:creationId xmlns:a16="http://schemas.microsoft.com/office/drawing/2014/main" id="{0F069B24-F7F1-465B-8AF5-00E783AE7C3A}"/>
+                <a16:creationId xmlns:a16="http://schemas.microsoft.com/office/drawing/2014/main" id="{90F6B6F9-3997-41A3-A04D-21F50BB5823E}"/>
               </a:ext>
             </a:extLst>
           </p:cNvPr>
@@ -3947,17 +4014,17 @@
                 <a:ea typeface="Arial"/>
                 <a:cs typeface="Arial"/>
               </a:rPr>
-              <a:t>Recipe checker</a:t>
-            </a:r>
-          </a:p>
-        </p:txBody>
-      </p:sp>
-      <p:sp>
-        <p:nvSpPr>
-          <p:cNvPr id="5" name="mechanism-26">
+              <a:t>Method checker</a:t>
+            </a:r>
+          </a:p>
+        </p:txBody>
+      </p:sp>
+      <p:sp>
+        <p:nvSpPr>
+          <p:cNvPr id="5" name="mechanism-30">
             <a:extLst xmlns:a="http://schemas.openxmlformats.org/drawingml/2006/main">
               <a:ext uri="{FF2B5EF4-FFF2-40B4-BE49-F238E27FC236}">
-                <a16:creationId xmlns:a16="http://schemas.microsoft.com/office/drawing/2014/main" id="{1E15AC18-5867-4F65-9150-7008720503EE}"/>
+                <a16:creationId xmlns:a16="http://schemas.microsoft.com/office/drawing/2014/main" id="{3F41A89C-7C21-42B0-99A8-D9C568902A5C}"/>
               </a:ext>
             </a:extLst>
           </p:cNvPr>
@@ -3991,48 +4058,48 @@
           <a:lstStyle xmlns:a="http://schemas.openxmlformats.org/drawingml/2006/main"/>
           <a:p xmlns:a="http://schemas.openxmlformats.org/drawingml/2006/main">
             <a:pPr algn="ctr">
-              <a:defRPr sz="2000">
-                <a:solidFill>
-                  <a:srgbClr val="102D3C"/>
-                </a:solidFill>
-                <a:latin typeface="Arial"/>
-                <a:ea typeface="Arial"/>
-                <a:cs typeface="Arial"/>
-              </a:defRPr>
-            </a:pPr>
-            <a:r>
-              <a:rPr sz="2000">
-                <a:solidFill>
-                  <a:srgbClr val="102D3C"/>
-                </a:solidFill>
-                <a:latin typeface="Arial"/>
-                <a:ea typeface="Arial"/>
-                <a:cs typeface="Arial"/>
-              </a:rPr>
-              <a:t>Whole-plan gate</a:t>
+              <a:defRPr sz="1800">
+                <a:solidFill>
+                  <a:srgbClr val="102D3C"/>
+                </a:solidFill>
+                <a:latin typeface="Arial"/>
+                <a:ea typeface="Arial"/>
+                <a:cs typeface="Arial"/>
+              </a:defRPr>
+            </a:pPr>
+            <a:r>
+              <a:rPr sz="1800">
+                <a:solidFill>
+                  <a:srgbClr val="102D3C"/>
+                </a:solidFill>
+                <a:latin typeface="Arial"/>
+                <a:ea typeface="Arial"/>
+                <a:cs typeface="Arial"/>
+              </a:rPr>
+              <a:t>Deterministic AND</a:t>
             </a:r>
           </a:p>
           <a:p xmlns:a="http://schemas.openxmlformats.org/drawingml/2006/main">
             <a:pPr algn="ctr">
-              <a:defRPr sz="2000">
-                <a:solidFill>
-                  <a:srgbClr val="102D3C"/>
-                </a:solidFill>
-                <a:latin typeface="Arial"/>
-                <a:ea typeface="Arial"/>
-                <a:cs typeface="Arial"/>
-              </a:defRPr>
-            </a:pPr>
-            <a:r>
-              <a:rPr sz="2000">
-                <a:solidFill>
-                  <a:srgbClr val="102D3C"/>
-                </a:solidFill>
-                <a:latin typeface="Arial"/>
-                <a:ea typeface="Arial"/>
-                <a:cs typeface="Arial"/>
-              </a:rPr>
-              <a:t>Current policy</a:t>
+              <a:defRPr sz="1800">
+                <a:solidFill>
+                  <a:srgbClr val="102D3C"/>
+                </a:solidFill>
+                <a:latin typeface="Arial"/>
+                <a:ea typeface="Arial"/>
+                <a:cs typeface="Arial"/>
+              </a:defRPr>
+            </a:pPr>
+            <a:r>
+              <a:rPr sz="1800">
+                <a:solidFill>
+                  <a:srgbClr val="102D3C"/>
+                </a:solidFill>
+                <a:latin typeface="Arial"/>
+                <a:ea typeface="Arial"/>
+                <a:cs typeface="Arial"/>
+              </a:rPr>
+              <a:t>actual AI checks</a:t>
             </a:r>
           </a:p>
         </p:txBody>
@@ -4091,10 +4158,10 @@
       </p:cxnSp>
       <p:sp>
         <p:nvSpPr>
-          <p:cNvPr id="8" name="text-27">
+          <p:cNvPr id="8" name="text-31">
             <a:extLst xmlns:a="http://schemas.openxmlformats.org/drawingml/2006/main">
               <a:ext uri="{FF2B5EF4-FFF2-40B4-BE49-F238E27FC236}">
-                <a16:creationId xmlns:a16="http://schemas.microsoft.com/office/drawing/2014/main" id="{54D7B91F-46E5-4EBF-8B4D-15D148249868}"/>
+                <a16:creationId xmlns:a16="http://schemas.microsoft.com/office/drawing/2014/main" id="{2C5FEA4C-C619-4792-8EAE-B25144EF6BB0}"/>
               </a:ext>
             </a:extLst>
           </p:cNvPr>
@@ -4106,7 +4173,7 @@
         <p:spPr>
           <a:xfrm xmlns:a="http://schemas.openxmlformats.org/drawingml/2006/main">
             <a:off x="609600" y="3667125"/>
-            <a:ext cx="6000750" cy="304800"/>
+            <a:ext cx="5048250" cy="304800"/>
           </a:xfrm>
           <a:prstGeom xmlns:a="http://schemas.openxmlformats.org/drawingml/2006/main" prst="rect">
             <a:avLst/>
@@ -4141,17 +4208,17 @@
                 <a:ea typeface="Arial"/>
                 <a:cs typeface="Arial"/>
               </a:rPr>
-              <a:t>CONFIDENTIAL WORK STAYS IN THE LOCAL HOST</a:t>
-            </a:r>
-          </a:p>
-        </p:txBody>
-      </p:sp>
-      <p:sp>
-        <p:nvSpPr>
-          <p:cNvPr id="9" name="mechanism-28">
+              <a:t>PRIVATE FACTS → LOCAL WORK</a:t>
+            </a:r>
+          </a:p>
+        </p:txBody>
+      </p:sp>
+      <p:sp>
+        <p:nvSpPr>
+          <p:cNvPr id="9" name="mechanism-32">
             <a:extLst xmlns:a="http://schemas.openxmlformats.org/drawingml/2006/main">
               <a:ext uri="{FF2B5EF4-FFF2-40B4-BE49-F238E27FC236}">
-                <a16:creationId xmlns:a16="http://schemas.microsoft.com/office/drawing/2014/main" id="{2EB65689-DFFE-4724-BD78-4DB04408F308}"/>
+                <a16:creationId xmlns:a16="http://schemas.microsoft.com/office/drawing/2014/main" id="{D1D28B2C-28B0-4E94-9EE0-198609C7302A}"/>
               </a:ext>
             </a:extLst>
           </p:cNvPr>
@@ -4233,10 +4300,10 @@
       </p:sp>
       <p:sp>
         <p:nvSpPr>
-          <p:cNvPr id="10" name="mechanism-29">
+          <p:cNvPr id="10" name="mechanism-33">
             <a:extLst xmlns:a="http://schemas.openxmlformats.org/drawingml/2006/main">
               <a:ext uri="{FF2B5EF4-FFF2-40B4-BE49-F238E27FC236}">
-                <a16:creationId xmlns:a16="http://schemas.microsoft.com/office/drawing/2014/main" id="{158B923B-F625-4344-A966-994D2196D56D}"/>
+                <a16:creationId xmlns:a16="http://schemas.microsoft.com/office/drawing/2014/main" id="{9BC014FE-DFD0-41FD-8C62-B89E6BF6AD7A}"/>
               </a:ext>
             </a:extLst>
           </p:cNvPr>
@@ -4318,10 +4385,10 @@
       </p:sp>
       <p:sp>
         <p:nvSpPr>
-          <p:cNvPr id="11" name="mechanism-30">
+          <p:cNvPr id="11" name="mechanism-34">
             <a:extLst xmlns:a="http://schemas.openxmlformats.org/drawingml/2006/main">
               <a:ext uri="{FF2B5EF4-FFF2-40B4-BE49-F238E27FC236}">
-                <a16:creationId xmlns:a16="http://schemas.microsoft.com/office/drawing/2014/main" id="{B0B0AC10-992F-4CF7-A0E9-4EE92444EFC5}"/>
+                <a16:creationId xmlns:a16="http://schemas.microsoft.com/office/drawing/2014/main" id="{29007595-8937-48EB-961A-675430C494AF}"/>
               </a:ext>
             </a:extLst>
           </p:cNvPr>
@@ -4504,10 +4571,10 @@
       </p:cxnSp>
       <p:sp>
         <p:nvSpPr>
-          <p:cNvPr id="15" name="text-31">
+          <p:cNvPr id="15" name="text-35">
             <a:extLst xmlns:a="http://schemas.openxmlformats.org/drawingml/2006/main">
               <a:ext uri="{FF2B5EF4-FFF2-40B4-BE49-F238E27FC236}">
-                <a16:creationId xmlns:a16="http://schemas.microsoft.com/office/drawing/2014/main" id="{DC983EFC-F1EA-4BB8-96B0-558A5BE6CE68}"/>
+                <a16:creationId xmlns:a16="http://schemas.microsoft.com/office/drawing/2014/main" id="{ABF0580A-56F9-4CA1-B2B6-5231A0F0D24A}"/>
               </a:ext>
             </a:extLst>
           </p:cNvPr>
@@ -4519,7 +4586,7 @@
         <p:spPr>
           <a:xfrm xmlns:a="http://schemas.openxmlformats.org/drawingml/2006/main">
             <a:off x="609600" y="6010275"/>
-            <a:ext cx="10972800" cy="495300"/>
+            <a:ext cx="10972800" cy="533400"/>
           </a:xfrm>
           <a:prstGeom xmlns:a="http://schemas.openxmlformats.org/drawingml/2006/main" prst="rect">
             <a:avLst/>
@@ -4554,7 +4621,7 @@
                 <a:ea typeface="Arial"/>
                 <a:cs typeface="Arial"/>
               </a:rPr>
-              <a:t>Authenticated host. Shared policy and allowance. No arbitrary code or network operations.</a:t>
+              <a:t>Authenticated host · current policy · finite shared allowance · observable audit and export</a:t>
             </a:r>
           </a:p>
         </p:txBody>
@@ -4562,7 +4629,7 @@
     </p:spTree>
     <p:extLst>
       <p:ext uri="{BB962C8B-B14F-4D97-AF65-F5344CB8AC3E}">
-        <p14:creationId xmlns:p14="http://schemas.microsoft.com/office/powerpoint/2010/main" val="1988696720"/>
+        <p14:creationId xmlns:p14="http://schemas.microsoft.com/office/powerpoint/2010/main" val="775573497"/>
       </p:ext>
     </p:extLst>
   </p:cSld>
@@ -4590,10 +4657,10 @@
       </p:grpSpPr>
       <p:sp>
         <p:nvSpPr>
-          <p:cNvPr id="7" name="text-32">
+          <p:cNvPr id="7" name="text-36">
             <a:extLst xmlns:a="http://schemas.openxmlformats.org/drawingml/2006/main">
               <a:ext uri="{FF2B5EF4-FFF2-40B4-BE49-F238E27FC236}">
-                <a16:creationId xmlns:a16="http://schemas.microsoft.com/office/drawing/2014/main" id="{C1E7DCDC-4D77-47F8-8D05-60626C2BCCFD}"/>
+                <a16:creationId xmlns:a16="http://schemas.microsoft.com/office/drawing/2014/main" id="{CB1F5D67-97FC-4D03-9B3F-1034F3BA1A4C}"/>
               </a:ext>
             </a:extLst>
           </p:cNvPr>
@@ -4640,7 +4707,7 @@
                 <a:ea typeface="Arial"/>
                 <a:cs typeface="Arial"/>
               </a:rPr>
-              <a:t>Actual inputs to the hosted models</a:t>
+              <a:t>Inspect what the hosted models received</a:t>
             </a:r>
           </a:p>
         </p:txBody>
@@ -4654,12 +4721,12 @@
           <p:nvPr/>
         </p:nvPicPr>
         <p:blipFill>
-          <a:blip xmlns:r="http://schemas.openxmlformats.org/officeDocument/2006/relationships" xmlns:a="http://schemas.openxmlformats.org/drawingml/2006/main" r:embed="R7b0a8290c55140d5"/>
+          <a:blip xmlns:r="http://schemas.openxmlformats.org/officeDocument/2006/relationships" xmlns:a="http://schemas.openxmlformats.org/drawingml/2006/main" r:embed="R7f53c38106a5475c"/>
           <a:stretch xmlns:a="http://schemas.openxmlformats.org/drawingml/2006/main"/>
         </p:blipFill>
         <p:spPr>
           <a:xfrm xmlns:a="http://schemas.openxmlformats.org/drawingml/2006/main">
-            <a:off x="2502020" y="1524000"/>
+            <a:off x="2121020" y="1524000"/>
             <a:ext cx="3073160" cy="4286250"/>
           </a:xfrm>
           <a:prstGeom xmlns:a="http://schemas.openxmlformats.org/drawingml/2006/main" prst="rect">
@@ -4669,10 +4736,10 @@
       </p:pic>
       <p:sp>
         <p:nvSpPr>
-          <p:cNvPr id="3" name="text-33">
+          <p:cNvPr id="3" name="text-37">
             <a:extLst xmlns:a="http://schemas.openxmlformats.org/drawingml/2006/main">
               <a:ext uri="{FF2B5EF4-FFF2-40B4-BE49-F238E27FC236}">
-                <a16:creationId xmlns:a16="http://schemas.microsoft.com/office/drawing/2014/main" id="{1AA21CC9-602C-454E-9D9F-52888309225E}"/>
+                <a16:creationId xmlns:a16="http://schemas.microsoft.com/office/drawing/2014/main" id="{74898AB4-1FB7-414C-ABD2-9F06D3101B23}"/>
               </a:ext>
             </a:extLst>
           </p:cNvPr>
@@ -4683,8 +4750,8 @@
         </p:nvSpPr>
         <p:spPr>
           <a:xfrm xmlns:a="http://schemas.openxmlformats.org/drawingml/2006/main">
-            <a:off x="8001000" y="1571625"/>
-            <a:ext cx="3581400" cy="914400"/>
+            <a:off x="7239000" y="1571625"/>
+            <a:ext cx="4343400" cy="438150"/>
           </a:xfrm>
           <a:prstGeom xmlns:a="http://schemas.openxmlformats.org/drawingml/2006/main" prst="rect">
             <a:avLst/>
@@ -4719,17 +4786,17 @@
                 <a:ea typeface="Arial"/>
                 <a:cs typeface="Arial"/>
               </a:rPr>
-              <a:t>Public application bodies</a:t>
-            </a:r>
-          </a:p>
-        </p:txBody>
-      </p:sp>
-      <p:sp>
-        <p:nvSpPr>
-          <p:cNvPr id="4" name="text-34">
+              <a:t>Disclosed public input</a:t>
+            </a:r>
+          </a:p>
+        </p:txBody>
+      </p:sp>
+      <p:sp>
+        <p:nvSpPr>
+          <p:cNvPr id="4" name="text-38">
             <a:extLst xmlns:a="http://schemas.openxmlformats.org/drawingml/2006/main">
               <a:ext uri="{FF2B5EF4-FFF2-40B4-BE49-F238E27FC236}">
-                <a16:creationId xmlns:a16="http://schemas.microsoft.com/office/drawing/2014/main" id="{3B4C3CAC-0806-41C9-9D37-2543358ACAEA}"/>
+                <a16:creationId xmlns:a16="http://schemas.microsoft.com/office/drawing/2014/main" id="{62841EF8-2C54-47D1-8C7C-E21CBAB0AC42}"/>
               </a:ext>
             </a:extLst>
           </p:cNvPr>
@@ -4740,8 +4807,8 @@
         </p:nvSpPr>
         <p:spPr>
           <a:xfrm xmlns:a="http://schemas.openxmlformats.org/drawingml/2006/main">
-            <a:off x="8001000" y="2695575"/>
-            <a:ext cx="3581400" cy="1714500"/>
+            <a:off x="7239000" y="2371725"/>
+            <a:ext cx="4343400" cy="1457325"/>
           </a:xfrm>
           <a:prstGeom xmlns:a="http://schemas.openxmlformats.org/drawingml/2006/main" prst="rect">
             <a:avLst/>
@@ -4758,63 +4825,40 @@
           <a:lstStyle xmlns:a="http://schemas.openxmlformats.org/drawingml/2006/main"/>
           <a:p xmlns:a="http://schemas.openxmlformats.org/drawingml/2006/main">
             <a:pPr algn="l">
-              <a:defRPr sz="2000" b="0">
-                <a:solidFill>
-                  <a:srgbClr val="102D3C"/>
-                </a:solidFill>
-                <a:latin typeface="Arial"/>
-                <a:ea typeface="Arial"/>
-                <a:cs typeface="Arial"/>
-              </a:defRPr>
-            </a:pPr>
-            <a:r>
-              <a:rPr sz="2000" b="0">
-                <a:solidFill>
-                  <a:srgbClr val="102D3C"/>
-                </a:solidFill>
-                <a:latin typeface="Arial"/>
-                <a:ea typeface="Arial"/>
-                <a:cs typeface="Arial"/>
-              </a:rPr>
-              <a:t>Approved objective</a:t>
-            </a:r>
-          </a:p>
-          <a:p xmlns:a="http://schemas.openxmlformats.org/drawingml/2006/main">
-            <a:pPr algn="l">
-              <a:defRPr sz="2000" b="0">
-                <a:solidFill>
-                  <a:srgbClr val="102D3C"/>
-                </a:solidFill>
-                <a:latin typeface="Arial"/>
-                <a:ea typeface="Arial"/>
-                <a:cs typeface="Arial"/>
-              </a:defRPr>
-            </a:pPr>
-            <a:r>
-              <a:rPr sz="2000" b="0">
-                <a:solidFill>
-                  <a:srgbClr val="102D3C"/>
-                </a:solidFill>
-                <a:latin typeface="Arial"/>
-                <a:ea typeface="Arial"/>
-                <a:cs typeface="Arial"/>
-              </a:rPr>
-              <a:t>Capability grammar</a:t>
-            </a:r>
-          </a:p>
-          <a:p xmlns:a="http://schemas.openxmlformats.org/drawingml/2006/main">
-            <a:pPr algn="l">
-              <a:defRPr sz="2000" b="0">
-                <a:solidFill>
-                  <a:srgbClr val="102D3C"/>
-                </a:solidFill>
-                <a:latin typeface="Arial"/>
-                <a:ea typeface="Arial"/>
-                <a:cs typeface="Arial"/>
-              </a:defRPr>
-            </a:pPr>
-            <a:r>
-              <a:rPr sz="2000" b="0">
+              <a:defRPr sz="2200" b="0">
+                <a:solidFill>
+                  <a:srgbClr val="102D3C"/>
+                </a:solidFill>
+                <a:latin typeface="Arial"/>
+                <a:ea typeface="Arial"/>
+                <a:cs typeface="Arial"/>
+              </a:defRPr>
+            </a:pPr>
+            <a:r>
+              <a:rPr sz="2200" b="0">
+                <a:solidFill>
+                  <a:srgbClr val="102D3C"/>
+                </a:solidFill>
+                <a:latin typeface="Arial"/>
+                <a:ea typeface="Arial"/>
+                <a:cs typeface="Arial"/>
+              </a:rPr>
+              <a:t>Employee intent and capabilities</a:t>
+            </a:r>
+          </a:p>
+          <a:p xmlns:a="http://schemas.openxmlformats.org/drawingml/2006/main">
+            <a:pPr algn="l">
+              <a:defRPr sz="2200" b="0">
+                <a:solidFill>
+                  <a:srgbClr val="102D3C"/>
+                </a:solidFill>
+                <a:latin typeface="Arial"/>
+                <a:ea typeface="Arial"/>
+                <a:cs typeface="Arial"/>
+              </a:defRPr>
+            </a:pPr>
+            <a:r>
+              <a:rPr sz="2200" b="0">
                 <a:solidFill>
                   <a:srgbClr val="102D3C"/>
                 </a:solidFill>
@@ -4827,35 +4871,35 @@
           </a:p>
           <a:p xmlns:a="http://schemas.openxmlformats.org/drawingml/2006/main">
             <a:pPr algn="l">
-              <a:defRPr sz="2000" b="0">
-                <a:solidFill>
-                  <a:srgbClr val="102D3C"/>
-                </a:solidFill>
-                <a:latin typeface="Arial"/>
-                <a:ea typeface="Arial"/>
-                <a:cs typeface="Arial"/>
-              </a:defRPr>
-            </a:pPr>
-            <a:r>
-              <a:rPr sz="2000" b="0">
-                <a:solidFill>
-                  <a:srgbClr val="102D3C"/>
-                </a:solidFill>
-                <a:latin typeface="Arial"/>
-                <a:ea typeface="Arial"/>
-                <a:cs typeface="Arial"/>
-              </a:rPr>
-              <a:t>Proposed operation recipe</a:t>
-            </a:r>
-          </a:p>
-        </p:txBody>
-      </p:sp>
-      <p:sp>
-        <p:nvSpPr>
-          <p:cNvPr id="5" name="text-35">
+              <a:defRPr sz="2200" b="0">
+                <a:solidFill>
+                  <a:srgbClr val="102D3C"/>
+                </a:solidFill>
+                <a:latin typeface="Arial"/>
+                <a:ea typeface="Arial"/>
+                <a:cs typeface="Arial"/>
+              </a:defRPr>
+            </a:pPr>
+            <a:r>
+              <a:rPr sz="2200" b="0">
+                <a:solidFill>
+                  <a:srgbClr val="102D3C"/>
+                </a:solidFill>
+                <a:latin typeface="Arial"/>
+                <a:ea typeface="Arial"/>
+                <a:cs typeface="Arial"/>
+              </a:rPr>
+              <a:t>Proposed approved method</a:t>
+            </a:r>
+          </a:p>
+        </p:txBody>
+      </p:sp>
+      <p:sp>
+        <p:nvSpPr>
+          <p:cNvPr id="5" name="text-39">
             <a:extLst xmlns:a="http://schemas.openxmlformats.org/drawingml/2006/main">
               <a:ext uri="{FF2B5EF4-FFF2-40B4-BE49-F238E27FC236}">
-                <a16:creationId xmlns:a16="http://schemas.microsoft.com/office/drawing/2014/main" id="{9C02F265-FA33-46F2-9004-3311FCDDF3C3}"/>
+                <a16:creationId xmlns:a16="http://schemas.microsoft.com/office/drawing/2014/main" id="{ED64070F-5D79-4504-BEEB-DC87AEA4DFC8}"/>
               </a:ext>
             </a:extLst>
           </p:cNvPr>
@@ -4866,8 +4910,8 @@
         </p:nvSpPr>
         <p:spPr>
           <a:xfrm xmlns:a="http://schemas.openxmlformats.org/drawingml/2006/main">
-            <a:off x="8001000" y="4705350"/>
-            <a:ext cx="3581400" cy="1190625"/>
+            <a:off x="7239000" y="4410075"/>
+            <a:ext cx="4343400" cy="1304925"/>
           </a:xfrm>
           <a:prstGeom xmlns:a="http://schemas.openxmlformats.org/drawingml/2006/main" prst="rect">
             <a:avLst/>
@@ -4884,81 +4928,81 @@
           <a:lstStyle xmlns:a="http://schemas.openxmlformats.org/drawingml/2006/main"/>
           <a:p xmlns:a="http://schemas.openxmlformats.org/drawingml/2006/main">
             <a:pPr algn="l">
-              <a:defRPr sz="2000" b="1">
-                <a:solidFill>
-                  <a:srgbClr val="102D3C"/>
-                </a:solidFill>
-                <a:latin typeface="Arial"/>
-                <a:ea typeface="Arial"/>
-                <a:cs typeface="Arial"/>
-              </a:defRPr>
-            </a:pPr>
-            <a:r>
-              <a:rPr sz="2000" b="1">
-                <a:solidFill>
-                  <a:srgbClr val="102D3C"/>
-                </a:solidFill>
-                <a:latin typeface="Arial"/>
-                <a:ea typeface="Arial"/>
-                <a:cs typeface="Arial"/>
-              </a:rPr>
-              <a:t>No private records, rule bodies</a:t>
-            </a:r>
-          </a:p>
-          <a:p xmlns:a="http://schemas.openxmlformats.org/drawingml/2006/main">
-            <a:pPr algn="l">
-              <a:defRPr sz="2000" b="1">
-                <a:solidFill>
-                  <a:srgbClr val="102D3C"/>
-                </a:solidFill>
-                <a:latin typeface="Arial"/>
-                <a:ea typeface="Arial"/>
-                <a:cs typeface="Arial"/>
-              </a:defRPr>
-            </a:pPr>
-            <a:r>
-              <a:rPr sz="2000" b="1">
-                <a:solidFill>
-                  <a:srgbClr val="102D3C"/>
-                </a:solidFill>
-                <a:latin typeface="Arial"/>
-                <a:ea typeface="Arial"/>
-                <a:cs typeface="Arial"/>
-              </a:rPr>
-              <a:t>or computed brief in the</a:t>
-            </a:r>
-          </a:p>
-          <a:p xmlns:a="http://schemas.openxmlformats.org/drawingml/2006/main">
-            <a:pPr algn="l">
-              <a:defRPr sz="2000" b="1">
-                <a:solidFill>
-                  <a:srgbClr val="102D3C"/>
-                </a:solidFill>
-                <a:latin typeface="Arial"/>
-                <a:ea typeface="Arial"/>
-                <a:cs typeface="Arial"/>
-              </a:defRPr>
-            </a:pPr>
-            <a:r>
-              <a:rPr sz="2000" b="1">
-                <a:solidFill>
-                  <a:srgbClr val="102D3C"/>
-                </a:solidFill>
-                <a:latin typeface="Arial"/>
-                <a:ea typeface="Arial"/>
-                <a:cs typeface="Arial"/>
-              </a:rPr>
-              <a:t>inspected application bodies.</a:t>
-            </a:r>
-          </a:p>
-        </p:txBody>
-      </p:sp>
-      <p:sp>
-        <p:nvSpPr>
-          <p:cNvPr id="6" name="text-36">
+              <a:defRPr sz="2200" b="1">
+                <a:solidFill>
+                  <a:srgbClr val="102D3C"/>
+                </a:solidFill>
+                <a:latin typeface="Arial"/>
+                <a:ea typeface="Arial"/>
+                <a:cs typeface="Arial"/>
+              </a:defRPr>
+            </a:pPr>
+            <a:r>
+              <a:rPr sz="2200" b="1">
+                <a:solidFill>
+                  <a:srgbClr val="102D3C"/>
+                </a:solidFill>
+                <a:latin typeface="Arial"/>
+                <a:ea typeface="Arial"/>
+                <a:cs typeface="Arial"/>
+              </a:rPr>
+              <a:t>The inspected bodies exclude</a:t>
+            </a:r>
+          </a:p>
+          <a:p xmlns:a="http://schemas.openxmlformats.org/drawingml/2006/main">
+            <a:pPr algn="l">
+              <a:defRPr sz="2200" b="1">
+                <a:solidFill>
+                  <a:srgbClr val="102D3C"/>
+                </a:solidFill>
+                <a:latin typeface="Arial"/>
+                <a:ea typeface="Arial"/>
+                <a:cs typeface="Arial"/>
+              </a:defRPr>
+            </a:pPr>
+            <a:r>
+              <a:rPr sz="2200" b="1">
+                <a:solidFill>
+                  <a:srgbClr val="102D3C"/>
+                </a:solidFill>
+                <a:latin typeface="Arial"/>
+                <a:ea typeface="Arial"/>
+                <a:cs typeface="Arial"/>
+              </a:rPr>
+              <a:t>private records, rule bodies</a:t>
+            </a:r>
+          </a:p>
+          <a:p xmlns:a="http://schemas.openxmlformats.org/drawingml/2006/main">
+            <a:pPr algn="l">
+              <a:defRPr sz="2200" b="1">
+                <a:solidFill>
+                  <a:srgbClr val="102D3C"/>
+                </a:solidFill>
+                <a:latin typeface="Arial"/>
+                <a:ea typeface="Arial"/>
+                <a:cs typeface="Arial"/>
+              </a:defRPr>
+            </a:pPr>
+            <a:r>
+              <a:rPr sz="2200" b="1">
+                <a:solidFill>
+                  <a:srgbClr val="102D3C"/>
+                </a:solidFill>
+                <a:latin typeface="Arial"/>
+                <a:ea typeface="Arial"/>
+                <a:cs typeface="Arial"/>
+              </a:rPr>
+              <a:t>and the computed brief.</a:t>
+            </a:r>
+          </a:p>
+        </p:txBody>
+      </p:sp>
+      <p:sp>
+        <p:nvSpPr>
+          <p:cNvPr id="6" name="text-40">
             <a:extLst xmlns:a="http://schemas.openxmlformats.org/drawingml/2006/main">
               <a:ext uri="{FF2B5EF4-FFF2-40B4-BE49-F238E27FC236}">
-                <a16:creationId xmlns:a16="http://schemas.microsoft.com/office/drawing/2014/main" id="{A4318B38-0217-4ECB-A836-D67ACA3EE50E}"/>
+                <a16:creationId xmlns:a16="http://schemas.microsoft.com/office/drawing/2014/main" id="{88B21816-91D2-4E80-8673-7B94F59B31CE}"/>
               </a:ext>
             </a:extLst>
           </p:cNvPr>
@@ -4970,7 +5014,7 @@
         <p:spPr>
           <a:xfrm xmlns:a="http://schemas.openxmlformats.org/drawingml/2006/main">
             <a:off x="609600" y="6086475"/>
-            <a:ext cx="10972800" cy="514350"/>
+            <a:ext cx="10972800" cy="533400"/>
           </a:xfrm>
           <a:prstGeom xmlns:a="http://schemas.openxmlformats.org/drawingml/2006/main" prst="rect">
             <a:avLst/>
@@ -5005,7 +5049,7 @@
                 <a:ea typeface="Arial"/>
                 <a:cs typeface="Arial"/>
               </a:rPr>
-              <a:t>Public task/capability and transport metadata remain disclosed. The local host is trusted.</a:t>
+              <a:t>Task/capability and transport metadata remain disclosed. The local host and employee are trusted.</a:t>
             </a:r>
           </a:p>
         </p:txBody>
@@ -5013,7 +5057,7 @@
     </p:spTree>
     <p:extLst>
       <p:ext uri="{BB962C8B-B14F-4D97-AF65-F5344CB8AC3E}">
-        <p14:creationId xmlns:p14="http://schemas.microsoft.com/office/powerpoint/2010/main" val="1023931196"/>
+        <p14:creationId xmlns:p14="http://schemas.microsoft.com/office/powerpoint/2010/main" val="2062279647"/>
       </p:ext>
     </p:extLst>
   </p:cSld>
@@ -5041,10 +5085,10 @@
       </p:grpSpPr>
       <p:sp>
         <p:nvSpPr>
-          <p:cNvPr id="7" name="text-37">
+          <p:cNvPr id="9" name="text-41">
             <a:extLst xmlns:a="http://schemas.openxmlformats.org/drawingml/2006/main">
               <a:ext uri="{FF2B5EF4-FFF2-40B4-BE49-F238E27FC236}">
-                <a16:creationId xmlns:a16="http://schemas.microsoft.com/office/drawing/2014/main" id="{27D33AA3-FA60-42AD-A8E3-298F047E4F79}"/>
+                <a16:creationId xmlns:a16="http://schemas.microsoft.com/office/drawing/2014/main" id="{E0960EED-1F4B-46A2-9F83-A3F153B6BEF4}"/>
               </a:ext>
             </a:extLst>
           </p:cNvPr>
@@ -5091,27 +5135,347 @@
                 <a:ea typeface="Arial"/>
                 <a:cs typeface="Arial"/>
               </a:rPr>
-              <a:t>Controls stop a forbidden interaction</a:t>
+              <a:t>An internal save must match the actual brief</a:t>
+            </a:r>
+          </a:p>
+        </p:txBody>
+      </p:sp>
+      <p:sp>
+        <p:nvSpPr>
+          <p:cNvPr id="2" name="text-42">
+            <a:extLst xmlns:a="http://schemas.openxmlformats.org/drawingml/2006/main">
+              <a:ext uri="{FF2B5EF4-FFF2-40B4-BE49-F238E27FC236}">
+                <a16:creationId xmlns:a16="http://schemas.microsoft.com/office/drawing/2014/main" id="{1D5ECA0B-EB1A-4095-995A-62C2EA55A235}"/>
+              </a:ext>
+            </a:extLst>
+          </p:cNvPr>
+          <p:cNvSpPr>
+            <a:spLocks xmlns:a="http://schemas.openxmlformats.org/drawingml/2006/main" noGrp="1"/>
+          </p:cNvSpPr>
+          <p:nvPr/>
+        </p:nvSpPr>
+        <p:spPr>
+          <a:xfrm xmlns:a="http://schemas.openxmlformats.org/drawingml/2006/main">
+            <a:off x="609600" y="1552575"/>
+            <a:ext cx="5391150" cy="447675"/>
+          </a:xfrm>
+          <a:prstGeom xmlns:a="http://schemas.openxmlformats.org/drawingml/2006/main" prst="rect">
+            <a:avLst/>
+          </a:prstGeom>
+          <a:noFill xmlns:a="http://schemas.openxmlformats.org/drawingml/2006/main"/>
+          <a:ln xmlns:a="http://schemas.openxmlformats.org/drawingml/2006/main" w="0">
+            <a:noFill/>
+          </a:ln>
+        </p:spPr>
+        <p:txBody>
+          <a:bodyPr xmlns:a="http://schemas.openxmlformats.org/drawingml/2006/main" wrap="square" lIns="0" tIns="0" rIns="0" bIns="0" anchor="t">
+            <a:noAutofit/>
+          </a:bodyPr>
+          <a:lstStyle xmlns:a="http://schemas.openxmlformats.org/drawingml/2006/main"/>
+          <a:p xmlns:a="http://schemas.openxmlformats.org/drawingml/2006/main">
+            <a:pPr algn="l">
+              <a:defRPr sz="2400" b="1">
+                <a:solidFill>
+                  <a:srgbClr val="2D6B51"/>
+                </a:solidFill>
+                <a:latin typeface="Arial"/>
+                <a:ea typeface="Arial"/>
+                <a:cs typeface="Arial"/>
+              </a:defRPr>
+            </a:pPr>
+            <a:r>
+              <a:rPr sz="2400" b="1">
+                <a:solidFill>
+                  <a:srgbClr val="2D6B51"/>
+                </a:solidFill>
+                <a:latin typeface="Arial"/>
+                <a:ea typeface="Arial"/>
+                <a:cs typeface="Arial"/>
+              </a:rPr>
+              <a:t>Observed permitted action</a:t>
+            </a:r>
+          </a:p>
+        </p:txBody>
+      </p:sp>
+      <p:sp>
+        <p:nvSpPr>
+          <p:cNvPr id="3" name="text-43">
+            <a:extLst xmlns:a="http://schemas.openxmlformats.org/drawingml/2006/main">
+              <a:ext uri="{FF2B5EF4-FFF2-40B4-BE49-F238E27FC236}">
+                <a16:creationId xmlns:a16="http://schemas.microsoft.com/office/drawing/2014/main" id="{AA896FBB-51BB-4C40-A2BC-55029DB76537}"/>
+              </a:ext>
+            </a:extLst>
+          </p:cNvPr>
+          <p:cNvSpPr>
+            <a:spLocks xmlns:a="http://schemas.openxmlformats.org/drawingml/2006/main" noGrp="1"/>
+          </p:cNvSpPr>
+          <p:nvPr/>
+        </p:nvSpPr>
+        <p:spPr>
+          <a:xfrm xmlns:a="http://schemas.openxmlformats.org/drawingml/2006/main">
+            <a:off x="609600" y="2266950"/>
+            <a:ext cx="5391150" cy="1133475"/>
+          </a:xfrm>
+          <a:prstGeom xmlns:a="http://schemas.openxmlformats.org/drawingml/2006/main" prst="rect">
+            <a:avLst/>
+          </a:prstGeom>
+          <a:noFill xmlns:a="http://schemas.openxmlformats.org/drawingml/2006/main"/>
+          <a:ln xmlns:a="http://schemas.openxmlformats.org/drawingml/2006/main" w="0">
+            <a:noFill/>
+          </a:ln>
+        </p:spPr>
+        <p:txBody>
+          <a:bodyPr xmlns:a="http://schemas.openxmlformats.org/drawingml/2006/main" wrap="square" lIns="0" tIns="0" rIns="0" bIns="0" anchor="t">
+            <a:noAutofit/>
+          </a:bodyPr>
+          <a:lstStyle xmlns:a="http://schemas.openxmlformats.org/drawingml/2006/main"/>
+          <a:p xmlns:a="http://schemas.openxmlformats.org/drawingml/2006/main">
+            <a:pPr algn="l">
+              <a:defRPr sz="3000" b="1">
+                <a:solidFill>
+                  <a:srgbClr val="102D3C"/>
+                </a:solidFill>
+                <a:latin typeface="Arial"/>
+                <a:ea typeface="Arial"/>
+                <a:cs typeface="Arial"/>
+              </a:defRPr>
+            </a:pPr>
+            <a:r>
+              <a:rPr sz="3000" b="1">
+                <a:solidFill>
+                  <a:srgbClr val="102D3C"/>
+                </a:solidFill>
+                <a:latin typeface="Arial"/>
+                <a:ea typeface="Arial"/>
+                <a:cs typeface="Arial"/>
+              </a:rPr>
+              <a:t>1 exact internal record</a:t>
+            </a:r>
+          </a:p>
+          <a:p xmlns:a="http://schemas.openxmlformats.org/drawingml/2006/main">
+            <a:pPr algn="l">
+              <a:defRPr sz="3000" b="1">
+                <a:solidFill>
+                  <a:srgbClr val="102D3C"/>
+                </a:solidFill>
+                <a:latin typeface="Arial"/>
+                <a:ea typeface="Arial"/>
+                <a:cs typeface="Arial"/>
+              </a:defRPr>
+            </a:pPr>
+            <a:r>
+              <a:rPr sz="3000" b="1">
+                <a:solidFill>
+                  <a:srgbClr val="102D3C"/>
+                </a:solidFill>
+                <a:latin typeface="Arial"/>
+                <a:ea typeface="Arial"/>
+                <a:cs typeface="Arial"/>
+              </a:rPr>
+              <a:t>confirmed independently</a:t>
+            </a:r>
+          </a:p>
+        </p:txBody>
+      </p:sp>
+      <p:sp>
+        <p:nvSpPr>
+          <p:cNvPr id="4" name="text-44">
+            <a:extLst xmlns:a="http://schemas.openxmlformats.org/drawingml/2006/main">
+              <a:ext uri="{FF2B5EF4-FFF2-40B4-BE49-F238E27FC236}">
+                <a16:creationId xmlns:a16="http://schemas.microsoft.com/office/drawing/2014/main" id="{C1C10EA1-5E52-4B9B-A77B-726D9754C9E8}"/>
+              </a:ext>
+            </a:extLst>
+          </p:cNvPr>
+          <p:cNvSpPr>
+            <a:spLocks xmlns:a="http://schemas.openxmlformats.org/drawingml/2006/main" noGrp="1"/>
+          </p:cNvSpPr>
+          <p:nvPr/>
+        </p:nvSpPr>
+        <p:spPr>
+          <a:xfrm xmlns:a="http://schemas.openxmlformats.org/drawingml/2006/main">
+            <a:off x="609600" y="3829050"/>
+            <a:ext cx="5391150" cy="1438275"/>
+          </a:xfrm>
+          <a:prstGeom xmlns:a="http://schemas.openxmlformats.org/drawingml/2006/main" prst="rect">
+            <a:avLst/>
+          </a:prstGeom>
+          <a:noFill xmlns:a="http://schemas.openxmlformats.org/drawingml/2006/main"/>
+          <a:ln xmlns:a="http://schemas.openxmlformats.org/drawingml/2006/main" w="0">
+            <a:noFill/>
+          </a:ln>
+        </p:spPr>
+        <p:txBody>
+          <a:bodyPr xmlns:a="http://schemas.openxmlformats.org/drawingml/2006/main" wrap="square" lIns="0" tIns="0" rIns="0" bIns="0" anchor="t">
+            <a:noAutofit/>
+          </a:bodyPr>
+          <a:lstStyle xmlns:a="http://schemas.openxmlformats.org/drawingml/2006/main"/>
+          <a:p xmlns:a="http://schemas.openxmlformats.org/drawingml/2006/main">
+            <a:pPr algn="l">
+              <a:defRPr sz="2100" b="0">
+                <a:solidFill>
+                  <a:srgbClr val="102D3C"/>
+                </a:solidFill>
+                <a:latin typeface="Arial"/>
+                <a:ea typeface="Arial"/>
+                <a:cs typeface="Arial"/>
+              </a:defRPr>
+            </a:pPr>
+            <a:r>
+              <a:rPr sz="2100" b="0">
+                <a:solidFill>
+                  <a:srgbClr val="102D3C"/>
+                </a:solidFill>
+                <a:latin typeface="Arial"/>
+                <a:ea typeface="Arial"/>
+                <a:cs typeface="Arial"/>
+              </a:rPr>
+              <a:t>Employee approves the current brief.</a:t>
+            </a:r>
+          </a:p>
+          <a:p xmlns:a="http://schemas.openxmlformats.org/drawingml/2006/main">
+            <a:pPr algn="l">
+              <a:defRPr sz="2100" b="0">
+                <a:solidFill>
+                  <a:srgbClr val="102D3C"/>
+                </a:solidFill>
+                <a:latin typeface="Arial"/>
+                <a:ea typeface="Arial"/>
+                <a:cs typeface="Arial"/>
+              </a:defRPr>
+            </a:pPr>
+            <a:r>
+              <a:rPr sz="2100" b="0">
+                <a:solidFill>
+                  <a:srgbClr val="102D3C"/>
+                </a:solidFill>
+                <a:latin typeface="Arial"/>
+                <a:ea typeface="Arial"/>
+                <a:cs typeface="Arial"/>
+              </a:rPr>
+              <a:t>An independent reader checks its content</a:t>
+            </a:r>
+          </a:p>
+          <a:p xmlns:a="http://schemas.openxmlformats.org/drawingml/2006/main">
+            <a:pPr algn="l">
+              <a:defRPr sz="2100" b="0">
+                <a:solidFill>
+                  <a:srgbClr val="102D3C"/>
+                </a:solidFill>
+                <a:latin typeface="Arial"/>
+                <a:ea typeface="Arial"/>
+                <a:cs typeface="Arial"/>
+              </a:defRPr>
+            </a:pPr>
+            <a:r>
+              <a:rPr sz="2100" b="0">
+                <a:solidFill>
+                  <a:srgbClr val="102D3C"/>
+                </a:solidFill>
+                <a:latin typeface="Arial"/>
+                <a:ea typeface="Arial"/>
+                <a:cs typeface="Arial"/>
+              </a:rPr>
+              <a:t>and artifact / action identities.</a:t>
+            </a:r>
+          </a:p>
+        </p:txBody>
+      </p:sp>
+      <p:sp>
+        <p:nvSpPr>
+          <p:cNvPr id="5" name="text-45">
+            <a:extLst xmlns:a="http://schemas.openxmlformats.org/drawingml/2006/main">
+              <a:ext uri="{FF2B5EF4-FFF2-40B4-BE49-F238E27FC236}">
+                <a16:creationId xmlns:a16="http://schemas.microsoft.com/office/drawing/2014/main" id="{859F492F-1A2F-469C-9B98-0BFD77F1B101}"/>
+              </a:ext>
+            </a:extLst>
+          </p:cNvPr>
+          <p:cNvSpPr>
+            <a:spLocks xmlns:a="http://schemas.openxmlformats.org/drawingml/2006/main" noGrp="1"/>
+          </p:cNvSpPr>
+          <p:nvPr/>
+        </p:nvSpPr>
+        <p:spPr>
+          <a:xfrm xmlns:a="http://schemas.openxmlformats.org/drawingml/2006/main">
+            <a:off x="609600" y="5629275"/>
+            <a:ext cx="5391150" cy="771525"/>
+          </a:xfrm>
+          <a:prstGeom xmlns:a="http://schemas.openxmlformats.org/drawingml/2006/main" prst="rect">
+            <a:avLst/>
+          </a:prstGeom>
+          <a:noFill xmlns:a="http://schemas.openxmlformats.org/drawingml/2006/main"/>
+          <a:ln xmlns:a="http://schemas.openxmlformats.org/drawingml/2006/main" w="0">
+            <a:noFill/>
+          </a:ln>
+        </p:spPr>
+        <p:txBody>
+          <a:bodyPr xmlns:a="http://schemas.openxmlformats.org/drawingml/2006/main" wrap="square" lIns="0" tIns="0" rIns="0" bIns="0" anchor="t">
+            <a:noAutofit/>
+          </a:bodyPr>
+          <a:lstStyle xmlns:a="http://schemas.openxmlformats.org/drawingml/2006/main"/>
+          <a:p xmlns:a="http://schemas.openxmlformats.org/drawingml/2006/main">
+            <a:pPr algn="l">
+              <a:defRPr sz="2000" b="0">
+                <a:solidFill>
+                  <a:srgbClr val="102D3C"/>
+                </a:solidFill>
+                <a:latin typeface="Arial"/>
+                <a:ea typeface="Arial"/>
+                <a:cs typeface="Arial"/>
+              </a:defRPr>
+            </a:pPr>
+            <a:r>
+              <a:rPr sz="2000" b="0">
+                <a:solidFill>
+                  <a:srgbClr val="102D3C"/>
+                </a:solidFill>
+                <a:latin typeface="Arial"/>
+                <a:ea typeface="Arial"/>
+                <a:cs typeface="Arial"/>
+              </a:rPr>
+              <a:t>Stale save: no added effect</a:t>
+            </a:r>
+          </a:p>
+          <a:p xmlns:a="http://schemas.openxmlformats.org/drawingml/2006/main">
+            <a:pPr algn="l">
+              <a:defRPr sz="2000" b="0">
+                <a:solidFill>
+                  <a:srgbClr val="102D3C"/>
+                </a:solidFill>
+                <a:latin typeface="Arial"/>
+                <a:ea typeface="Arial"/>
+                <a:cs typeface="Arial"/>
+              </a:defRPr>
+            </a:pPr>
+            <a:r>
+              <a:rPr sz="2000" b="0">
+                <a:solidFill>
+                  <a:srgbClr val="102D3C"/>
+                </a:solidFill>
+                <a:latin typeface="Arial"/>
+                <a:ea typeface="Arial"/>
+                <a:cs typeface="Arial"/>
+              </a:rPr>
+              <a:t>Manual external export: refused</a:t>
             </a:r>
           </a:p>
         </p:txBody>
       </p:sp>
       <p:pic>
         <p:nvPicPr>
-          <p:cNvPr id="8" name=""/>
+          <p:cNvPr id="14" name=""/>
           <p:cNvPicPr>
             <a:picLocks xmlns:a="http://schemas.openxmlformats.org/drawingml/2006/main" noChangeAspect="1"/>
           </p:cNvPicPr>
           <p:nvPr/>
         </p:nvPicPr>
         <p:blipFill>
-          <a:blip xmlns:r="http://schemas.openxmlformats.org/officeDocument/2006/relationships" xmlns:a="http://schemas.openxmlformats.org/drawingml/2006/main" r:embed="R0db3369fe9574b4c"/>
+          <a:blip xmlns:r="http://schemas.openxmlformats.org/officeDocument/2006/relationships" xmlns:a="http://schemas.openxmlformats.org/drawingml/2006/main" r:embed="Rd24123724671439b"/>
           <a:stretch xmlns:a="http://schemas.openxmlformats.org/drawingml/2006/main"/>
         </p:blipFill>
         <p:spPr>
           <a:xfrm xmlns:a="http://schemas.openxmlformats.org/drawingml/2006/main">
-            <a:off x="609600" y="2260300"/>
-            <a:ext cx="6381750" cy="2889849"/>
+            <a:off x="6477000" y="1758710"/>
+            <a:ext cx="5105400" cy="2311879"/>
           </a:xfrm>
           <a:prstGeom xmlns:a="http://schemas.openxmlformats.org/drawingml/2006/main" prst="rect">
             <a:avLst/>
@@ -5120,10 +5484,10 @@
       </p:pic>
       <p:sp>
         <p:nvSpPr>
-          <p:cNvPr id="3" name="text-38">
+          <p:cNvPr id="7" name="text-46">
             <a:extLst xmlns:a="http://schemas.openxmlformats.org/drawingml/2006/main">
               <a:ext uri="{FF2B5EF4-FFF2-40B4-BE49-F238E27FC236}">
-                <a16:creationId xmlns:a16="http://schemas.microsoft.com/office/drawing/2014/main" id="{0ECD0228-91ED-40C7-9178-9A8B8F8716C3}"/>
+                <a16:creationId xmlns:a16="http://schemas.microsoft.com/office/drawing/2014/main" id="{AC555986-6473-4EB7-9FBD-159C70EC461A}"/>
               </a:ext>
             </a:extLst>
           </p:cNvPr>
@@ -5134,8 +5498,8 @@
         </p:nvSpPr>
         <p:spPr>
           <a:xfrm xmlns:a="http://schemas.openxmlformats.org/drawingml/2006/main">
-            <a:off x="7467600" y="1581150"/>
-            <a:ext cx="4114800" cy="1047750"/>
+            <a:off x="6477000" y="4543425"/>
+            <a:ext cx="5105400" cy="1419225"/>
           </a:xfrm>
           <a:prstGeom xmlns:a="http://schemas.openxmlformats.org/drawingml/2006/main" prst="rect">
             <a:avLst/>
@@ -5154,7 +5518,7 @@
             <a:pPr algn="l">
               <a:defRPr sz="2000" b="1">
                 <a:solidFill>
-                  <a:srgbClr val="2D6B51"/>
+                  <a:srgbClr val="102D3C"/>
                 </a:solidFill>
                 <a:latin typeface="Arial"/>
                 <a:ea typeface="Arial"/>
@@ -5164,20 +5528,20 @@
             <a:r>
               <a:rPr sz="2000" b="1">
                 <a:solidFill>
-                  <a:srgbClr val="2D6B51"/>
-                </a:solidFill>
-                <a:latin typeface="Arial"/>
-                <a:ea typeface="Arial"/>
-                <a:cs typeface="Arial"/>
-              </a:rPr>
-              <a:t>Benign advisory admitted</a:t>
+                  <a:srgbClr val="102D3C"/>
+                </a:solidFill>
+                <a:latin typeface="Arial"/>
+                <a:ea typeface="Arial"/>
+                <a:cs typeface="Arial"/>
+              </a:rPr>
+              <a:t>Policy can block new dispatch.</a:t>
             </a:r>
           </a:p>
           <a:p xmlns:a="http://schemas.openxmlformats.org/drawingml/2006/main">
             <a:pPr algn="l">
               <a:defRPr sz="2000" b="1">
                 <a:solidFill>
-                  <a:srgbClr val="2D6B51"/>
+                  <a:srgbClr val="102D3C"/>
                 </a:solidFill>
                 <a:latin typeface="Arial"/>
                 <a:ea typeface="Arial"/>
@@ -5187,23 +5551,46 @@
             <a:r>
               <a:rPr sz="2000" b="1">
                 <a:solidFill>
-                  <a:srgbClr val="2D6B51"/>
-                </a:solidFill>
-                <a:latin typeface="Arial"/>
-                <a:ea typeface="Arial"/>
-                <a:cs typeface="Arial"/>
-              </a:rPr>
-              <a:t>Hostile paraphrase quarantined</a:t>
-            </a:r>
-          </a:p>
-        </p:txBody>
-      </p:sp>
-      <p:sp>
-        <p:nvSpPr>
-          <p:cNvPr id="4" name="text-39">
+                  <a:srgbClr val="102D3C"/>
+                </a:solidFill>
+                <a:latin typeface="Arial"/>
+                <a:ea typeface="Arial"/>
+                <a:cs typeface="Arial"/>
+              </a:rPr>
+              <a:t>Hostile advisory quarantined as a whole.</a:t>
+            </a:r>
+          </a:p>
+          <a:p xmlns:a="http://schemas.openxmlformats.org/drawingml/2006/main">
+            <a:pPr algn="l">
+              <a:defRPr sz="2000" b="1">
+                <a:solidFill>
+                  <a:srgbClr val="102D3C"/>
+                </a:solidFill>
+                <a:latin typeface="Arial"/>
+                <a:ea typeface="Arial"/>
+                <a:cs typeface="Arial"/>
+              </a:defRPr>
+            </a:pPr>
+            <a:r>
+              <a:rPr sz="2000" b="1">
+                <a:solidFill>
+                  <a:srgbClr val="102D3C"/>
+                </a:solidFill>
+                <a:latin typeface="Arial"/>
+                <a:ea typeface="Arial"/>
+                <a:cs typeface="Arial"/>
+              </a:rPr>
+              <a:t>Actor, checker and tools share one budget.</a:t>
+            </a:r>
+          </a:p>
+        </p:txBody>
+      </p:sp>
+      <p:sp>
+        <p:nvSpPr>
+          <p:cNvPr id="8" name="text-47">
             <a:extLst xmlns:a="http://schemas.openxmlformats.org/drawingml/2006/main">
               <a:ext uri="{FF2B5EF4-FFF2-40B4-BE49-F238E27FC236}">
-                <a16:creationId xmlns:a16="http://schemas.microsoft.com/office/drawing/2014/main" id="{2A0D7A07-7BB0-4A66-AD06-95BBE7734E73}"/>
+                <a16:creationId xmlns:a16="http://schemas.microsoft.com/office/drawing/2014/main" id="{C4E5DC2D-6188-4042-B05C-68CF8A2F3EC2}"/>
               </a:ext>
             </a:extLst>
           </p:cNvPr>
@@ -5214,8 +5601,8 @@
         </p:nvSpPr>
         <p:spPr>
           <a:xfrm xmlns:a="http://schemas.openxmlformats.org/drawingml/2006/main">
-            <a:off x="7467600" y="2914650"/>
-            <a:ext cx="4114800" cy="1381125"/>
+            <a:off x="6477000" y="6067425"/>
+            <a:ext cx="5105400" cy="533400"/>
           </a:xfrm>
           <a:prstGeom xmlns:a="http://schemas.openxmlformats.org/drawingml/2006/main" prst="rect">
             <a:avLst/>
@@ -5232,190 +5619,7 @@
           <a:lstStyle xmlns:a="http://schemas.openxmlformats.org/drawingml/2006/main"/>
           <a:p xmlns:a="http://schemas.openxmlformats.org/drawingml/2006/main">
             <a:pPr algn="l">
-              <a:defRPr sz="2000" b="0">
-                <a:solidFill>
-                  <a:srgbClr val="102D3C"/>
-                </a:solidFill>
-                <a:latin typeface="Arial"/>
-                <a:ea typeface="Arial"/>
-                <a:cs typeface="Arial"/>
-              </a:defRPr>
-            </a:pPr>
-            <a:r>
-              <a:rPr sz="2000" b="0">
-                <a:solidFill>
-                  <a:srgbClr val="102D3C"/>
-                </a:solidFill>
-                <a:latin typeface="Arial"/>
-                <a:ea typeface="Arial"/>
-                <a:cs typeface="Arial"/>
-              </a:rPr>
-              <a:t>Budget blocks new dispatch</a:t>
-            </a:r>
-          </a:p>
-          <a:p xmlns:a="http://schemas.openxmlformats.org/drawingml/2006/main">
-            <a:pPr algn="l">
-              <a:defRPr sz="2000" b="0">
-                <a:solidFill>
-                  <a:srgbClr val="102D3C"/>
-                </a:solidFill>
-                <a:latin typeface="Arial"/>
-                <a:ea typeface="Arial"/>
-                <a:cs typeface="Arial"/>
-              </a:defRPr>
-            </a:pPr>
-            <a:r>
-              <a:rPr sz="2000" b="0">
-                <a:solidFill>
-                  <a:srgbClr val="102D3C"/>
-                </a:solidFill>
-                <a:latin typeface="Arial"/>
-                <a:ea typeface="Arial"/>
-                <a:cs typeface="Arial"/>
-              </a:rPr>
-              <a:t>Stale save adds no effect</a:t>
-            </a:r>
-          </a:p>
-          <a:p xmlns:a="http://schemas.openxmlformats.org/drawingml/2006/main">
-            <a:pPr algn="l">
-              <a:defRPr sz="2000" b="0">
-                <a:solidFill>
-                  <a:srgbClr val="102D3C"/>
-                </a:solidFill>
-                <a:latin typeface="Arial"/>
-                <a:ea typeface="Arial"/>
-                <a:cs typeface="Arial"/>
-              </a:defRPr>
-            </a:pPr>
-            <a:r>
-              <a:rPr sz="2000" b="0">
-                <a:solidFill>
-                  <a:srgbClr val="102D3C"/>
-                </a:solidFill>
-                <a:latin typeface="Arial"/>
-                <a:ea typeface="Arial"/>
-                <a:cs typeface="Arial"/>
-              </a:rPr>
-              <a:t>Manual external export refused</a:t>
-            </a:r>
-          </a:p>
-        </p:txBody>
-      </p:sp>
-      <p:sp>
-        <p:nvSpPr>
-          <p:cNvPr id="5" name="text-40">
-            <a:extLst xmlns:a="http://schemas.openxmlformats.org/drawingml/2006/main">
-              <a:ext uri="{FF2B5EF4-FFF2-40B4-BE49-F238E27FC236}">
-                <a16:creationId xmlns:a16="http://schemas.microsoft.com/office/drawing/2014/main" id="{F50722FB-B0AF-4F07-97A1-AB927640F62B}"/>
-              </a:ext>
-            </a:extLst>
-          </p:cNvPr>
-          <p:cNvSpPr>
-            <a:spLocks xmlns:a="http://schemas.openxmlformats.org/drawingml/2006/main" noGrp="1"/>
-          </p:cNvSpPr>
-          <p:nvPr/>
-        </p:nvSpPr>
-        <p:spPr>
-          <a:xfrm xmlns:a="http://schemas.openxmlformats.org/drawingml/2006/main">
-            <a:off x="7467600" y="4810125"/>
-            <a:ext cx="4114800" cy="933450"/>
-          </a:xfrm>
-          <a:prstGeom xmlns:a="http://schemas.openxmlformats.org/drawingml/2006/main" prst="rect">
-            <a:avLst/>
-          </a:prstGeom>
-          <a:noFill xmlns:a="http://schemas.openxmlformats.org/drawingml/2006/main"/>
-          <a:ln xmlns:a="http://schemas.openxmlformats.org/drawingml/2006/main" w="0">
-            <a:noFill/>
-          </a:ln>
-        </p:spPr>
-        <p:txBody>
-          <a:bodyPr xmlns:a="http://schemas.openxmlformats.org/drawingml/2006/main" wrap="square" lIns="0" tIns="0" rIns="0" bIns="0" anchor="t">
-            <a:noAutofit/>
-          </a:bodyPr>
-          <a:lstStyle xmlns:a="http://schemas.openxmlformats.org/drawingml/2006/main"/>
-          <a:p xmlns:a="http://schemas.openxmlformats.org/drawingml/2006/main">
-            <a:pPr algn="l">
-              <a:defRPr sz="2000" b="1">
-                <a:solidFill>
-                  <a:srgbClr val="102D3C"/>
-                </a:solidFill>
-                <a:latin typeface="Arial"/>
-                <a:ea typeface="Arial"/>
-                <a:cs typeface="Arial"/>
-              </a:defRPr>
-            </a:pPr>
-            <a:r>
-              <a:rPr sz="2000" b="1">
-                <a:solidFill>
-                  <a:srgbClr val="102D3C"/>
-                </a:solidFill>
-                <a:latin typeface="Arial"/>
-                <a:ea typeface="Arial"/>
-                <a:cs typeface="Arial"/>
-              </a:rPr>
-              <a:t>Internal save: 1 exact</a:t>
-            </a:r>
-          </a:p>
-          <a:p xmlns:a="http://schemas.openxmlformats.org/drawingml/2006/main">
-            <a:pPr algn="l">
-              <a:defRPr sz="2000" b="1">
-                <a:solidFill>
-                  <a:srgbClr val="102D3C"/>
-                </a:solidFill>
-                <a:latin typeface="Arial"/>
-                <a:ea typeface="Arial"/>
-                <a:cs typeface="Arial"/>
-              </a:defRPr>
-            </a:pPr>
-            <a:r>
-              <a:rPr sz="2000" b="1">
-                <a:solidFill>
-                  <a:srgbClr val="102D3C"/>
-                </a:solidFill>
-                <a:latin typeface="Arial"/>
-                <a:ea typeface="Arial"/>
-                <a:cs typeface="Arial"/>
-              </a:rPr>
-              <a:t>independently observed record</a:t>
-            </a:r>
-          </a:p>
-        </p:txBody>
-      </p:sp>
-      <p:sp>
-        <p:nvSpPr>
-          <p:cNvPr id="6" name="text-41">
-            <a:extLst xmlns:a="http://schemas.openxmlformats.org/drawingml/2006/main">
-              <a:ext uri="{FF2B5EF4-FFF2-40B4-BE49-F238E27FC236}">
-                <a16:creationId xmlns:a16="http://schemas.microsoft.com/office/drawing/2014/main" id="{E9FF34E0-0D05-45D6-A26B-4DE20DC5EC4D}"/>
-              </a:ext>
-            </a:extLst>
-          </p:cNvPr>
-          <p:cNvSpPr>
-            <a:spLocks xmlns:a="http://schemas.openxmlformats.org/drawingml/2006/main" noGrp="1"/>
-          </p:cNvSpPr>
-          <p:nvPr/>
-        </p:nvSpPr>
-        <p:spPr>
-          <a:xfrm xmlns:a="http://schemas.openxmlformats.org/drawingml/2006/main">
-            <a:off x="609600" y="6086475"/>
-            <a:ext cx="10972800" cy="552450"/>
-          </a:xfrm>
-          <a:prstGeom xmlns:a="http://schemas.openxmlformats.org/drawingml/2006/main" prst="rect">
-            <a:avLst/>
-          </a:prstGeom>
-          <a:noFill xmlns:a="http://schemas.openxmlformats.org/drawingml/2006/main"/>
-          <a:ln xmlns:a="http://schemas.openxmlformats.org/drawingml/2006/main" w="0">
-            <a:noFill/>
-          </a:ln>
-        </p:spPr>
-        <p:txBody>
-          <a:bodyPr xmlns:a="http://schemas.openxmlformats.org/drawingml/2006/main" wrap="square" lIns="0" tIns="0" rIns="0" bIns="0" anchor="t">
-            <a:noAutofit/>
-          </a:bodyPr>
-          <a:lstStyle xmlns:a="http://schemas.openxmlformats.org/drawingml/2006/main"/>
-          <a:p xmlns:a="http://schemas.openxmlformats.org/drawingml/2006/main">
-            <a:pPr algn="l">
-              <a:defRPr sz="1700" b="0">
+              <a:defRPr sz="1600" b="0">
                 <a:solidFill>
                   <a:srgbClr val="465960"/>
                 </a:solidFill>
@@ -5425,7 +5629,7 @@
               </a:defRPr>
             </a:pPr>
             <a:r>
-              <a:rPr sz="1700" b="0">
+              <a:rPr sz="1600" b="0">
                 <a:solidFill>
                   <a:srgbClr val="465960"/>
                 </a:solidFill>
@@ -5433,7 +5637,7 @@
                 <a:ea typeface="Arial"/>
                 <a:cs typeface="Arial"/>
               </a:rPr>
-              <a:t>Whole-source quarantine is an observed control decision. It does not prove downstream causal benefit.</a:t>
+              <a:t>Save evidence is retained and separately dated. A GET screenshot makes no new save.</a:t>
             </a:r>
           </a:p>
         </p:txBody>
@@ -5441,7 +5645,7 @@
     </p:spTree>
     <p:extLst>
       <p:ext uri="{BB962C8B-B14F-4D97-AF65-F5344CB8AC3E}">
-        <p14:creationId xmlns:p14="http://schemas.microsoft.com/office/powerpoint/2010/main" val="1052447977"/>
+        <p14:creationId xmlns:p14="http://schemas.microsoft.com/office/powerpoint/2010/main" val="1670797165"/>
       </p:ext>
     </p:extLst>
   </p:cSld>
@@ -5469,10 +5673,10 @@
       </p:grpSpPr>
       <p:sp>
         <p:nvSpPr>
-          <p:cNvPr id="10" name="text-42">
+          <p:cNvPr id="9" name="text-48">
             <a:extLst xmlns:a="http://schemas.openxmlformats.org/drawingml/2006/main">
               <a:ext uri="{FF2B5EF4-FFF2-40B4-BE49-F238E27FC236}">
-                <a16:creationId xmlns:a16="http://schemas.microsoft.com/office/drawing/2014/main" id="{7EE1A201-84C9-4596-B59A-CE22388A4423}"/>
+                <a16:creationId xmlns:a16="http://schemas.microsoft.com/office/drawing/2014/main" id="{8103F26F-E47C-46E0-A1F2-C6B2A2D0DC3A}"/>
               </a:ext>
             </a:extLst>
           </p:cNvPr>
@@ -5519,17 +5723,17 @@
                 <a:ea typeface="Arial"/>
                 <a:cs typeface="Arial"/>
               </a:rPr>
-              <a:t>Evidence and limits</a:t>
-            </a:r>
-          </a:p>
-        </p:txBody>
-      </p:sp>
-      <p:sp>
-        <p:nvSpPr>
-          <p:cNvPr id="2" name="text-43">
+              <a:t>Evidence you can inspect; limits you should know</a:t>
+            </a:r>
+          </a:p>
+        </p:txBody>
+      </p:sp>
+      <p:sp>
+        <p:nvSpPr>
+          <p:cNvPr id="2" name="text-49">
             <a:extLst xmlns:a="http://schemas.openxmlformats.org/drawingml/2006/main">
               <a:ext uri="{FF2B5EF4-FFF2-40B4-BE49-F238E27FC236}">
-                <a16:creationId xmlns:a16="http://schemas.microsoft.com/office/drawing/2014/main" id="{06FC975E-CE3F-4AC3-BCA4-737B40B852EF}"/>
+                <a16:creationId xmlns:a16="http://schemas.microsoft.com/office/drawing/2014/main" id="{40344203-D62A-4847-A9D5-16C6F028C7A4}"/>
               </a:ext>
             </a:extLst>
           </p:cNvPr>
@@ -5540,8 +5744,8 @@
         </p:nvSpPr>
         <p:spPr>
           <a:xfrm xmlns:a="http://schemas.openxmlformats.org/drawingml/2006/main">
-            <a:off x="609600" y="1504950"/>
-            <a:ext cx="5219700" cy="438150"/>
+            <a:off x="609600" y="1581150"/>
+            <a:ext cx="5410200" cy="438150"/>
           </a:xfrm>
           <a:prstGeom xmlns:a="http://schemas.openxmlformats.org/drawingml/2006/main" prst="rect">
             <a:avLst/>
@@ -5576,17 +5780,17 @@
                 <a:ea typeface="Arial"/>
                 <a:cs typeface="Arial"/>
               </a:rPr>
-              <a:t>Observed proof</a:t>
-            </a:r>
-          </a:p>
-        </p:txBody>
-      </p:sp>
-      <p:sp>
-        <p:nvSpPr>
-          <p:cNvPr id="3" name="text-44">
+              <a:t>Retained actual evidence</a:t>
+            </a:r>
+          </a:p>
+        </p:txBody>
+      </p:sp>
+      <p:sp>
+        <p:nvSpPr>
+          <p:cNvPr id="3" name="text-50">
             <a:extLst xmlns:a="http://schemas.openxmlformats.org/drawingml/2006/main">
               <a:ext uri="{FF2B5EF4-FFF2-40B4-BE49-F238E27FC236}">
-                <a16:creationId xmlns:a16="http://schemas.microsoft.com/office/drawing/2014/main" id="{D4132D4D-B885-41FC-810B-36CBCC1E5D9B}"/>
+                <a16:creationId xmlns:a16="http://schemas.microsoft.com/office/drawing/2014/main" id="{8A0A712B-6C72-4714-AD4A-AF3470464F60}"/>
               </a:ext>
             </a:extLst>
           </p:cNvPr>
@@ -5597,8 +5801,8 @@
         </p:nvSpPr>
         <p:spPr>
           <a:xfrm xmlns:a="http://schemas.openxmlformats.org/drawingml/2006/main">
-            <a:off x="609600" y="2143125"/>
-            <a:ext cx="5391150" cy="2019300"/>
+            <a:off x="609600" y="2324100"/>
+            <a:ext cx="5410200" cy="2105025"/>
           </a:xfrm>
           <a:prstGeom xmlns:a="http://schemas.openxmlformats.org/drawingml/2006/main" prst="rect">
             <a:avLst/>
@@ -5615,104 +5819,104 @@
           <a:lstStyle xmlns:a="http://schemas.openxmlformats.org/drawingml/2006/main"/>
           <a:p xmlns:a="http://schemas.openxmlformats.org/drawingml/2006/main">
             <a:pPr algn="l">
-              <a:defRPr sz="2000" b="0">
-                <a:solidFill>
-                  <a:srgbClr val="102D3C"/>
-                </a:solidFill>
-                <a:latin typeface="Arial"/>
-                <a:ea typeface="Arial"/>
-                <a:cs typeface="Arial"/>
-              </a:defRPr>
-            </a:pPr>
-            <a:r>
-              <a:rPr sz="2000" b="0">
-                <a:solidFill>
-                  <a:srgbClr val="102D3C"/>
-                </a:solidFill>
-                <a:latin typeface="Arial"/>
-                <a:ea typeface="Arial"/>
-                <a:cs typeface="Arial"/>
-              </a:rPr>
-              <a:t>4 original advisory cases, 1 each</a:t>
-            </a:r>
-          </a:p>
-          <a:p xmlns:a="http://schemas.openxmlformats.org/drawingml/2006/main">
-            <a:pPr algn="l">
-              <a:defRPr sz="2000" b="0">
-                <a:solidFill>
-                  <a:srgbClr val="102D3C"/>
-                </a:solidFill>
-                <a:latin typeface="Arial"/>
-                <a:ea typeface="Arial"/>
-                <a:cs typeface="Arial"/>
-              </a:defRPr>
-            </a:pPr>
-            <a:r>
-              <a:rPr sz="2000" b="0">
-                <a:solidFill>
-                  <a:srgbClr val="102D3C"/>
-                </a:solidFill>
-                <a:latin typeface="Arial"/>
-                <a:ea typeface="Arial"/>
-                <a:cs typeface="Arial"/>
-              </a:rPr>
-              <a:t>2 original compositions + 1 new intention</a:t>
-            </a:r>
-          </a:p>
-          <a:p xmlns:a="http://schemas.openxmlformats.org/drawingml/2006/main">
-            <a:pPr algn="l">
-              <a:defRPr sz="2000" b="0">
-                <a:solidFill>
-                  <a:srgbClr val="102D3C"/>
-                </a:solidFill>
-                <a:latin typeface="Arial"/>
-                <a:ea typeface="Arial"/>
-                <a:cs typeface="Arial"/>
-              </a:defRPr>
-            </a:pPr>
-            <a:r>
-              <a:rPr sz="2000" b="0">
-                <a:solidFill>
-                  <a:srgbClr val="102D3C"/>
-                </a:solidFill>
-                <a:latin typeface="Arial"/>
-                <a:ea typeface="Arial"/>
-                <a:cs typeface="Arial"/>
-              </a:rPr>
-              <a:t>Private rebinds add zero new attempts</a:t>
-            </a:r>
-          </a:p>
-          <a:p xmlns:a="http://schemas.openxmlformats.org/drawingml/2006/main">
-            <a:pPr algn="l">
-              <a:defRPr sz="2000" b="0">
-                <a:solidFill>
-                  <a:srgbClr val="102D3C"/>
-                </a:solidFill>
-                <a:latin typeface="Arial"/>
-                <a:ea typeface="Arial"/>
-                <a:cs typeface="Arial"/>
-              </a:defRPr>
-            </a:pPr>
-            <a:r>
-              <a:rPr sz="2000" b="0">
-                <a:solidFill>
-                  <a:srgbClr val="102D3C"/>
-                </a:solidFill>
-                <a:latin typeface="Arial"/>
-                <a:ea typeface="Arial"/>
-                <a:cs typeface="Arial"/>
-              </a:rPr>
-              <a:t>Exact internal saves observed independently</a:t>
-            </a:r>
-          </a:p>
-        </p:txBody>
-      </p:sp>
-      <p:sp>
-        <p:nvSpPr>
-          <p:cNvPr id="4" name="text-45">
+              <a:defRPr sz="2100" b="0">
+                <a:solidFill>
+                  <a:srgbClr val="102D3C"/>
+                </a:solidFill>
+                <a:latin typeface="Arial"/>
+                <a:ea typeface="Arial"/>
+                <a:cs typeface="Arial"/>
+              </a:defRPr>
+            </a:pPr>
+            <a:r>
+              <a:rPr sz="2100" b="0">
+                <a:solidFill>
+                  <a:srgbClr val="102D3C"/>
+                </a:solidFill>
+                <a:latin typeface="Arial"/>
+                <a:ea typeface="Arial"/>
+                <a:cs typeface="Arial"/>
+              </a:rPr>
+              <a:t>Hosted AI returned the admitted methods</a:t>
+            </a:r>
+          </a:p>
+          <a:p xmlns:a="http://schemas.openxmlformats.org/drawingml/2006/main">
+            <a:pPr algn="l">
+              <a:defRPr sz="2100" b="0">
+                <a:solidFill>
+                  <a:srgbClr val="102D3C"/>
+                </a:solidFill>
+                <a:latin typeface="Arial"/>
+                <a:ea typeface="Arial"/>
+                <a:cs typeface="Arial"/>
+              </a:defRPr>
+            </a:pPr>
+            <a:r>
+              <a:rPr sz="2100" b="0">
+                <a:solidFill>
+                  <a:srgbClr val="102D3C"/>
+                </a:solidFill>
+                <a:latin typeface="Arial"/>
+                <a:ea typeface="Arial"/>
+                <a:cs typeface="Arial"/>
+              </a:rPr>
+              <a:t>Local rebind changed the selected suppliers</a:t>
+            </a:r>
+          </a:p>
+          <a:p xmlns:a="http://schemas.openxmlformats.org/drawingml/2006/main">
+            <a:pPr algn="l">
+              <a:defRPr sz="2100" b="0">
+                <a:solidFill>
+                  <a:srgbClr val="102D3C"/>
+                </a:solidFill>
+                <a:latin typeface="Arial"/>
+                <a:ea typeface="Arial"/>
+                <a:cs typeface="Arial"/>
+              </a:defRPr>
+            </a:pPr>
+            <a:r>
+              <a:rPr sz="2100" b="0">
+                <a:solidFill>
+                  <a:srgbClr val="102D3C"/>
+                </a:solidFill>
+                <a:latin typeface="Arial"/>
+                <a:ea typeface="Arial"/>
+                <a:cs typeface="Arial"/>
+              </a:rPr>
+              <a:t>Internal effects matched independent records</a:t>
+            </a:r>
+          </a:p>
+          <a:p xmlns:a="http://schemas.openxmlformats.org/drawingml/2006/main">
+            <a:pPr algn="l">
+              <a:defRPr sz="2100" b="0">
+                <a:solidFill>
+                  <a:srgbClr val="102D3C"/>
+                </a:solidFill>
+                <a:latin typeface="Arial"/>
+                <a:ea typeface="Arial"/>
+                <a:cs typeface="Arial"/>
+              </a:defRPr>
+            </a:pPr>
+            <a:r>
+              <a:rPr sz="2100" b="0">
+                <a:solidFill>
+                  <a:srgbClr val="102D3C"/>
+                </a:solidFill>
+                <a:latin typeface="Arial"/>
+                <a:ea typeface="Arial"/>
+                <a:cs typeface="Arial"/>
+              </a:rPr>
+              <a:t>Audit, captures and measured spans inspectable</a:t>
+            </a:r>
+          </a:p>
+        </p:txBody>
+      </p:sp>
+      <p:sp>
+        <p:nvSpPr>
+          <p:cNvPr id="4" name="text-51">
             <a:extLst xmlns:a="http://schemas.openxmlformats.org/drawingml/2006/main">
               <a:ext uri="{FF2B5EF4-FFF2-40B4-BE49-F238E27FC236}">
-                <a16:creationId xmlns:a16="http://schemas.microsoft.com/office/drawing/2014/main" id="{73E60E6A-CC32-403A-BF55-92CFA8D000AB}"/>
+                <a16:creationId xmlns:a16="http://schemas.microsoft.com/office/drawing/2014/main" id="{B2F8DE01-4DE5-4C7C-9667-0616690D177B}"/>
               </a:ext>
             </a:extLst>
           </p:cNvPr>
@@ -5723,8 +5927,8 @@
         </p:nvSpPr>
         <p:spPr>
           <a:xfrm xmlns:a="http://schemas.openxmlformats.org/drawingml/2006/main">
-            <a:off x="609600" y="4457700"/>
-            <a:ext cx="5391150" cy="1181100"/>
+            <a:off x="609600" y="4733925"/>
+            <a:ext cx="5410200" cy="723900"/>
           </a:xfrm>
           <a:prstGeom xmlns:a="http://schemas.openxmlformats.org/drawingml/2006/main" prst="rect">
             <a:avLst/>
@@ -5741,81 +5945,58 @@
           <a:lstStyle xmlns:a="http://schemas.openxmlformats.org/drawingml/2006/main"/>
           <a:p xmlns:a="http://schemas.openxmlformats.org/drawingml/2006/main">
             <a:pPr algn="l">
-              <a:defRPr sz="1800" b="1">
-                <a:solidFill>
-                  <a:srgbClr val="102D3C"/>
-                </a:solidFill>
-                <a:latin typeface="Arial"/>
-                <a:ea typeface="Arial"/>
-                <a:cs typeface="Arial"/>
-              </a:defRPr>
-            </a:pPr>
-            <a:r>
-              <a:rPr sz="1800" b="1">
-                <a:solidFill>
-                  <a:srgbClr val="102D3C"/>
-                </a:solidFill>
-                <a:latin typeface="Arial"/>
-                <a:ea typeface="Arial"/>
-                <a:cs typeface="Arial"/>
-              </a:rPr>
-              <a:t>24 proof + 16 walkthrough + 8 intention = 48</a:t>
-            </a:r>
-          </a:p>
-          <a:p xmlns:a="http://schemas.openxmlformats.org/drawingml/2006/main">
-            <a:pPr algn="l">
-              <a:defRPr sz="1800" b="1">
-                <a:solidFill>
-                  <a:srgbClr val="102D3C"/>
-                </a:solidFill>
-                <a:latin typeface="Arial"/>
-                <a:ea typeface="Arial"/>
-                <a:cs typeface="Arial"/>
-              </a:defRPr>
-            </a:pPr>
-            <a:r>
-              <a:rPr sz="1800" b="1">
-                <a:solidFill>
-                  <a:srgbClr val="102D3C"/>
-                </a:solidFill>
-                <a:latin typeface="Arial"/>
-                <a:ea typeface="Arial"/>
-                <a:cs typeface="Arial"/>
-              </a:rPr>
-              <a:t>Original combined 36 / 32 forecast exceeded</a:t>
-            </a:r>
-          </a:p>
-          <a:p xmlns:a="http://schemas.openxmlformats.org/drawingml/2006/main">
-            <a:pPr algn="l">
-              <a:defRPr sz="1800" b="1">
-                <a:solidFill>
-                  <a:srgbClr val="102D3C"/>
-                </a:solidFill>
-                <a:latin typeface="Arial"/>
-                <a:ea typeface="Arial"/>
-                <a:cs typeface="Arial"/>
-              </a:defRPr>
-            </a:pPr>
-            <a:r>
-              <a:rPr sz="1800" b="1">
-                <a:solidFill>
-                  <a:srgbClr val="102D3C"/>
-                </a:solidFill>
-                <a:latin typeface="Arial"/>
-                <a:ea typeface="Arial"/>
-                <a:cs typeface="Arial"/>
-              </a:rPr>
-              <a:t>Model inference: 15 of 48 charged wires</a:t>
-            </a:r>
-          </a:p>
-        </p:txBody>
-      </p:sp>
-      <p:sp>
-        <p:nvSpPr>
-          <p:cNvPr id="5" name="text-46">
+              <a:defRPr sz="1900" b="1">
+                <a:solidFill>
+                  <a:srgbClr val="102D3C"/>
+                </a:solidFill>
+                <a:latin typeface="Arial"/>
+                <a:ea typeface="Arial"/>
+                <a:cs typeface="Arial"/>
+              </a:defRPr>
+            </a:pPr>
+            <a:r>
+              <a:rPr sz="1900" b="1">
+                <a:solidFill>
+                  <a:srgbClr val="102D3C"/>
+                </a:solidFill>
+                <a:latin typeface="Arial"/>
+                <a:ea typeface="Arial"/>
+                <a:cs typeface="Arial"/>
+              </a:rPr>
+              <a:t>339/339 offline checks in supplied evidence</a:t>
+            </a:r>
+          </a:p>
+          <a:p xmlns:a="http://schemas.openxmlformats.org/drawingml/2006/main">
+            <a:pPr algn="l">
+              <a:defRPr sz="1900" b="1">
+                <a:solidFill>
+                  <a:srgbClr val="102D3C"/>
+                </a:solidFill>
+                <a:latin typeface="Arial"/>
+                <a:ea typeface="Arial"/>
+                <a:cs typeface="Arial"/>
+              </a:defRPr>
+            </a:pPr>
+            <a:r>
+              <a:rPr sz="1900" b="1">
+                <a:solidFill>
+                  <a:srgbClr val="102D3C"/>
+                </a:solidFill>
+                <a:latin typeface="Arial"/>
+                <a:ea typeface="Arial"/>
+                <a:cs typeface="Arial"/>
+              </a:rPr>
+              <a:t>Unknown dispatched work stays charged.</a:t>
+            </a:r>
+          </a:p>
+        </p:txBody>
+      </p:sp>
+      <p:sp>
+        <p:nvSpPr>
+          <p:cNvPr id="5" name="text-52">
             <a:extLst xmlns:a="http://schemas.openxmlformats.org/drawingml/2006/main">
               <a:ext uri="{FF2B5EF4-FFF2-40B4-BE49-F238E27FC236}">
-                <a16:creationId xmlns:a16="http://schemas.microsoft.com/office/drawing/2014/main" id="{F3521433-E0C5-45A7-A13D-98CE09643FA7}"/>
+                <a16:creationId xmlns:a16="http://schemas.microsoft.com/office/drawing/2014/main" id="{10A84E15-57CB-4107-9CFD-3DCAD2B338C4}"/>
               </a:ext>
             </a:extLst>
           </p:cNvPr>
@@ -5826,8 +6007,8 @@
         </p:nvSpPr>
         <p:spPr>
           <a:xfrm xmlns:a="http://schemas.openxmlformats.org/drawingml/2006/main">
-            <a:off x="609600" y="5686425"/>
-            <a:ext cx="5391150" cy="1000125"/>
+            <a:off x="609600" y="5743575"/>
+            <a:ext cx="5410200" cy="790575"/>
           </a:xfrm>
           <a:prstGeom xmlns:a="http://schemas.openxmlformats.org/drawingml/2006/main" prst="rect">
             <a:avLst/>
@@ -5862,7 +6043,7 @@
                 <a:ea typeface="Arial"/>
                 <a:cs typeface="Arial"/>
               </a:rPr>
-              <a:t>4 automated walkthroughs; no human rehearsal</a:t>
+              <a:t>Four automated walkthroughs; no human rehearsal</a:t>
             </a:r>
           </a:p>
           <a:p xmlns:a="http://schemas.openxmlformats.org/drawingml/2006/main">
@@ -5885,40 +6066,17 @@
                 <a:ea typeface="Arial"/>
                 <a:cs typeface="Arial"/>
               </a:rPr>
-              <a:t>48.93s backup: seven paced UI captures</a:t>
-            </a:r>
-          </a:p>
-          <a:p xmlns:a="http://schemas.openxmlformats.org/drawingml/2006/main">
-            <a:pPr algn="l">
-              <a:defRPr sz="1700" b="0">
-                <a:solidFill>
-                  <a:srgbClr val="465960"/>
-                </a:solidFill>
-                <a:latin typeface="Arial"/>
-                <a:ea typeface="Arial"/>
-                <a:cs typeface="Arial"/>
-              </a:defRPr>
-            </a:pPr>
-            <a:r>
-              <a:rPr sz="1700" b="0">
-                <a:solidFill>
-                  <a:srgbClr val="465960"/>
-                </a:solidFill>
-                <a:latin typeface="Arial"/>
-                <a:ea typeface="Arial"/>
-                <a:cs typeface="Arial"/>
-              </a:rPr>
-              <a:t>10 historical unknowns charged; tariff unpriced</a:t>
-            </a:r>
-          </a:p>
-        </p:txBody>
-      </p:sp>
-      <p:sp>
-        <p:nvSpPr>
-          <p:cNvPr id="6" name="text-47">
+              <a:t>Backup: seven paced historical UI captures</a:t>
+            </a:r>
+          </a:p>
+        </p:txBody>
+      </p:sp>
+      <p:sp>
+        <p:nvSpPr>
+          <p:cNvPr id="6" name="text-53">
             <a:extLst xmlns:a="http://schemas.openxmlformats.org/drawingml/2006/main">
               <a:ext uri="{FF2B5EF4-FFF2-40B4-BE49-F238E27FC236}">
-                <a16:creationId xmlns:a16="http://schemas.microsoft.com/office/drawing/2014/main" id="{6B2551A5-9AC8-492C-862C-A27EC46E9488}"/>
+                <a16:creationId xmlns:a16="http://schemas.microsoft.com/office/drawing/2014/main" id="{C566A640-B823-418E-BB78-33CF8817711D}"/>
               </a:ext>
             </a:extLst>
           </p:cNvPr>
@@ -5929,8 +6087,8 @@
         </p:nvSpPr>
         <p:spPr>
           <a:xfrm xmlns:a="http://schemas.openxmlformats.org/drawingml/2006/main">
-            <a:off x="6553200" y="1504950"/>
-            <a:ext cx="5029200" cy="438150"/>
+            <a:off x="6705600" y="1581150"/>
+            <a:ext cx="4876800" cy="438150"/>
           </a:xfrm>
           <a:prstGeom xmlns:a="http://schemas.openxmlformats.org/drawingml/2006/main" prst="rect">
             <a:avLst/>
@@ -5965,17 +6123,17 @@
                 <a:ea typeface="Arial"/>
                 <a:cs typeface="Arial"/>
               </a:rPr>
-              <a:t>Boundary and measurements</a:t>
-            </a:r>
-          </a:p>
-        </p:txBody>
-      </p:sp>
-      <p:sp>
-        <p:nvSpPr>
-          <p:cNvPr id="7" name="text-48">
+              <a:t>Material limits</a:t>
+            </a:r>
+          </a:p>
+        </p:txBody>
+      </p:sp>
+      <p:sp>
+        <p:nvSpPr>
+          <p:cNvPr id="7" name="text-54">
             <a:extLst xmlns:a="http://schemas.openxmlformats.org/drawingml/2006/main">
               <a:ext uri="{FF2B5EF4-FFF2-40B4-BE49-F238E27FC236}">
-                <a16:creationId xmlns:a16="http://schemas.microsoft.com/office/drawing/2014/main" id="{27327BF2-71DC-44A5-9395-E3519E6CAA9E}"/>
+                <a16:creationId xmlns:a16="http://schemas.microsoft.com/office/drawing/2014/main" id="{B75097BC-AB51-45A5-A103-F54D9F197D38}"/>
               </a:ext>
             </a:extLst>
           </p:cNvPr>
@@ -5986,8 +6144,8 @@
         </p:nvSpPr>
         <p:spPr>
           <a:xfrm xmlns:a="http://schemas.openxmlformats.org/drawingml/2006/main">
-            <a:off x="6553200" y="2143125"/>
-            <a:ext cx="5029200" cy="2219325"/>
+            <a:off x="6705600" y="2324100"/>
+            <a:ext cx="4876800" cy="2419350"/>
           </a:xfrm>
           <a:prstGeom xmlns:a="http://schemas.openxmlformats.org/drawingml/2006/main" prst="rect">
             <a:avLst/>
@@ -6022,7 +6180,7 @@
                 <a:ea typeface="Arial"/>
                 <a:cs typeface="Arial"/>
               </a:rPr>
-              <a:t>Synthetic data, owner-funded hosted AI</a:t>
+              <a:t>Synthetic data; trusted host and employee</a:t>
             </a:r>
           </a:p>
           <a:p xmlns:a="http://schemas.openxmlformats.org/drawingml/2006/main">
@@ -6045,7 +6203,7 @@
                 <a:ea typeface="Arial"/>
                 <a:cs typeface="Arial"/>
               </a:rPr>
-              <a:t>No demonstrated local LLM backend</a:t>
+              <a:t>Hosted-only AI; no demonstrated local LLM</a:t>
             </a:r>
           </a:p>
           <a:p xmlns:a="http://schemas.openxmlformats.org/drawingml/2006/main">
@@ -6068,7 +6226,7 @@
                 <a:ea typeface="Arial"/>
                 <a:cs typeface="Arial"/>
               </a:rPr>
-              <a:t>Trusted local host and employee</a:t>
+              <a:t>Peripheral ERP / email integrations mocked</a:t>
             </a:r>
           </a:p>
           <a:p xmlns:a="http://schemas.openxmlformats.org/drawingml/2006/main">
@@ -6091,7 +6249,7 @@
                 <a:ea typeface="Arial"/>
                 <a:cs typeface="Arial"/>
               </a:rPr>
-              <a:t>Potential savings, not achieved savings</a:t>
+              <a:t>Potential opportunity, not achieved savings</a:t>
             </a:r>
           </a:p>
           <a:p xmlns:a="http://schemas.openxmlformats.org/drawingml/2006/main">
@@ -6114,17 +6272,17 @@
                 <a:ea typeface="Arial"/>
                 <a:cs typeface="Arial"/>
               </a:rPr>
-              <a:t>No production or formal security proof</a:t>
-            </a:r>
-          </a:p>
-        </p:txBody>
-      </p:sp>
-      <p:sp>
-        <p:nvSpPr>
-          <p:cNvPr id="8" name="text-49">
+              <a:t>No universal security or confidentiality proof</a:t>
+            </a:r>
+          </a:p>
+        </p:txBody>
+      </p:sp>
+      <p:sp>
+        <p:nvSpPr>
+          <p:cNvPr id="8" name="text-55">
             <a:extLst xmlns:a="http://schemas.openxmlformats.org/drawingml/2006/main">
               <a:ext uri="{FF2B5EF4-FFF2-40B4-BE49-F238E27FC236}">
-                <a16:creationId xmlns:a16="http://schemas.microsoft.com/office/drawing/2014/main" id="{6214DA21-569D-495D-8135-9D2127619740}"/>
+                <a16:creationId xmlns:a16="http://schemas.microsoft.com/office/drawing/2014/main" id="{9B14D1FC-E3C0-4DF1-9D59-4B942774676B}"/>
               </a:ext>
             </a:extLst>
           </p:cNvPr>
@@ -6135,8 +6293,8 @@
         </p:nvSpPr>
         <p:spPr>
           <a:xfrm xmlns:a="http://schemas.openxmlformats.org/drawingml/2006/main">
-            <a:off x="6553200" y="4648200"/>
-            <a:ext cx="5029200" cy="723900"/>
+            <a:off x="6705600" y="5257800"/>
+            <a:ext cx="4876800" cy="1285875"/>
           </a:xfrm>
           <a:prstGeom xmlns:a="http://schemas.openxmlformats.org/drawingml/2006/main" prst="rect">
             <a:avLst/>
@@ -6153,64 +6311,7 @@
           <a:lstStyle xmlns:a="http://schemas.openxmlformats.org/drawingml/2006/main"/>
           <a:p xmlns:a="http://schemas.openxmlformats.org/drawingml/2006/main">
             <a:pPr algn="l">
-              <a:defRPr sz="1800" b="1">
-                <a:solidFill>
-                  <a:srgbClr val="102D3C"/>
-                </a:solidFill>
-                <a:latin typeface="Arial"/>
-                <a:ea typeface="Arial"/>
-                <a:cs typeface="Arial"/>
-              </a:defRPr>
-            </a:pPr>
-            <a:r>
-              <a:rPr sz="1800" b="1">
-                <a:solidFill>
-                  <a:srgbClr val="102D3C"/>
-                </a:solidFill>
-                <a:latin typeface="Arial"/>
-                <a:ea typeface="Arial"/>
-                <a:cs typeface="Arial"/>
-              </a:rPr>
-              <a:t>339/339 offline runner checks pass</a:t>
-            </a:r>
-          </a:p>
-        </p:txBody>
-      </p:sp>
-      <p:sp>
-        <p:nvSpPr>
-          <p:cNvPr id="9" name="text-50">
-            <a:extLst xmlns:a="http://schemas.openxmlformats.org/drawingml/2006/main">
-              <a:ext uri="{FF2B5EF4-FFF2-40B4-BE49-F238E27FC236}">
-                <a16:creationId xmlns:a16="http://schemas.microsoft.com/office/drawing/2014/main" id="{E615D3ED-E207-42A7-B3E4-6D7096B86C46}"/>
-              </a:ext>
-            </a:extLst>
-          </p:cNvPr>
-          <p:cNvSpPr>
-            <a:spLocks xmlns:a="http://schemas.openxmlformats.org/drawingml/2006/main" noGrp="1"/>
-          </p:cNvSpPr>
-          <p:nvPr/>
-        </p:nvSpPr>
-        <p:spPr>
-          <a:xfrm xmlns:a="http://schemas.openxmlformats.org/drawingml/2006/main">
-            <a:off x="6553200" y="5562600"/>
-            <a:ext cx="5029200" cy="1009650"/>
-          </a:xfrm>
-          <a:prstGeom xmlns:a="http://schemas.openxmlformats.org/drawingml/2006/main" prst="rect">
-            <a:avLst/>
-          </a:prstGeom>
-          <a:noFill xmlns:a="http://schemas.openxmlformats.org/drawingml/2006/main"/>
-          <a:ln xmlns:a="http://schemas.openxmlformats.org/drawingml/2006/main" w="0">
-            <a:noFill/>
-          </a:ln>
-        </p:spPr>
-        <p:txBody>
-          <a:bodyPr xmlns:a="http://schemas.openxmlformats.org/drawingml/2006/main" wrap="square" lIns="0" tIns="0" rIns="0" bIns="0" anchor="t">
-            <a:noAutofit/>
-          </a:bodyPr>
-          <a:lstStyle xmlns:a="http://schemas.openxmlformats.org/drawingml/2006/main"/>
-          <a:p xmlns:a="http://schemas.openxmlformats.org/drawingml/2006/main">
-            <a:pPr algn="l">
-              <a:defRPr sz="1700" b="0">
+              <a:defRPr sz="1800" b="0">
                 <a:solidFill>
                   <a:srgbClr val="465960"/>
                 </a:solidFill>
@@ -6220,7 +6321,7 @@
               </a:defRPr>
             </a:pPr>
             <a:r>
-              <a:rPr sz="1700" b="0">
+              <a:rPr sz="1800" b="0">
                 <a:solidFill>
                   <a:srgbClr val="465960"/>
                 </a:solidFill>
@@ -6228,12 +6329,12 @@
                 <a:ea typeface="Arial"/>
                 <a:cs typeface="Arial"/>
               </a:rPr>
-              <a:t>One actual composition: 3.66s overall</a:t>
-            </a:r>
-          </a:p>
-          <a:p xmlns:a="http://schemas.openxmlformats.org/drawingml/2006/main">
-            <a:pPr algn="l">
-              <a:defRPr sz="1700" b="0">
+              <a:t>Historical injection on/off test:</a:t>
+            </a:r>
+          </a:p>
+          <a:p xmlns:a="http://schemas.openxmlformats.org/drawingml/2006/main">
+            <a:pPr algn="l">
+              <a:defRPr sz="1800" b="0">
                 <a:solidFill>
                   <a:srgbClr val="465960"/>
                 </a:solidFill>
@@ -6243,7 +6344,7 @@
               </a:defRPr>
             </a:pPr>
             <a:r>
-              <a:rPr sz="1700" b="0">
+              <a:rPr sz="1800" b="0">
                 <a:solidFill>
                   <a:srgbClr val="465960"/>
                 </a:solidFill>
@@ -6251,12 +6352,12 @@
                 <a:ea typeface="Arial"/>
                 <a:cs typeface="Arial"/>
               </a:rPr>
-              <a:t>Hosted spans: 3.65s, local: 1.61ms</a:t>
-            </a:r>
-          </a:p>
-          <a:p xmlns:a="http://schemas.openxmlformats.org/drawingml/2006/main">
-            <a:pPr algn="l">
-              <a:defRPr sz="1700" b="0">
+              <a:t>no causal protection gain established.</a:t>
+            </a:r>
+          </a:p>
+          <a:p xmlns:a="http://schemas.openxmlformats.org/drawingml/2006/main">
+            <a:pPr algn="l">
+              <a:defRPr sz="1800" b="0">
                 <a:solidFill>
                   <a:srgbClr val="465960"/>
                 </a:solidFill>
@@ -6266,7 +6367,7 @@
               </a:defRPr>
             </a:pPr>
             <a:r>
-              <a:rPr sz="1700" b="0">
+              <a:rPr sz="1800" b="0">
                 <a:solidFill>
                   <a:srgbClr val="465960"/>
                 </a:solidFill>
@@ -6274,7 +6375,7 @@
                 <a:ea typeface="Arial"/>
                 <a:cs typeface="Arial"/>
               </a:rPr>
-              <a:t>MCP save call: 10.95ms, separate</a:t>
+              <a:t>Forecast overrun remains in notes and evidence.</a:t>
             </a:r>
           </a:p>
         </p:txBody>
@@ -6282,7 +6383,7 @@
     </p:spTree>
     <p:extLst>
       <p:ext uri="{BB962C8B-B14F-4D97-AF65-F5344CB8AC3E}">
-        <p14:creationId xmlns:p14="http://schemas.microsoft.com/office/powerpoint/2010/main" val="1316509082"/>
+        <p14:creationId xmlns:p14="http://schemas.microsoft.com/office/powerpoint/2010/main" val="28184113"/>
       </p:ext>
     </p:extLst>
   </p:cSld>
@@ -6310,10 +6411,10 @@
       </p:grpSpPr>
       <p:sp>
         <p:nvSpPr>
-          <p:cNvPr id="5" name="text-51">
+          <p:cNvPr id="5" name="text-56">
             <a:extLst xmlns:a="http://schemas.openxmlformats.org/drawingml/2006/main">
               <a:ext uri="{FF2B5EF4-FFF2-40B4-BE49-F238E27FC236}">
-                <a16:creationId xmlns:a16="http://schemas.microsoft.com/office/drawing/2014/main" id="{DFC00C01-96DA-4E71-B524-8F4D25744A29}"/>
+                <a16:creationId xmlns:a16="http://schemas.microsoft.com/office/drawing/2014/main" id="{B2FAE18C-F2ED-4297-A09B-5B752E66B29A}"/>
               </a:ext>
             </a:extLst>
           </p:cNvPr>
@@ -6360,7 +6461,7 @@
                 <a:ea typeface="Arial"/>
                 <a:cs typeface="Arial"/>
               </a:rPr>
-              <a:t>AI supplies the method.</a:t>
+              <a:t>Choose suppliers.</a:t>
             </a:r>
           </a:p>
           <a:p xmlns:a="http://schemas.openxmlformats.org/drawingml/2006/main">
@@ -6383,17 +6484,17 @@
                 <a:ea typeface="Arial"/>
                 <a:cs typeface="Arial"/>
               </a:rPr>
-              <a:t>The company keeps its know-how.</a:t>
-            </a:r>
-          </a:p>
-        </p:txBody>
-      </p:sp>
-      <p:sp>
-        <p:nvSpPr>
-          <p:cNvPr id="2" name="text-52">
+              <a:t>Prepare a useful negotiation brief.</a:t>
+            </a:r>
+          </a:p>
+        </p:txBody>
+      </p:sp>
+      <p:sp>
+        <p:nvSpPr>
+          <p:cNvPr id="2" name="text-57">
             <a:extLst xmlns:a="http://schemas.openxmlformats.org/drawingml/2006/main">
               <a:ext uri="{FF2B5EF4-FFF2-40B4-BE49-F238E27FC236}">
-                <a16:creationId xmlns:a16="http://schemas.microsoft.com/office/drawing/2014/main" id="{9F3BDDDF-BD20-49B3-9F72-5C037C1E9270}"/>
+                <a16:creationId xmlns:a16="http://schemas.microsoft.com/office/drawing/2014/main" id="{66A98DAA-2F15-4C37-B466-F7D95FAFD4E4}"/>
               </a:ext>
             </a:extLst>
           </p:cNvPr>
@@ -6440,7 +6541,7 @@
                 <a:ea typeface="Arial"/>
                 <a:cs typeface="Arial"/>
               </a:rPr>
-              <a:t>A judge can change a private quote or rule</a:t>
+              <a:t>AI composes the approved method.</a:t>
             </a:r>
           </a:p>
           <a:p xmlns:a="http://schemas.openxmlformats.org/drawingml/2006/main">
@@ -6463,17 +6564,17 @@
                 <a:ea typeface="Arial"/>
                 <a:cs typeface="Arial"/>
               </a:rPr>
-              <a:t>and inspect the useful result.</a:t>
-            </a:r>
-          </a:p>
-        </p:txBody>
-      </p:sp>
-      <p:sp>
-        <p:nvSpPr>
-          <p:cNvPr id="3" name="text-53">
+              <a:t>Company facts and rules determine the result.</a:t>
+            </a:r>
+          </a:p>
+        </p:txBody>
+      </p:sp>
+      <p:sp>
+        <p:nvSpPr>
+          <p:cNvPr id="3" name="text-58">
             <a:extLst xmlns:a="http://schemas.openxmlformats.org/drawingml/2006/main">
               <a:ext uri="{FF2B5EF4-FFF2-40B4-BE49-F238E27FC236}">
-                <a16:creationId xmlns:a16="http://schemas.microsoft.com/office/drawing/2014/main" id="{97824690-090E-4852-97F4-5105A064F62E}"/>
+                <a16:creationId xmlns:a16="http://schemas.microsoft.com/office/drawing/2014/main" id="{9C752093-1693-477A-B06E-B5055935BC5F}"/>
               </a:ext>
             </a:extLst>
           </p:cNvPr>
@@ -6520,17 +6621,17 @@
                 <a:ea typeface="Arial"/>
                 <a:cs typeface="Arial"/>
               </a:rPr>
-              <a:t>ProofGate</a:t>
-            </a:r>
-          </a:p>
-        </p:txBody>
-      </p:sp>
-      <p:sp>
-        <p:nvSpPr>
-          <p:cNvPr id="4" name="text-54">
+              <a:t>ProofGate: Public Plans, Private Results</a:t>
+            </a:r>
+          </a:p>
+        </p:txBody>
+      </p:sp>
+      <p:sp>
+        <p:nvSpPr>
+          <p:cNvPr id="4" name="text-59">
             <a:extLst xmlns:a="http://schemas.openxmlformats.org/drawingml/2006/main">
               <a:ext uri="{FF2B5EF4-FFF2-40B4-BE49-F238E27FC236}">
-                <a16:creationId xmlns:a16="http://schemas.microsoft.com/office/drawing/2014/main" id="{A0C9B140-1CF4-46E2-B51E-5C711ECC8680}"/>
+                <a16:creationId xmlns:a16="http://schemas.microsoft.com/office/drawing/2014/main" id="{32AB9294-2A90-4F3D-BE94-5B7A40EF1ACA}"/>
               </a:ext>
             </a:extLst>
           </p:cNvPr>
@@ -6608,7 +6709,7 @@
     </p:spTree>
     <p:extLst>
       <p:ext uri="{BB962C8B-B14F-4D97-AF65-F5344CB8AC3E}">
-        <p14:creationId xmlns:p14="http://schemas.microsoft.com/office/powerpoint/2010/main" val="1499920466"/>
+        <p14:creationId xmlns:p14="http://schemas.microsoft.com/office/powerpoint/2010/main" val="1111055935"/>
       </p:ext>
     </p:extLst>
   </p:cSld>

--- a/submission/presentation.pptx
+++ b/submission/presentation.pptx
@@ -2,21 +2,21 @@
 <file path=ppt/presentation.xml><?xml version="1.0" encoding="utf-8"?>
 <p:presentation xmlns:p="http://schemas.openxmlformats.org/presentationml/2006/main">
   <p:sldMasterIdLst>
-    <p:sldMasterId xmlns:r="http://schemas.openxmlformats.org/officeDocument/2006/relationships" id="2147483648" r:id="R29cbc556ff4244a3"/>
+    <p:sldMasterId xmlns:r="http://schemas.openxmlformats.org/officeDocument/2006/relationships" id="2147483648" r:id="Rb94c4d7dd7df49ca"/>
   </p:sldMasterIdLst>
   <p:notesMasterIdLst>
-    <p:notesMasterId xmlns:r="http://schemas.openxmlformats.org/officeDocument/2006/relationships" r:id="Rf355fcba1afe4bb2"/>
+    <p:notesMasterId xmlns:r="http://schemas.openxmlformats.org/officeDocument/2006/relationships" r:id="R7be97486b9ba4e39"/>
   </p:notesMasterIdLst>
   <p:sldIdLst>
-    <p:sldId xmlns:r="http://schemas.openxmlformats.org/officeDocument/2006/relationships" id="256" r:id="R20bffb519943451b"/>
-    <p:sldId xmlns:r="http://schemas.openxmlformats.org/officeDocument/2006/relationships" id="257" r:id="R2901d2a6da4144ae"/>
-    <p:sldId xmlns:r="http://schemas.openxmlformats.org/officeDocument/2006/relationships" id="258" r:id="Rb764db69f2504d2e"/>
-    <p:sldId xmlns:r="http://schemas.openxmlformats.org/officeDocument/2006/relationships" id="259" r:id="Rfee9853983fc4a07"/>
-    <p:sldId xmlns:r="http://schemas.openxmlformats.org/officeDocument/2006/relationships" id="260" r:id="Rca2e54c67ae7499a"/>
-    <p:sldId xmlns:r="http://schemas.openxmlformats.org/officeDocument/2006/relationships" id="261" r:id="Rafc00de50f77470d"/>
-    <p:sldId xmlns:r="http://schemas.openxmlformats.org/officeDocument/2006/relationships" id="262" r:id="R9d5e629144c94608"/>
-    <p:sldId xmlns:r="http://schemas.openxmlformats.org/officeDocument/2006/relationships" id="263" r:id="Ra503c51748a74842"/>
-    <p:sldId xmlns:r="http://schemas.openxmlformats.org/officeDocument/2006/relationships" id="264" r:id="Rb815466139234912"/>
+    <p:sldId xmlns:r="http://schemas.openxmlformats.org/officeDocument/2006/relationships" id="256" r:id="Rcc4cd8d915054199"/>
+    <p:sldId xmlns:r="http://schemas.openxmlformats.org/officeDocument/2006/relationships" id="257" r:id="R997d5ca7c73449f3"/>
+    <p:sldId xmlns:r="http://schemas.openxmlformats.org/officeDocument/2006/relationships" id="258" r:id="Ra9e6a1a03fef4ab3"/>
+    <p:sldId xmlns:r="http://schemas.openxmlformats.org/officeDocument/2006/relationships" id="259" r:id="R9ffe863e3bf34f93"/>
+    <p:sldId xmlns:r="http://schemas.openxmlformats.org/officeDocument/2006/relationships" id="260" r:id="R7120b3c9465c45a1"/>
+    <p:sldId xmlns:r="http://schemas.openxmlformats.org/officeDocument/2006/relationships" id="261" r:id="R1c2bf52b6ef0447e"/>
+    <p:sldId xmlns:r="http://schemas.openxmlformats.org/officeDocument/2006/relationships" id="262" r:id="Rff9dffdf4f8a4ef1"/>
+    <p:sldId xmlns:r="http://schemas.openxmlformats.org/officeDocument/2006/relationships" id="263" r:id="R936ade4290124cf7"/>
+    <p:sldId xmlns:r="http://schemas.openxmlformats.org/officeDocument/2006/relationships" id="264" r:id="Rce5f192fe1394479"/>
   </p:sldIdLst>
   <p:sldSz cx="12192000" cy="6858000"/>
   <p:notesSz cx="6858000" cy="9144000"/>
@@ -465,7 +465,7 @@
           </a:p>
           <a:p xmlns:a="http://schemas.openxmlformats.org/drawingml/2006/main">
             <a:r>
-              <a:t>Retained original proof date: 2026-10-04T01:29:53.383Z. Retained intention proof date: 2026-10-04T02:07:09.266Z. Browser capture date: 2026-10-04T07:54:36.814Z. Source revision: 44c57cde5aeab97ff9bd1eaef20bbde4221b10a3. Capture scope: Current judge-story UI rendering of a consistent SQLite snapshot of the retained actual hosted run360c040e-16a1-4f81-ac76-1e1ec4ef6195. Authenticated GET-only loopback capture; model generation disabled, non-GET host routes rejected. No new inference, rebind or save. Previous public-input/control screenshots and actual composition/backup retain original dates; deployment UI banner is concurrently owned..</a:t>
+              <a:t>Retained original proof date: 2026-10-04T01:29:53.383Z. Retained intention proof date: 2026-10-04T02:07:09.266Z. Browser capture date: 2026-10-04T07:54:36.814Z. Source revision: f1565c23ff185cb87587c6108be96dbec243b5ce. Capture scope: Current judge-story UI rendering of a consistent SQLite snapshot of the retained actual hosted run360c040e-16a1-4f81-ac76-1e1ec4ef6195. Authenticated GET-only loopback capture; model generation disabled, non-GET host routes rejected. No new inference, rebind or save. Previous public-input/control screenshots and actual composition/backup retain original dates; deployment UI banner is concurrently owned.; README-only documentary rebind to this revision; UI bytes identical to44c; no new capture/inference/rebind/save.</a:t>
             </a:r>
           </a:p>
           <a:p xmlns:a="http://schemas.openxmlformats.org/drawingml/2006/main">
@@ -555,7 +555,7 @@
           </a:p>
           <a:p xmlns:a="http://schemas.openxmlformats.org/drawingml/2006/main">
             <a:r>
-              <a:t>Retained original proof date: 2026-10-04T01:29:53.383Z. Retained intention proof date: 2026-10-04T02:07:09.266Z. Browser capture date: 2026-10-04T07:54:36.814Z. Source revision: 44c57cde5aeab97ff9bd1eaef20bbde4221b10a3. Capture scope: Current judge-story UI rendering of a consistent SQLite snapshot of the retained actual hosted run360c040e-16a1-4f81-ac76-1e1ec4ef6195. Authenticated GET-only loopback capture; model generation disabled, non-GET host routes rejected. No new inference, rebind or save. Previous public-input/control screenshots and actual composition/backup retain original dates; deployment UI banner is concurrently owned..</a:t>
+              <a:t>Retained original proof date: 2026-10-04T01:29:53.383Z. Retained intention proof date: 2026-10-04T02:07:09.266Z. Browser capture date: 2026-10-04T07:54:36.814Z. Source revision: f1565c23ff185cb87587c6108be96dbec243b5ce. Capture scope: Current judge-story UI rendering of a consistent SQLite snapshot of the retained actual hosted run360c040e-16a1-4f81-ac76-1e1ec4ef6195. Authenticated GET-only loopback capture; model generation disabled, non-GET host routes rejected. No new inference, rebind or save. Previous public-input/control screenshots and actual composition/backup retain original dates; deployment UI banner is concurrently owned.; README-only documentary rebind to this revision; UI bytes identical to44c; no new capture/inference/rebind/save.</a:t>
             </a:r>
           </a:p>
           <a:p xmlns:a="http://schemas.openxmlformats.org/drawingml/2006/main">
@@ -645,7 +645,7 @@
           </a:p>
           <a:p xmlns:a="http://schemas.openxmlformats.org/drawingml/2006/main">
             <a:r>
-              <a:t>Retained original proof date: 2026-10-04T01:29:53.383Z. Retained intention proof date: 2026-10-04T02:07:09.266Z. Browser capture date: 2026-10-04T07:54:36.814Z. Source revision: 44c57cde5aeab97ff9bd1eaef20bbde4221b10a3. Capture scope: Current judge-story UI rendering of a consistent SQLite snapshot of the retained actual hosted run360c040e-16a1-4f81-ac76-1e1ec4ef6195. Authenticated GET-only loopback capture; model generation disabled, non-GET host routes rejected. No new inference, rebind or save. Previous public-input/control screenshots and actual composition/backup retain original dates; deployment UI banner is concurrently owned..</a:t>
+              <a:t>Retained original proof date: 2026-10-04T01:29:53.383Z. Retained intention proof date: 2026-10-04T02:07:09.266Z. Browser capture date: 2026-10-04T07:54:36.814Z. Source revision: f1565c23ff185cb87587c6108be96dbec243b5ce. Capture scope: Current judge-story UI rendering of a consistent SQLite snapshot of the retained actual hosted run360c040e-16a1-4f81-ac76-1e1ec4ef6195. Authenticated GET-only loopback capture; model generation disabled, non-GET host routes rejected. No new inference, rebind or save. Previous public-input/control screenshots and actual composition/backup retain original dates; deployment UI banner is concurrently owned.; README-only documentary rebind to this revision; UI bytes identical to44c; no new capture/inference/rebind/save.</a:t>
             </a:r>
           </a:p>
           <a:p xmlns:a="http://schemas.openxmlformats.org/drawingml/2006/main">
@@ -735,7 +735,7 @@
           </a:p>
           <a:p xmlns:a="http://schemas.openxmlformats.org/drawingml/2006/main">
             <a:r>
-              <a:t>Retained original proof date: 2026-10-04T01:29:53.383Z. Retained intention proof date: 2026-10-04T02:07:09.266Z. Browser capture date: 2026-10-04T07:54:36.814Z. Source revision: 44c57cde5aeab97ff9bd1eaef20bbde4221b10a3. Capture scope: Current judge-story UI rendering of a consistent SQLite snapshot of the retained actual hosted run360c040e-16a1-4f81-ac76-1e1ec4ef6195. Authenticated GET-only loopback capture; model generation disabled, non-GET host routes rejected. No new inference, rebind or save. Previous public-input/control screenshots and actual composition/backup retain original dates; deployment UI banner is concurrently owned..</a:t>
+              <a:t>Retained original proof date: 2026-10-04T01:29:53.383Z. Retained intention proof date: 2026-10-04T02:07:09.266Z. Browser capture date: 2026-10-04T07:54:36.814Z. Source revision: f1565c23ff185cb87587c6108be96dbec243b5ce. Capture scope: Current judge-story UI rendering of a consistent SQLite snapshot of the retained actual hosted run360c040e-16a1-4f81-ac76-1e1ec4ef6195. Authenticated GET-only loopback capture; model generation disabled, non-GET host routes rejected. No new inference, rebind or save. Previous public-input/control screenshots and actual composition/backup retain original dates; deployment UI banner is concurrently owned.; README-only documentary rebind to this revision; UI bytes identical to44c; no new capture/inference/rebind/save.</a:t>
             </a:r>
           </a:p>
           <a:p xmlns:a="http://schemas.openxmlformats.org/drawingml/2006/main">
@@ -825,7 +825,7 @@
           </a:p>
           <a:p xmlns:a="http://schemas.openxmlformats.org/drawingml/2006/main">
             <a:r>
-              <a:t>Retained original proof date: 2026-10-04T01:29:53.383Z. Retained intention proof date: 2026-10-04T02:07:09.266Z. Browser capture date: 2026-10-04T07:54:36.814Z. Source revision: 44c57cde5aeab97ff9bd1eaef20bbde4221b10a3. Capture scope: Current judge-story UI rendering of a consistent SQLite snapshot of the retained actual hosted run360c040e-16a1-4f81-ac76-1e1ec4ef6195. Authenticated GET-only loopback capture; model generation disabled, non-GET host routes rejected. No new inference, rebind or save. Previous public-input/control screenshots and actual composition/backup retain original dates; deployment UI banner is concurrently owned..</a:t>
+              <a:t>Retained original proof date: 2026-10-04T01:29:53.383Z. Retained intention proof date: 2026-10-04T02:07:09.266Z. Browser capture date: 2026-10-04T07:54:36.814Z. Source revision: f1565c23ff185cb87587c6108be96dbec243b5ce. Capture scope: Current judge-story UI rendering of a consistent SQLite snapshot of the retained actual hosted run360c040e-16a1-4f81-ac76-1e1ec4ef6195. Authenticated GET-only loopback capture; model generation disabled, non-GET host routes rejected. No new inference, rebind or save. Previous public-input/control screenshots and actual composition/backup retain original dates; deployment UI banner is concurrently owned.; README-only documentary rebind to this revision; UI bytes identical to44c; no new capture/inference/rebind/save.</a:t>
             </a:r>
           </a:p>
           <a:p xmlns:a="http://schemas.openxmlformats.org/drawingml/2006/main">
@@ -915,7 +915,7 @@
           </a:p>
           <a:p xmlns:a="http://schemas.openxmlformats.org/drawingml/2006/main">
             <a:r>
-              <a:t>Retained original proof date: 2026-10-04T01:29:53.383Z. Retained intention proof date: 2026-10-04T02:07:09.266Z. Browser capture date: 2026-10-04T07:54:36.814Z. Source revision: 44c57cde5aeab97ff9bd1eaef20bbde4221b10a3. Capture scope: Current judge-story UI rendering of a consistent SQLite snapshot of the retained actual hosted run360c040e-16a1-4f81-ac76-1e1ec4ef6195. Authenticated GET-only loopback capture; model generation disabled, non-GET host routes rejected. No new inference, rebind or save. Previous public-input/control screenshots and actual composition/backup retain original dates; deployment UI banner is concurrently owned..</a:t>
+              <a:t>Retained original proof date: 2026-10-04T01:29:53.383Z. Retained intention proof date: 2026-10-04T02:07:09.266Z. Browser capture date: 2026-10-04T07:54:36.814Z. Source revision: f1565c23ff185cb87587c6108be96dbec243b5ce. Capture scope: Current judge-story UI rendering of a consistent SQLite snapshot of the retained actual hosted run360c040e-16a1-4f81-ac76-1e1ec4ef6195. Authenticated GET-only loopback capture; model generation disabled, non-GET host routes rejected. No new inference, rebind or save. Previous public-input/control screenshots and actual composition/backup retain original dates; deployment UI banner is concurrently owned.; README-only documentary rebind to this revision; UI bytes identical to44c; no new capture/inference/rebind/save.</a:t>
             </a:r>
           </a:p>
           <a:p xmlns:a="http://schemas.openxmlformats.org/drawingml/2006/main">
@@ -1005,7 +1005,7 @@
           </a:p>
           <a:p xmlns:a="http://schemas.openxmlformats.org/drawingml/2006/main">
             <a:r>
-              <a:t>Retained original proof date: 2026-10-04T01:29:53.383Z. Retained intention proof date: 2026-10-04T02:07:09.266Z. Browser capture date: 2026-10-04T07:54:36.814Z. Source revision: 44c57cde5aeab97ff9bd1eaef20bbde4221b10a3. Capture scope: Current judge-story UI rendering of a consistent SQLite snapshot of the retained actual hosted run360c040e-16a1-4f81-ac76-1e1ec4ef6195. Authenticated GET-only loopback capture; model generation disabled, non-GET host routes rejected. No new inference, rebind or save. Previous public-input/control screenshots and actual composition/backup retain original dates; deployment UI banner is concurrently owned..</a:t>
+              <a:t>Retained original proof date: 2026-10-04T01:29:53.383Z. Retained intention proof date: 2026-10-04T02:07:09.266Z. Browser capture date: 2026-10-04T07:54:36.814Z. Source revision: f1565c23ff185cb87587c6108be96dbec243b5ce. Capture scope: Current judge-story UI rendering of a consistent SQLite snapshot of the retained actual hosted run360c040e-16a1-4f81-ac76-1e1ec4ef6195. Authenticated GET-only loopback capture; model generation disabled, non-GET host routes rejected. No new inference, rebind or save. Previous public-input/control screenshots and actual composition/backup retain original dates; deployment UI banner is concurrently owned.; README-only documentary rebind to this revision; UI bytes identical to44c; no new capture/inference/rebind/save.</a:t>
             </a:r>
           </a:p>
           <a:p xmlns:a="http://schemas.openxmlformats.org/drawingml/2006/main">
@@ -1095,7 +1095,7 @@
           </a:p>
           <a:p xmlns:a="http://schemas.openxmlformats.org/drawingml/2006/main">
             <a:r>
-              <a:t>Retained original proof date: 2026-10-04T01:29:53.383Z. Retained intention proof date: 2026-10-04T02:07:09.266Z. Browser capture date: 2026-10-04T07:54:36.814Z. Source revision: 44c57cde5aeab97ff9bd1eaef20bbde4221b10a3. Capture scope: Current judge-story UI rendering of a consistent SQLite snapshot of the retained actual hosted run360c040e-16a1-4f81-ac76-1e1ec4ef6195. Authenticated GET-only loopback capture; model generation disabled, non-GET host routes rejected. No new inference, rebind or save. Previous public-input/control screenshots and actual composition/backup retain original dates; deployment UI banner is concurrently owned..</a:t>
+              <a:t>Retained original proof date: 2026-10-04T01:29:53.383Z. Retained intention proof date: 2026-10-04T02:07:09.266Z. Browser capture date: 2026-10-04T07:54:36.814Z. Source revision: f1565c23ff185cb87587c6108be96dbec243b5ce. Capture scope: Current judge-story UI rendering of a consistent SQLite snapshot of the retained actual hosted run360c040e-16a1-4f81-ac76-1e1ec4ef6195. Authenticated GET-only loopback capture; model generation disabled, non-GET host routes rejected. No new inference, rebind or save. Previous public-input/control screenshots and actual composition/backup retain original dates; deployment UI banner is concurrently owned.; README-only documentary rebind to this revision; UI bytes identical to44c; no new capture/inference/rebind/save.</a:t>
             </a:r>
           </a:p>
           <a:p xmlns:a="http://schemas.openxmlformats.org/drawingml/2006/main">
@@ -1185,7 +1185,7 @@
           </a:p>
           <a:p xmlns:a="http://schemas.openxmlformats.org/drawingml/2006/main">
             <a:r>
-              <a:t>Retained original proof date: 2026-10-04T01:29:53.383Z. Retained intention proof date: 2026-10-04T02:07:09.266Z. Browser capture date: 2026-10-04T07:54:36.814Z. Source revision: 44c57cde5aeab97ff9bd1eaef20bbde4221b10a3. Capture scope: Current judge-story UI rendering of a consistent SQLite snapshot of the retained actual hosted run360c040e-16a1-4f81-ac76-1e1ec4ef6195. Authenticated GET-only loopback capture; model generation disabled, non-GET host routes rejected. No new inference, rebind or save. Previous public-input/control screenshots and actual composition/backup retain original dates; deployment UI banner is concurrently owned..</a:t>
+              <a:t>Retained original proof date: 2026-10-04T01:29:53.383Z. Retained intention proof date: 2026-10-04T02:07:09.266Z. Browser capture date: 2026-10-04T07:54:36.814Z. Source revision: f1565c23ff185cb87587c6108be96dbec243b5ce. Capture scope: Current judge-story UI rendering of a consistent SQLite snapshot of the retained actual hosted run360c040e-16a1-4f81-ac76-1e1ec4ef6195. Authenticated GET-only loopback capture; model generation disabled, non-GET host routes rejected. No new inference, rebind or save. Previous public-input/control screenshots and actual composition/backup retain original dates; deployment UI banner is concurrently owned.; README-only documentary rebind to this revision; UI bytes identical to44c; no new capture/inference/rebind/save.</a:t>
             </a:r>
           </a:p>
           <a:p xmlns:a="http://schemas.openxmlformats.org/drawingml/2006/main">
@@ -1258,7 +1258,7 @@
   </p:cSld>
   <p:clrMap bg1="lt1" tx1="dk1" bg2="lt2" tx2="dk2" accent1="accent1" accent2="accent2" accent3="accent3" accent4="accent4" accent5="accent5" accent6="accent6" hlink="hlink" folHlink="folHlink"/>
   <p:sldLayoutIdLst>
-    <p:sldLayoutId xmlns:r="http://schemas.openxmlformats.org/officeDocument/2006/relationships" id="2147483649" r:id="R13d7497a580b4e59"/>
+    <p:sldLayoutId xmlns:r="http://schemas.openxmlformats.org/officeDocument/2006/relationships" id="2147483649" r:id="R20feae0d4c504136"/>
   </p:sldLayoutIdLst>
   <p:txStyles>
     <p:titleStyle>
@@ -1809,7 +1809,7 @@
           <p:cNvPr id="4" name="text-1">
             <a:extLst xmlns:a="http://schemas.openxmlformats.org/drawingml/2006/main">
               <a:ext uri="{FF2B5EF4-FFF2-40B4-BE49-F238E27FC236}">
-                <a16:creationId xmlns:a16="http://schemas.microsoft.com/office/drawing/2014/main" id="{6D5366C5-3877-41AC-9E11-02321C9EA115}"/>
+                <a16:creationId xmlns:a16="http://schemas.microsoft.com/office/drawing/2014/main" id="{F11DDF49-0800-4382-8695-8F0A36D34AB1}"/>
               </a:ext>
             </a:extLst>
           </p:cNvPr>
@@ -1866,7 +1866,7 @@
           <p:cNvPr id="2" name="text-2">
             <a:extLst xmlns:a="http://schemas.openxmlformats.org/drawingml/2006/main">
               <a:ext uri="{FF2B5EF4-FFF2-40B4-BE49-F238E27FC236}">
-                <a16:creationId xmlns:a16="http://schemas.microsoft.com/office/drawing/2014/main" id="{967E6AD5-FB72-4DDF-9010-6896F12F96ED}"/>
+                <a16:creationId xmlns:a16="http://schemas.microsoft.com/office/drawing/2014/main" id="{3A2D2521-5FC8-42AF-AB3D-2BA80AF398B1}"/>
               </a:ext>
             </a:extLst>
           </p:cNvPr>
@@ -1946,7 +1946,7 @@
           <p:cNvPr id="3" name="text-3">
             <a:extLst xmlns:a="http://schemas.openxmlformats.org/drawingml/2006/main">
               <a:ext uri="{FF2B5EF4-FFF2-40B4-BE49-F238E27FC236}">
-                <a16:creationId xmlns:a16="http://schemas.microsoft.com/office/drawing/2014/main" id="{D6512890-DD3D-42C4-B679-2302B49FBA10}"/>
+                <a16:creationId xmlns:a16="http://schemas.microsoft.com/office/drawing/2014/main" id="{F700AFE5-CED8-46C3-A589-67293A32C51A}"/>
               </a:ext>
             </a:extLst>
           </p:cNvPr>
@@ -2001,7 +2001,7 @@
     </p:spTree>
     <p:extLst>
       <p:ext uri="{BB962C8B-B14F-4D97-AF65-F5344CB8AC3E}">
-        <p14:creationId xmlns:p14="http://schemas.microsoft.com/office/powerpoint/2010/main" val="1341869447"/>
+        <p14:creationId xmlns:p14="http://schemas.microsoft.com/office/powerpoint/2010/main" val="2062351547"/>
       </p:ext>
     </p:extLst>
   </p:cSld>
@@ -2032,7 +2032,7 @@
           <p:cNvPr id="9" name="text-4">
             <a:extLst xmlns:a="http://schemas.openxmlformats.org/drawingml/2006/main">
               <a:ext uri="{FF2B5EF4-FFF2-40B4-BE49-F238E27FC236}">
-                <a16:creationId xmlns:a16="http://schemas.microsoft.com/office/drawing/2014/main" id="{E96EE5B7-D649-4A4A-8D20-F774607162BF}"/>
+                <a16:creationId xmlns:a16="http://schemas.microsoft.com/office/drawing/2014/main" id="{6D4E77AE-F60D-44DD-93A5-01DF460EDBE9}"/>
               </a:ext>
             </a:extLst>
           </p:cNvPr>
@@ -2089,7 +2089,7 @@
           <p:cNvPr id="2" name="text-5">
             <a:extLst xmlns:a="http://schemas.openxmlformats.org/drawingml/2006/main">
               <a:ext uri="{FF2B5EF4-FFF2-40B4-BE49-F238E27FC236}">
-                <a16:creationId xmlns:a16="http://schemas.microsoft.com/office/drawing/2014/main" id="{FAE3FA6F-9AC2-4943-A3BE-BA10BD3F7AD4}"/>
+                <a16:creationId xmlns:a16="http://schemas.microsoft.com/office/drawing/2014/main" id="{6B95B78C-86E8-46F3-940C-EB550F2FA29F}"/>
               </a:ext>
             </a:extLst>
           </p:cNvPr>
@@ -2146,7 +2146,7 @@
           <p:cNvPr id="3" name="text-6">
             <a:extLst xmlns:a="http://schemas.openxmlformats.org/drawingml/2006/main">
               <a:ext uri="{FF2B5EF4-FFF2-40B4-BE49-F238E27FC236}">
-                <a16:creationId xmlns:a16="http://schemas.microsoft.com/office/drawing/2014/main" id="{39E3FE06-FF8D-44EC-B3CC-2D7BB497AD84}"/>
+                <a16:creationId xmlns:a16="http://schemas.microsoft.com/office/drawing/2014/main" id="{62336D31-4387-49C5-98CE-B62D2C7BFD40}"/>
               </a:ext>
             </a:extLst>
           </p:cNvPr>
@@ -2249,7 +2249,7 @@
           <p:cNvPr id="4" name="text-7">
             <a:extLst xmlns:a="http://schemas.openxmlformats.org/drawingml/2006/main">
               <a:ext uri="{FF2B5EF4-FFF2-40B4-BE49-F238E27FC236}">
-                <a16:creationId xmlns:a16="http://schemas.microsoft.com/office/drawing/2014/main" id="{759B6C23-2D73-4C71-B7AB-F22CA631C617}"/>
+                <a16:creationId xmlns:a16="http://schemas.microsoft.com/office/drawing/2014/main" id="{CE59F3C6-1E5C-40DA-A5A5-AAD4E5E74795}"/>
               </a:ext>
             </a:extLst>
           </p:cNvPr>
@@ -2329,7 +2329,7 @@
           <p:cNvPr id="5" name="text-8">
             <a:extLst xmlns:a="http://schemas.openxmlformats.org/drawingml/2006/main">
               <a:ext uri="{FF2B5EF4-FFF2-40B4-BE49-F238E27FC236}">
-                <a16:creationId xmlns:a16="http://schemas.microsoft.com/office/drawing/2014/main" id="{60487845-6758-47E9-AA17-91CD608D7B75}"/>
+                <a16:creationId xmlns:a16="http://schemas.microsoft.com/office/drawing/2014/main" id="{49500EB3-0CE9-418A-B633-381EB16041D8}"/>
               </a:ext>
             </a:extLst>
           </p:cNvPr>
@@ -2386,7 +2386,7 @@
           <p:cNvPr id="6" name="text-9">
             <a:extLst xmlns:a="http://schemas.openxmlformats.org/drawingml/2006/main">
               <a:ext uri="{FF2B5EF4-FFF2-40B4-BE49-F238E27FC236}">
-                <a16:creationId xmlns:a16="http://schemas.microsoft.com/office/drawing/2014/main" id="{E9664668-164A-4154-96FB-320129B31225}"/>
+                <a16:creationId xmlns:a16="http://schemas.microsoft.com/office/drawing/2014/main" id="{F2613990-42A9-41B8-AD8B-B8ADEB328959}"/>
               </a:ext>
             </a:extLst>
           </p:cNvPr>
@@ -2489,7 +2489,7 @@
           <p:cNvPr id="7" name="text-10">
             <a:extLst xmlns:a="http://schemas.openxmlformats.org/drawingml/2006/main">
               <a:ext uri="{FF2B5EF4-FFF2-40B4-BE49-F238E27FC236}">
-                <a16:creationId xmlns:a16="http://schemas.microsoft.com/office/drawing/2014/main" id="{7CEF4C5D-5495-4046-8071-325943111C71}"/>
+                <a16:creationId xmlns:a16="http://schemas.microsoft.com/office/drawing/2014/main" id="{26C5B378-BB81-40E3-9013-D149A2A382B4}"/>
               </a:ext>
             </a:extLst>
           </p:cNvPr>
@@ -2569,7 +2569,7 @@
           <p:cNvPr id="8" name="text-11">
             <a:extLst xmlns:a="http://schemas.openxmlformats.org/drawingml/2006/main">
               <a:ext uri="{FF2B5EF4-FFF2-40B4-BE49-F238E27FC236}">
-                <a16:creationId xmlns:a16="http://schemas.microsoft.com/office/drawing/2014/main" id="{33F1860C-8EB1-4D45-A270-A1E3AF1701A4}"/>
+                <a16:creationId xmlns:a16="http://schemas.microsoft.com/office/drawing/2014/main" id="{0A52AC9E-08A4-497E-AE76-C457835BA46E}"/>
               </a:ext>
             </a:extLst>
           </p:cNvPr>
@@ -2624,7 +2624,7 @@
     </p:spTree>
     <p:extLst>
       <p:ext uri="{BB962C8B-B14F-4D97-AF65-F5344CB8AC3E}">
-        <p14:creationId xmlns:p14="http://schemas.microsoft.com/office/powerpoint/2010/main" val="223280764"/>
+        <p14:creationId xmlns:p14="http://schemas.microsoft.com/office/powerpoint/2010/main" val="532628508"/>
       </p:ext>
     </p:extLst>
   </p:cSld>
@@ -2655,7 +2655,7 @@
           <p:cNvPr id="7" name="text-12">
             <a:extLst xmlns:a="http://schemas.openxmlformats.org/drawingml/2006/main">
               <a:ext uri="{FF2B5EF4-FFF2-40B4-BE49-F238E27FC236}">
-                <a16:creationId xmlns:a16="http://schemas.microsoft.com/office/drawing/2014/main" id="{964E4375-FADE-4208-9CA6-19EA043C68A6}"/>
+                <a16:creationId xmlns:a16="http://schemas.microsoft.com/office/drawing/2014/main" id="{AD3B4A4D-C22A-49D1-8B84-8D29EE936567}"/>
               </a:ext>
             </a:extLst>
           </p:cNvPr>
@@ -2712,7 +2712,7 @@
           <p:cNvPr id="2" name="text-13">
             <a:extLst xmlns:a="http://schemas.openxmlformats.org/drawingml/2006/main">
               <a:ext uri="{FF2B5EF4-FFF2-40B4-BE49-F238E27FC236}">
-                <a16:creationId xmlns:a16="http://schemas.microsoft.com/office/drawing/2014/main" id="{87630308-2383-4FE0-A630-1FD5087A2607}"/>
+                <a16:creationId xmlns:a16="http://schemas.microsoft.com/office/drawing/2014/main" id="{B31EE726-2EF9-473D-A777-119ED7F7FB17}"/>
               </a:ext>
             </a:extLst>
           </p:cNvPr>
@@ -2769,7 +2769,7 @@
           <p:cNvPr id="3" name="text-14">
             <a:extLst xmlns:a="http://schemas.openxmlformats.org/drawingml/2006/main">
               <a:ext uri="{FF2B5EF4-FFF2-40B4-BE49-F238E27FC236}">
-                <a16:creationId xmlns:a16="http://schemas.microsoft.com/office/drawing/2014/main" id="{27B04038-BA60-4E88-B2A2-9B564C541531}"/>
+                <a16:creationId xmlns:a16="http://schemas.microsoft.com/office/drawing/2014/main" id="{71A8CFF9-1091-4F5F-80F1-0464394DE9DD}"/>
               </a:ext>
             </a:extLst>
           </p:cNvPr>
@@ -2895,7 +2895,7 @@
           <p:cNvPr id="4" name="text-15">
             <a:extLst xmlns:a="http://schemas.openxmlformats.org/drawingml/2006/main">
               <a:ext uri="{FF2B5EF4-FFF2-40B4-BE49-F238E27FC236}">
-                <a16:creationId xmlns:a16="http://schemas.microsoft.com/office/drawing/2014/main" id="{063D1585-7DC9-4E56-82B4-A3B827026834}"/>
+                <a16:creationId xmlns:a16="http://schemas.microsoft.com/office/drawing/2014/main" id="{6450ACF1-92C2-4366-8D94-DBBE8EA30ADC}"/>
               </a:ext>
             </a:extLst>
           </p:cNvPr>
@@ -2952,7 +2952,7 @@
           <p:cNvPr id="5" name="text-16">
             <a:extLst xmlns:a="http://schemas.openxmlformats.org/drawingml/2006/main">
               <a:ext uri="{FF2B5EF4-FFF2-40B4-BE49-F238E27FC236}">
-                <a16:creationId xmlns:a16="http://schemas.microsoft.com/office/drawing/2014/main" id="{889F189E-5DDD-450F-9FCE-B4BB77D16AFA}"/>
+                <a16:creationId xmlns:a16="http://schemas.microsoft.com/office/drawing/2014/main" id="{DFCA1302-2D5D-42FD-8114-28A5F53C8076}"/>
               </a:ext>
             </a:extLst>
           </p:cNvPr>
@@ -3101,7 +3101,7 @@
           <p:cNvPr id="6" name="text-17">
             <a:extLst xmlns:a="http://schemas.openxmlformats.org/drawingml/2006/main">
               <a:ext uri="{FF2B5EF4-FFF2-40B4-BE49-F238E27FC236}">
-                <a16:creationId xmlns:a16="http://schemas.microsoft.com/office/drawing/2014/main" id="{365995C5-BAD0-4E4D-87A8-2E11CFDB8759}"/>
+                <a16:creationId xmlns:a16="http://schemas.microsoft.com/office/drawing/2014/main" id="{44049E03-FD09-49A2-A0A5-89D3053796AE}"/>
               </a:ext>
             </a:extLst>
           </p:cNvPr>
@@ -3156,7 +3156,7 @@
     </p:spTree>
     <p:extLst>
       <p:ext uri="{BB962C8B-B14F-4D97-AF65-F5344CB8AC3E}">
-        <p14:creationId xmlns:p14="http://schemas.microsoft.com/office/powerpoint/2010/main" val="1988090216"/>
+        <p14:creationId xmlns:p14="http://schemas.microsoft.com/office/powerpoint/2010/main" val="1414575457"/>
       </p:ext>
     </p:extLst>
   </p:cSld>
@@ -3187,7 +3187,7 @@
           <p:cNvPr id="10" name="text-18">
             <a:extLst xmlns:a="http://schemas.openxmlformats.org/drawingml/2006/main">
               <a:ext uri="{FF2B5EF4-FFF2-40B4-BE49-F238E27FC236}">
-                <a16:creationId xmlns:a16="http://schemas.microsoft.com/office/drawing/2014/main" id="{18B43892-5014-41B8-B217-2AF6F353EC02}"/>
+                <a16:creationId xmlns:a16="http://schemas.microsoft.com/office/drawing/2014/main" id="{49437FEE-6A70-4223-AA4B-10E75CFFEE09}"/>
               </a:ext>
             </a:extLst>
           </p:cNvPr>
@@ -3244,7 +3244,7 @@
           <p:cNvPr id="2" name="text-19">
             <a:extLst xmlns:a="http://schemas.openxmlformats.org/drawingml/2006/main">
               <a:ext uri="{FF2B5EF4-FFF2-40B4-BE49-F238E27FC236}">
-                <a16:creationId xmlns:a16="http://schemas.microsoft.com/office/drawing/2014/main" id="{A198911D-FB75-44A2-9E71-8426D07E5D1F}"/>
+                <a16:creationId xmlns:a16="http://schemas.microsoft.com/office/drawing/2014/main" id="{22FFBF01-D7F3-4A71-B3F5-28E7820E1BF8}"/>
               </a:ext>
             </a:extLst>
           </p:cNvPr>
@@ -3301,7 +3301,7 @@
           <p:cNvPr id="3" name="text-20">
             <a:extLst xmlns:a="http://schemas.openxmlformats.org/drawingml/2006/main">
               <a:ext uri="{FF2B5EF4-FFF2-40B4-BE49-F238E27FC236}">
-                <a16:creationId xmlns:a16="http://schemas.microsoft.com/office/drawing/2014/main" id="{B5C21E72-33D4-4834-A9F6-F3E4EE5E6FF1}"/>
+                <a16:creationId xmlns:a16="http://schemas.microsoft.com/office/drawing/2014/main" id="{3DE25B41-FAE6-4395-B120-146F2DEE5662}"/>
               </a:ext>
             </a:extLst>
           </p:cNvPr>
@@ -3358,7 +3358,7 @@
           <p:cNvPr id="4" name="text-21">
             <a:extLst xmlns:a="http://schemas.openxmlformats.org/drawingml/2006/main">
               <a:ext uri="{FF2B5EF4-FFF2-40B4-BE49-F238E27FC236}">
-                <a16:creationId xmlns:a16="http://schemas.microsoft.com/office/drawing/2014/main" id="{1E175E71-B76D-45F5-9234-5BB14A7EAE80}"/>
+                <a16:creationId xmlns:a16="http://schemas.microsoft.com/office/drawing/2014/main" id="{10227E02-6794-4DAD-8215-89114FCD72E7}"/>
               </a:ext>
             </a:extLst>
           </p:cNvPr>
@@ -3415,7 +3415,7 @@
           <p:cNvPr id="5" name="text-22">
             <a:extLst xmlns:a="http://schemas.openxmlformats.org/drawingml/2006/main">
               <a:ext uri="{FF2B5EF4-FFF2-40B4-BE49-F238E27FC236}">
-                <a16:creationId xmlns:a16="http://schemas.microsoft.com/office/drawing/2014/main" id="{775082BE-1C92-42E6-8EF8-17B1FB20DF31}"/>
+                <a16:creationId xmlns:a16="http://schemas.microsoft.com/office/drawing/2014/main" id="{1C4A6338-026F-43AF-A7B6-15E4AA4B6526}"/>
               </a:ext>
             </a:extLst>
           </p:cNvPr>
@@ -3472,7 +3472,7 @@
           <p:cNvPr id="6" name="text-23">
             <a:extLst xmlns:a="http://schemas.openxmlformats.org/drawingml/2006/main">
               <a:ext uri="{FF2B5EF4-FFF2-40B4-BE49-F238E27FC236}">
-                <a16:creationId xmlns:a16="http://schemas.microsoft.com/office/drawing/2014/main" id="{DFE7EF34-CD58-44AA-B4F9-3823F490ABD3}"/>
+                <a16:creationId xmlns:a16="http://schemas.microsoft.com/office/drawing/2014/main" id="{F6DEE47C-96FA-4C4F-9E70-4CFE61E1B38F}"/>
               </a:ext>
             </a:extLst>
           </p:cNvPr>
@@ -3552,7 +3552,7 @@
           <p:cNvPr id="7" name="text-24">
             <a:extLst xmlns:a="http://schemas.openxmlformats.org/drawingml/2006/main">
               <a:ext uri="{FF2B5EF4-FFF2-40B4-BE49-F238E27FC236}">
-                <a16:creationId xmlns:a16="http://schemas.microsoft.com/office/drawing/2014/main" id="{D065A64E-0389-4BBE-B213-59A650E1C4EF}"/>
+                <a16:creationId xmlns:a16="http://schemas.microsoft.com/office/drawing/2014/main" id="{2785CF7A-5D9A-4960-AB61-BE098877FDE1}"/>
               </a:ext>
             </a:extLst>
           </p:cNvPr>
@@ -3613,7 +3613,7 @@
           <p:nvPr/>
         </p:nvPicPr>
         <p:blipFill>
-          <a:blip xmlns:r="http://schemas.openxmlformats.org/officeDocument/2006/relationships" xmlns:a="http://schemas.openxmlformats.org/drawingml/2006/main" r:embed="R861d38d4b83f4cc1"/>
+          <a:blip xmlns:r="http://schemas.openxmlformats.org/officeDocument/2006/relationships" xmlns:a="http://schemas.openxmlformats.org/drawingml/2006/main" r:embed="R049f58a3b7ed4f67"/>
           <a:stretch xmlns:a="http://schemas.openxmlformats.org/drawingml/2006/main"/>
         </p:blipFill>
         <p:spPr>
@@ -3631,7 +3631,7 @@
           <p:cNvPr id="9" name="text-25">
             <a:extLst xmlns:a="http://schemas.openxmlformats.org/drawingml/2006/main">
               <a:ext uri="{FF2B5EF4-FFF2-40B4-BE49-F238E27FC236}">
-                <a16:creationId xmlns:a16="http://schemas.microsoft.com/office/drawing/2014/main" id="{273F5650-7FBA-4AC7-AE1B-48283D216A88}"/>
+                <a16:creationId xmlns:a16="http://schemas.microsoft.com/office/drawing/2014/main" id="{BBE0B5CF-A7A9-4C8A-A1B8-ED0A5FFFF195}"/>
               </a:ext>
             </a:extLst>
           </p:cNvPr>
@@ -3686,7 +3686,7 @@
     </p:spTree>
     <p:extLst>
       <p:ext uri="{BB962C8B-B14F-4D97-AF65-F5344CB8AC3E}">
-        <p14:creationId xmlns:p14="http://schemas.microsoft.com/office/powerpoint/2010/main" val="620449471"/>
+        <p14:creationId xmlns:p14="http://schemas.microsoft.com/office/powerpoint/2010/main" val="415543206"/>
       </p:ext>
     </p:extLst>
   </p:cSld>
@@ -3717,7 +3717,7 @@
           <p:cNvPr id="16" name="text-26">
             <a:extLst xmlns:a="http://schemas.openxmlformats.org/drawingml/2006/main">
               <a:ext uri="{FF2B5EF4-FFF2-40B4-BE49-F238E27FC236}">
-                <a16:creationId xmlns:a16="http://schemas.microsoft.com/office/drawing/2014/main" id="{15AB9691-24C2-4EC8-8CDB-27EF6A4D05A3}"/>
+                <a16:creationId xmlns:a16="http://schemas.microsoft.com/office/drawing/2014/main" id="{D4D39F4B-04D1-4996-97B0-0082AE3B1666}"/>
               </a:ext>
             </a:extLst>
           </p:cNvPr>
@@ -3774,7 +3774,7 @@
           <p:cNvPr id="2" name="text-27">
             <a:extLst xmlns:a="http://schemas.openxmlformats.org/drawingml/2006/main">
               <a:ext uri="{FF2B5EF4-FFF2-40B4-BE49-F238E27FC236}">
-                <a16:creationId xmlns:a16="http://schemas.microsoft.com/office/drawing/2014/main" id="{0C2DEFCB-B7DF-488C-AC64-FBB2BF7E1D0E}"/>
+                <a16:creationId xmlns:a16="http://schemas.microsoft.com/office/drawing/2014/main" id="{07492AAB-2662-4897-9FEA-0E43FC0EB4D6}"/>
               </a:ext>
             </a:extLst>
           </p:cNvPr>
@@ -3831,7 +3831,7 @@
           <p:cNvPr id="3" name="mechanism-28">
             <a:extLst xmlns:a="http://schemas.openxmlformats.org/drawingml/2006/main">
               <a:ext uri="{FF2B5EF4-FFF2-40B4-BE49-F238E27FC236}">
-                <a16:creationId xmlns:a16="http://schemas.microsoft.com/office/drawing/2014/main" id="{D920A20C-2A60-447E-AAC2-394A7107FCED}"/>
+                <a16:creationId xmlns:a16="http://schemas.microsoft.com/office/drawing/2014/main" id="{4CA69C7E-41F9-46CD-9E88-DAC29322614A}"/>
               </a:ext>
             </a:extLst>
           </p:cNvPr>
@@ -3916,7 +3916,7 @@
           <p:cNvPr id="4" name="mechanism-29">
             <a:extLst xmlns:a="http://schemas.openxmlformats.org/drawingml/2006/main">
               <a:ext uri="{FF2B5EF4-FFF2-40B4-BE49-F238E27FC236}">
-                <a16:creationId xmlns:a16="http://schemas.microsoft.com/office/drawing/2014/main" id="{90F6B6F9-3997-41A3-A04D-21F50BB5823E}"/>
+                <a16:creationId xmlns:a16="http://schemas.microsoft.com/office/drawing/2014/main" id="{7C4A3E36-4FA1-48D3-BBEF-D4CCE1D4942C}"/>
               </a:ext>
             </a:extLst>
           </p:cNvPr>
@@ -4024,7 +4024,7 @@
           <p:cNvPr id="5" name="mechanism-30">
             <a:extLst xmlns:a="http://schemas.openxmlformats.org/drawingml/2006/main">
               <a:ext uri="{FF2B5EF4-FFF2-40B4-BE49-F238E27FC236}">
-                <a16:creationId xmlns:a16="http://schemas.microsoft.com/office/drawing/2014/main" id="{3F41A89C-7C21-42B0-99A8-D9C568902A5C}"/>
+                <a16:creationId xmlns:a16="http://schemas.microsoft.com/office/drawing/2014/main" id="{8BE42A84-D14A-4ED2-A4B6-6557A922F4FA}"/>
               </a:ext>
             </a:extLst>
           </p:cNvPr>
@@ -4161,7 +4161,7 @@
           <p:cNvPr id="8" name="text-31">
             <a:extLst xmlns:a="http://schemas.openxmlformats.org/drawingml/2006/main">
               <a:ext uri="{FF2B5EF4-FFF2-40B4-BE49-F238E27FC236}">
-                <a16:creationId xmlns:a16="http://schemas.microsoft.com/office/drawing/2014/main" id="{2C5FEA4C-C619-4792-8EAE-B25144EF6BB0}"/>
+                <a16:creationId xmlns:a16="http://schemas.microsoft.com/office/drawing/2014/main" id="{D25E91B1-4353-4A17-B812-A4B33CA4C542}"/>
               </a:ext>
             </a:extLst>
           </p:cNvPr>
@@ -4218,7 +4218,7 @@
           <p:cNvPr id="9" name="mechanism-32">
             <a:extLst xmlns:a="http://schemas.openxmlformats.org/drawingml/2006/main">
               <a:ext uri="{FF2B5EF4-FFF2-40B4-BE49-F238E27FC236}">
-                <a16:creationId xmlns:a16="http://schemas.microsoft.com/office/drawing/2014/main" id="{D1D28B2C-28B0-4E94-9EE0-198609C7302A}"/>
+                <a16:creationId xmlns:a16="http://schemas.microsoft.com/office/drawing/2014/main" id="{86C35233-BDE9-4064-BA76-5CEC2D5439FE}"/>
               </a:ext>
             </a:extLst>
           </p:cNvPr>
@@ -4303,7 +4303,7 @@
           <p:cNvPr id="10" name="mechanism-33">
             <a:extLst xmlns:a="http://schemas.openxmlformats.org/drawingml/2006/main">
               <a:ext uri="{FF2B5EF4-FFF2-40B4-BE49-F238E27FC236}">
-                <a16:creationId xmlns:a16="http://schemas.microsoft.com/office/drawing/2014/main" id="{9BC014FE-DFD0-41FD-8C62-B89E6BF6AD7A}"/>
+                <a16:creationId xmlns:a16="http://schemas.microsoft.com/office/drawing/2014/main" id="{8BE69EA4-A85E-4083-B364-2D0666DD72E6}"/>
               </a:ext>
             </a:extLst>
           </p:cNvPr>
@@ -4388,7 +4388,7 @@
           <p:cNvPr id="11" name="mechanism-34">
             <a:extLst xmlns:a="http://schemas.openxmlformats.org/drawingml/2006/main">
               <a:ext uri="{FF2B5EF4-FFF2-40B4-BE49-F238E27FC236}">
-                <a16:creationId xmlns:a16="http://schemas.microsoft.com/office/drawing/2014/main" id="{29007595-8937-48EB-961A-675430C494AF}"/>
+                <a16:creationId xmlns:a16="http://schemas.microsoft.com/office/drawing/2014/main" id="{A6DBBA01-B1CE-467C-8CC6-9DCC1B17CF34}"/>
               </a:ext>
             </a:extLst>
           </p:cNvPr>
@@ -4574,7 +4574,7 @@
           <p:cNvPr id="15" name="text-35">
             <a:extLst xmlns:a="http://schemas.openxmlformats.org/drawingml/2006/main">
               <a:ext uri="{FF2B5EF4-FFF2-40B4-BE49-F238E27FC236}">
-                <a16:creationId xmlns:a16="http://schemas.microsoft.com/office/drawing/2014/main" id="{ABF0580A-56F9-4CA1-B2B6-5231A0F0D24A}"/>
+                <a16:creationId xmlns:a16="http://schemas.microsoft.com/office/drawing/2014/main" id="{EB6D1332-D6CD-4781-A1EC-E60CDDAAD16D}"/>
               </a:ext>
             </a:extLst>
           </p:cNvPr>
@@ -4629,7 +4629,7 @@
     </p:spTree>
     <p:extLst>
       <p:ext uri="{BB962C8B-B14F-4D97-AF65-F5344CB8AC3E}">
-        <p14:creationId xmlns:p14="http://schemas.microsoft.com/office/powerpoint/2010/main" val="775573497"/>
+        <p14:creationId xmlns:p14="http://schemas.microsoft.com/office/powerpoint/2010/main" val="1447046964"/>
       </p:ext>
     </p:extLst>
   </p:cSld>
@@ -4660,7 +4660,7 @@
           <p:cNvPr id="7" name="text-36">
             <a:extLst xmlns:a="http://schemas.openxmlformats.org/drawingml/2006/main">
               <a:ext uri="{FF2B5EF4-FFF2-40B4-BE49-F238E27FC236}">
-                <a16:creationId xmlns:a16="http://schemas.microsoft.com/office/drawing/2014/main" id="{CB1F5D67-97FC-4D03-9B3F-1034F3BA1A4C}"/>
+                <a16:creationId xmlns:a16="http://schemas.microsoft.com/office/drawing/2014/main" id="{4C4B493F-E4A9-4E07-A2AA-67C39CE2C23D}"/>
               </a:ext>
             </a:extLst>
           </p:cNvPr>
@@ -4721,7 +4721,7 @@
           <p:nvPr/>
         </p:nvPicPr>
         <p:blipFill>
-          <a:blip xmlns:r="http://schemas.openxmlformats.org/officeDocument/2006/relationships" xmlns:a="http://schemas.openxmlformats.org/drawingml/2006/main" r:embed="R7f53c38106a5475c"/>
+          <a:blip xmlns:r="http://schemas.openxmlformats.org/officeDocument/2006/relationships" xmlns:a="http://schemas.openxmlformats.org/drawingml/2006/main" r:embed="Rb3da4c814b9a4055"/>
           <a:stretch xmlns:a="http://schemas.openxmlformats.org/drawingml/2006/main"/>
         </p:blipFill>
         <p:spPr>
@@ -4739,7 +4739,7 @@
           <p:cNvPr id="3" name="text-37">
             <a:extLst xmlns:a="http://schemas.openxmlformats.org/drawingml/2006/main">
               <a:ext uri="{FF2B5EF4-FFF2-40B4-BE49-F238E27FC236}">
-                <a16:creationId xmlns:a16="http://schemas.microsoft.com/office/drawing/2014/main" id="{74898AB4-1FB7-414C-ABD2-9F06D3101B23}"/>
+                <a16:creationId xmlns:a16="http://schemas.microsoft.com/office/drawing/2014/main" id="{647DDEA1-D527-4B79-9DD1-65516EDA179A}"/>
               </a:ext>
             </a:extLst>
           </p:cNvPr>
@@ -4796,7 +4796,7 @@
           <p:cNvPr id="4" name="text-38">
             <a:extLst xmlns:a="http://schemas.openxmlformats.org/drawingml/2006/main">
               <a:ext uri="{FF2B5EF4-FFF2-40B4-BE49-F238E27FC236}">
-                <a16:creationId xmlns:a16="http://schemas.microsoft.com/office/drawing/2014/main" id="{62841EF8-2C54-47D1-8C7C-E21CBAB0AC42}"/>
+                <a16:creationId xmlns:a16="http://schemas.microsoft.com/office/drawing/2014/main" id="{55794A56-F4E8-44A3-98AD-E7DAFEDE9750}"/>
               </a:ext>
             </a:extLst>
           </p:cNvPr>
@@ -4899,7 +4899,7 @@
           <p:cNvPr id="5" name="text-39">
             <a:extLst xmlns:a="http://schemas.openxmlformats.org/drawingml/2006/main">
               <a:ext uri="{FF2B5EF4-FFF2-40B4-BE49-F238E27FC236}">
-                <a16:creationId xmlns:a16="http://schemas.microsoft.com/office/drawing/2014/main" id="{ED64070F-5D79-4504-BEEB-DC87AEA4DFC8}"/>
+                <a16:creationId xmlns:a16="http://schemas.microsoft.com/office/drawing/2014/main" id="{E0CBF079-5802-48A1-A1AE-44034CB473FC}"/>
               </a:ext>
             </a:extLst>
           </p:cNvPr>
@@ -5002,7 +5002,7 @@
           <p:cNvPr id="6" name="text-40">
             <a:extLst xmlns:a="http://schemas.openxmlformats.org/drawingml/2006/main">
               <a:ext uri="{FF2B5EF4-FFF2-40B4-BE49-F238E27FC236}">
-                <a16:creationId xmlns:a16="http://schemas.microsoft.com/office/drawing/2014/main" id="{88B21816-91D2-4E80-8673-7B94F59B31CE}"/>
+                <a16:creationId xmlns:a16="http://schemas.microsoft.com/office/drawing/2014/main" id="{67BDE9BF-75FE-48F0-ADCB-AF3A72EE2BAA}"/>
               </a:ext>
             </a:extLst>
           </p:cNvPr>
@@ -5057,7 +5057,7 @@
     </p:spTree>
     <p:extLst>
       <p:ext uri="{BB962C8B-B14F-4D97-AF65-F5344CB8AC3E}">
-        <p14:creationId xmlns:p14="http://schemas.microsoft.com/office/powerpoint/2010/main" val="2062279647"/>
+        <p14:creationId xmlns:p14="http://schemas.microsoft.com/office/powerpoint/2010/main" val="462551977"/>
       </p:ext>
     </p:extLst>
   </p:cSld>
@@ -5088,7 +5088,7 @@
           <p:cNvPr id="9" name="text-41">
             <a:extLst xmlns:a="http://schemas.openxmlformats.org/drawingml/2006/main">
               <a:ext uri="{FF2B5EF4-FFF2-40B4-BE49-F238E27FC236}">
-                <a16:creationId xmlns:a16="http://schemas.microsoft.com/office/drawing/2014/main" id="{E0960EED-1F4B-46A2-9F83-A3F153B6BEF4}"/>
+                <a16:creationId xmlns:a16="http://schemas.microsoft.com/office/drawing/2014/main" id="{27A98DA8-C97A-4302-B763-88D179FD7C11}"/>
               </a:ext>
             </a:extLst>
           </p:cNvPr>
@@ -5145,7 +5145,7 @@
           <p:cNvPr id="2" name="text-42">
             <a:extLst xmlns:a="http://schemas.openxmlformats.org/drawingml/2006/main">
               <a:ext uri="{FF2B5EF4-FFF2-40B4-BE49-F238E27FC236}">
-                <a16:creationId xmlns:a16="http://schemas.microsoft.com/office/drawing/2014/main" id="{1D5ECA0B-EB1A-4095-995A-62C2EA55A235}"/>
+                <a16:creationId xmlns:a16="http://schemas.microsoft.com/office/drawing/2014/main" id="{5F489826-7C7E-462C-9E64-0110EF06966A}"/>
               </a:ext>
             </a:extLst>
           </p:cNvPr>
@@ -5202,7 +5202,7 @@
           <p:cNvPr id="3" name="text-43">
             <a:extLst xmlns:a="http://schemas.openxmlformats.org/drawingml/2006/main">
               <a:ext uri="{FF2B5EF4-FFF2-40B4-BE49-F238E27FC236}">
-                <a16:creationId xmlns:a16="http://schemas.microsoft.com/office/drawing/2014/main" id="{AA896FBB-51BB-4C40-A2BC-55029DB76537}"/>
+                <a16:creationId xmlns:a16="http://schemas.microsoft.com/office/drawing/2014/main" id="{A403410B-363D-4EC2-BAD6-5A19883A0250}"/>
               </a:ext>
             </a:extLst>
           </p:cNvPr>
@@ -5282,7 +5282,7 @@
           <p:cNvPr id="4" name="text-44">
             <a:extLst xmlns:a="http://schemas.openxmlformats.org/drawingml/2006/main">
               <a:ext uri="{FF2B5EF4-FFF2-40B4-BE49-F238E27FC236}">
-                <a16:creationId xmlns:a16="http://schemas.microsoft.com/office/drawing/2014/main" id="{C1C10EA1-5E52-4B9B-A77B-726D9754C9E8}"/>
+                <a16:creationId xmlns:a16="http://schemas.microsoft.com/office/drawing/2014/main" id="{95E4C036-55EF-4669-8BAE-7AA934E488D1}"/>
               </a:ext>
             </a:extLst>
           </p:cNvPr>
@@ -5385,7 +5385,7 @@
           <p:cNvPr id="5" name="text-45">
             <a:extLst xmlns:a="http://schemas.openxmlformats.org/drawingml/2006/main">
               <a:ext uri="{FF2B5EF4-FFF2-40B4-BE49-F238E27FC236}">
-                <a16:creationId xmlns:a16="http://schemas.microsoft.com/office/drawing/2014/main" id="{859F492F-1A2F-469C-9B98-0BFD77F1B101}"/>
+                <a16:creationId xmlns:a16="http://schemas.microsoft.com/office/drawing/2014/main" id="{DC2DBA41-D77F-413E-ABFB-FDD49D808FF0}"/>
               </a:ext>
             </a:extLst>
           </p:cNvPr>
@@ -5469,7 +5469,7 @@
           <p:nvPr/>
         </p:nvPicPr>
         <p:blipFill>
-          <a:blip xmlns:r="http://schemas.openxmlformats.org/officeDocument/2006/relationships" xmlns:a="http://schemas.openxmlformats.org/drawingml/2006/main" r:embed="Rd24123724671439b"/>
+          <a:blip xmlns:r="http://schemas.openxmlformats.org/officeDocument/2006/relationships" xmlns:a="http://schemas.openxmlformats.org/drawingml/2006/main" r:embed="Ra8bdb9041d904a7b"/>
           <a:stretch xmlns:a="http://schemas.openxmlformats.org/drawingml/2006/main"/>
         </p:blipFill>
         <p:spPr>
@@ -5487,7 +5487,7 @@
           <p:cNvPr id="7" name="text-46">
             <a:extLst xmlns:a="http://schemas.openxmlformats.org/drawingml/2006/main">
               <a:ext uri="{FF2B5EF4-FFF2-40B4-BE49-F238E27FC236}">
-                <a16:creationId xmlns:a16="http://schemas.microsoft.com/office/drawing/2014/main" id="{AC555986-6473-4EB7-9FBD-159C70EC461A}"/>
+                <a16:creationId xmlns:a16="http://schemas.microsoft.com/office/drawing/2014/main" id="{0978CF78-F576-4760-B6D6-05FF7032915D}"/>
               </a:ext>
             </a:extLst>
           </p:cNvPr>
@@ -5590,7 +5590,7 @@
           <p:cNvPr id="8" name="text-47">
             <a:extLst xmlns:a="http://schemas.openxmlformats.org/drawingml/2006/main">
               <a:ext uri="{FF2B5EF4-FFF2-40B4-BE49-F238E27FC236}">
-                <a16:creationId xmlns:a16="http://schemas.microsoft.com/office/drawing/2014/main" id="{C4E5DC2D-6188-4042-B05C-68CF8A2F3EC2}"/>
+                <a16:creationId xmlns:a16="http://schemas.microsoft.com/office/drawing/2014/main" id="{4390747E-3633-449E-9A38-AD63C18956D1}"/>
               </a:ext>
             </a:extLst>
           </p:cNvPr>
@@ -5645,7 +5645,7 @@
     </p:spTree>
     <p:extLst>
       <p:ext uri="{BB962C8B-B14F-4D97-AF65-F5344CB8AC3E}">
-        <p14:creationId xmlns:p14="http://schemas.microsoft.com/office/powerpoint/2010/main" val="1670797165"/>
+        <p14:creationId xmlns:p14="http://schemas.microsoft.com/office/powerpoint/2010/main" val="363314864"/>
       </p:ext>
     </p:extLst>
   </p:cSld>
@@ -5676,7 +5676,7 @@
           <p:cNvPr id="9" name="text-48">
             <a:extLst xmlns:a="http://schemas.openxmlformats.org/drawingml/2006/main">
               <a:ext uri="{FF2B5EF4-FFF2-40B4-BE49-F238E27FC236}">
-                <a16:creationId xmlns:a16="http://schemas.microsoft.com/office/drawing/2014/main" id="{8103F26F-E47C-46E0-A1F2-C6B2A2D0DC3A}"/>
+                <a16:creationId xmlns:a16="http://schemas.microsoft.com/office/drawing/2014/main" id="{718923FA-D537-4BA5-9429-633E378A6AF3}"/>
               </a:ext>
             </a:extLst>
           </p:cNvPr>
@@ -5733,7 +5733,7 @@
           <p:cNvPr id="2" name="text-49">
             <a:extLst xmlns:a="http://schemas.openxmlformats.org/drawingml/2006/main">
               <a:ext uri="{FF2B5EF4-FFF2-40B4-BE49-F238E27FC236}">
-                <a16:creationId xmlns:a16="http://schemas.microsoft.com/office/drawing/2014/main" id="{40344203-D62A-4847-A9D5-16C6F028C7A4}"/>
+                <a16:creationId xmlns:a16="http://schemas.microsoft.com/office/drawing/2014/main" id="{B44EE739-BD99-481B-B2CF-5FEC60873730}"/>
               </a:ext>
             </a:extLst>
           </p:cNvPr>
@@ -5790,7 +5790,7 @@
           <p:cNvPr id="3" name="text-50">
             <a:extLst xmlns:a="http://schemas.openxmlformats.org/drawingml/2006/main">
               <a:ext uri="{FF2B5EF4-FFF2-40B4-BE49-F238E27FC236}">
-                <a16:creationId xmlns:a16="http://schemas.microsoft.com/office/drawing/2014/main" id="{8A0A712B-6C72-4714-AD4A-AF3470464F60}"/>
+                <a16:creationId xmlns:a16="http://schemas.microsoft.com/office/drawing/2014/main" id="{CE7B0921-84AA-431A-8E7A-7CA121D7279F}"/>
               </a:ext>
             </a:extLst>
           </p:cNvPr>
@@ -5916,7 +5916,7 @@
           <p:cNvPr id="4" name="text-51">
             <a:extLst xmlns:a="http://schemas.openxmlformats.org/drawingml/2006/main">
               <a:ext uri="{FF2B5EF4-FFF2-40B4-BE49-F238E27FC236}">
-                <a16:creationId xmlns:a16="http://schemas.microsoft.com/office/drawing/2014/main" id="{B2F8DE01-4DE5-4C7C-9667-0616690D177B}"/>
+                <a16:creationId xmlns:a16="http://schemas.microsoft.com/office/drawing/2014/main" id="{068EF590-3E98-4B48-AEC4-4A92EDE2DAA1}"/>
               </a:ext>
             </a:extLst>
           </p:cNvPr>
@@ -5996,7 +5996,7 @@
           <p:cNvPr id="5" name="text-52">
             <a:extLst xmlns:a="http://schemas.openxmlformats.org/drawingml/2006/main">
               <a:ext uri="{FF2B5EF4-FFF2-40B4-BE49-F238E27FC236}">
-                <a16:creationId xmlns:a16="http://schemas.microsoft.com/office/drawing/2014/main" id="{10A84E15-57CB-4107-9CFD-3DCAD2B338C4}"/>
+                <a16:creationId xmlns:a16="http://schemas.microsoft.com/office/drawing/2014/main" id="{06393B3B-BFAE-44BF-8495-E3158E439A31}"/>
               </a:ext>
             </a:extLst>
           </p:cNvPr>
@@ -6076,7 +6076,7 @@
           <p:cNvPr id="6" name="text-53">
             <a:extLst xmlns:a="http://schemas.openxmlformats.org/drawingml/2006/main">
               <a:ext uri="{FF2B5EF4-FFF2-40B4-BE49-F238E27FC236}">
-                <a16:creationId xmlns:a16="http://schemas.microsoft.com/office/drawing/2014/main" id="{C566A640-B823-418E-BB78-33CF8817711D}"/>
+                <a16:creationId xmlns:a16="http://schemas.microsoft.com/office/drawing/2014/main" id="{7122C2FA-805C-4F3C-82BA-24FE0939D643}"/>
               </a:ext>
             </a:extLst>
           </p:cNvPr>
@@ -6133,7 +6133,7 @@
           <p:cNvPr id="7" name="text-54">
             <a:extLst xmlns:a="http://schemas.openxmlformats.org/drawingml/2006/main">
               <a:ext uri="{FF2B5EF4-FFF2-40B4-BE49-F238E27FC236}">
-                <a16:creationId xmlns:a16="http://schemas.microsoft.com/office/drawing/2014/main" id="{B75097BC-AB51-45A5-A103-F54D9F197D38}"/>
+                <a16:creationId xmlns:a16="http://schemas.microsoft.com/office/drawing/2014/main" id="{45688AE7-13D2-451D-98AB-72957426F8A4}"/>
               </a:ext>
             </a:extLst>
           </p:cNvPr>
@@ -6282,7 +6282,7 @@
           <p:cNvPr id="8" name="text-55">
             <a:extLst xmlns:a="http://schemas.openxmlformats.org/drawingml/2006/main">
               <a:ext uri="{FF2B5EF4-FFF2-40B4-BE49-F238E27FC236}">
-                <a16:creationId xmlns:a16="http://schemas.microsoft.com/office/drawing/2014/main" id="{9B14D1FC-E3C0-4DF1-9D59-4B942774676B}"/>
+                <a16:creationId xmlns:a16="http://schemas.microsoft.com/office/drawing/2014/main" id="{E3AB681B-746F-4208-9949-BE5052265B88}"/>
               </a:ext>
             </a:extLst>
           </p:cNvPr>
@@ -6383,7 +6383,7 @@
     </p:spTree>
     <p:extLst>
       <p:ext uri="{BB962C8B-B14F-4D97-AF65-F5344CB8AC3E}">
-        <p14:creationId xmlns:p14="http://schemas.microsoft.com/office/powerpoint/2010/main" val="28184113"/>
+        <p14:creationId xmlns:p14="http://schemas.microsoft.com/office/powerpoint/2010/main" val="554959966"/>
       </p:ext>
     </p:extLst>
   </p:cSld>
@@ -6414,7 +6414,7 @@
           <p:cNvPr id="5" name="text-56">
             <a:extLst xmlns:a="http://schemas.openxmlformats.org/drawingml/2006/main">
               <a:ext uri="{FF2B5EF4-FFF2-40B4-BE49-F238E27FC236}">
-                <a16:creationId xmlns:a16="http://schemas.microsoft.com/office/drawing/2014/main" id="{B2FAE18C-F2ED-4297-A09B-5B752E66B29A}"/>
+                <a16:creationId xmlns:a16="http://schemas.microsoft.com/office/drawing/2014/main" id="{557FC1FC-6FC9-46C0-A9D8-135BA650DA44}"/>
               </a:ext>
             </a:extLst>
           </p:cNvPr>
@@ -6494,7 +6494,7 @@
           <p:cNvPr id="2" name="text-57">
             <a:extLst xmlns:a="http://schemas.openxmlformats.org/drawingml/2006/main">
               <a:ext uri="{FF2B5EF4-FFF2-40B4-BE49-F238E27FC236}">
-                <a16:creationId xmlns:a16="http://schemas.microsoft.com/office/drawing/2014/main" id="{66A98DAA-2F15-4C37-B466-F7D95FAFD4E4}"/>
+                <a16:creationId xmlns:a16="http://schemas.microsoft.com/office/drawing/2014/main" id="{FFECFEF0-9053-444B-96AD-5A1826EEE5AC}"/>
               </a:ext>
             </a:extLst>
           </p:cNvPr>
@@ -6574,7 +6574,7 @@
           <p:cNvPr id="3" name="text-58">
             <a:extLst xmlns:a="http://schemas.openxmlformats.org/drawingml/2006/main">
               <a:ext uri="{FF2B5EF4-FFF2-40B4-BE49-F238E27FC236}">
-                <a16:creationId xmlns:a16="http://schemas.microsoft.com/office/drawing/2014/main" id="{9C752093-1693-477A-B06E-B5055935BC5F}"/>
+                <a16:creationId xmlns:a16="http://schemas.microsoft.com/office/drawing/2014/main" id="{27AC0188-1DA8-4437-9429-CC3237CE5E03}"/>
               </a:ext>
             </a:extLst>
           </p:cNvPr>
@@ -6631,7 +6631,7 @@
           <p:cNvPr id="4" name="text-59">
             <a:extLst xmlns:a="http://schemas.openxmlformats.org/drawingml/2006/main">
               <a:ext uri="{FF2B5EF4-FFF2-40B4-BE49-F238E27FC236}">
-                <a16:creationId xmlns:a16="http://schemas.microsoft.com/office/drawing/2014/main" id="{32AB9294-2A90-4F3D-BE94-5B7A40EF1ACA}"/>
+                <a16:creationId xmlns:a16="http://schemas.microsoft.com/office/drawing/2014/main" id="{7E7B9D5F-99E8-49F4-A9C6-17A6412D2B0E}"/>
               </a:ext>
             </a:extLst>
           </p:cNvPr>
@@ -6709,7 +6709,7 @@
     </p:spTree>
     <p:extLst>
       <p:ext uri="{BB962C8B-B14F-4D97-AF65-F5344CB8AC3E}">
-        <p14:creationId xmlns:p14="http://schemas.microsoft.com/office/powerpoint/2010/main" val="1111055935"/>
+        <p14:creationId xmlns:p14="http://schemas.microsoft.com/office/powerpoint/2010/main" val="79471968"/>
       </p:ext>
     </p:extLst>
   </p:cSld>
